--- a/Voice_to_SOP_ppt_2.pptx
+++ b/Voice_to_SOP_ppt_2.pptx
@@ -9,23 +9,24 @@
     <p:sldId id="258" r:id="rId3"/>
     <p:sldId id="259" r:id="rId4"/>
     <p:sldId id="260" r:id="rId5"/>
-    <p:sldId id="270" r:id="rId19"/>
-    <p:sldId id="271" r:id="rId20"/>
-    <p:sldId id="261" r:id="rId6"/>
-    <p:sldId id="262" r:id="rId7"/>
-    <p:sldId id="263" r:id="rId8"/>
-    <p:sldId id="264" r:id="rId9"/>
-    <p:sldId id="265" r:id="rId10"/>
-    <p:sldId id="272" r:id="rId21"/>
-    <p:sldId id="276" r:id="rId25"/>
-    <p:sldId id="266" r:id="rId11"/>
-    <p:sldId id="273" r:id="rId22"/>
-    <p:sldId id="274" r:id="rId23"/>
-    <p:sldId id="277" r:id="rId26"/>
-    <p:sldId id="267" r:id="rId12"/>
-    <p:sldId id="268" r:id="rId13"/>
-    <p:sldId id="269" r:id="rId14"/>
-    <p:sldId id="275" r:id="rId24"/>
+    <p:sldId id="270" r:id="rId6"/>
+    <p:sldId id="271" r:id="rId7"/>
+    <p:sldId id="261" r:id="rId8"/>
+    <p:sldId id="262" r:id="rId9"/>
+    <p:sldId id="263" r:id="rId10"/>
+    <p:sldId id="264" r:id="rId11"/>
+    <p:sldId id="265" r:id="rId12"/>
+    <p:sldId id="272" r:id="rId13"/>
+    <p:sldId id="276" r:id="rId14"/>
+    <p:sldId id="266" r:id="rId15"/>
+    <p:sldId id="273" r:id="rId16"/>
+    <p:sldId id="274" r:id="rId17"/>
+    <p:sldId id="277" r:id="rId18"/>
+    <p:sldId id="267" r:id="rId19"/>
+    <p:sldId id="268" r:id="rId20"/>
+    <p:sldId id="278" r:id="rId21"/>
+    <p:sldId id="269" r:id="rId22"/>
+    <p:sldId id="275" r:id="rId23"/>
   </p:sldIdLst>
   <p:sldSz cx="9144000" cy="6858000" type="screen4x3"/>
   <p:notesSz cx="6858000" cy="9144000"/>
@@ -124,6 +125,11 @@
       </a:defRPr>
     </a:lvl9pPr>
   </p:defaultTextStyle>
+  <p:extLst>
+    <p:ext uri="{EFAFB233-063F-42B5-8137-9DF3F51BA10A}">
+      <p15:sldGuideLst xmlns:p15="http://schemas.microsoft.com/office/powerpoint/2012/main"/>
+    </p:ext>
+  </p:extLst>
 </p:presentation>
 </file>
 
@@ -825,7 +831,7 @@
                 <a:uFillTx/>
                 <a:latin typeface="Calibri"/>
               </a:rPr>
-              <a:t>8/10/26</a:t>
+              <a:t>10/4/26</a:t>
             </a:fld>
             <a:endParaRPr lang="en-IN" sz="2400" b="0" u="none" strike="noStrike">
               <a:solidFill>
@@ -1744,7 +1750,7 @@
                 <a:uFillTx/>
                 <a:latin typeface="Calibri"/>
               </a:rPr>
-              <a:t>8/10/26</a:t>
+              <a:t>10/4/26</a:t>
             </a:fld>
             <a:endParaRPr lang="en-IN" sz="2400" b="0" u="none" strike="noStrike">
               <a:solidFill>
@@ -3456,7 +3462,7 @@
                 <a:uFillTx/>
                 <a:latin typeface="Calibri"/>
               </a:rPr>
-              <a:t>8</a:t>
+              <a:t>10</a:t>
             </a:fld>
             <a:endParaRPr lang="en-IN" sz="1200"/>
           </a:p>
@@ -4029,7 +4035,7 @@
                 <a:uFillTx/>
                 <a:latin typeface="Calibri"/>
               </a:rPr>
-              <a:t>9</a:t>
+              <a:t>11</a:t>
             </a:fld>
             <a:endParaRPr lang="en-IN" sz="1200"/>
           </a:p>
@@ -4602,7 +4608,7 @@
                 <a:uFillTx/>
                 <a:latin typeface="Calibri"/>
               </a:rPr>
-              <a:t>9</a:t>
+              <a:t>12</a:t>
             </a:fld>
             <a:endParaRPr lang="en-IN" sz="1200"/>
           </a:p>
@@ -4688,7 +4694,7 @@
                 <a:uFillTx/>
                 <a:latin typeface="Times New Roman"/>
               </a:rPr>
-              <a:t>System Architecture</a:t>
+              <a:t>Methodology (contd.)</a:t>
             </a:r>
             <a:endParaRPr lang="en-IN" sz="4000"/>
           </a:p>
@@ -4696,774 +4702,14 @@
       </p:sp>
       <p:sp>
         <p:nvSpPr>
-          <p:cNvPr id="60" name="box60"/>
-          <p:cNvSpPr/>
-          <p:nvPr/>
-        </p:nvSpPr>
-        <p:spPr>
-          <a:xfrm>
-            <a:off x="457200" y="1554480"/>
-            <a:ext cx="1600200" cy="1005840"/>
-          </a:xfrm>
-          <a:prstGeom prst="roundRect">
-            <a:avLst>
-              <a:gd name="adj" fmla="val 12000"/>
-            </a:avLst>
-          </a:prstGeom>
-          <a:solidFill>
-            <a:srgbClr val="E9EDF4"/>
-          </a:solidFill>
-          <a:ln w="12700">
-            <a:solidFill>
-              <a:srgbClr val="8A97A8"/>
-            </a:solidFill>
-          </a:ln>
-        </p:spPr>
-        <p:txBody>
-          <a:bodyPr lIns="45720" tIns="27432" rIns="45720" bIns="27432" anchor="ctr">
-            <a:normAutofit/>
-          </a:bodyPr>
-          <a:lstStyle/>
-          <a:p>
-            <a:pPr algn="ctr">
-              <a:lnSpc>
-                <a:spcPct val="100000"/>
-              </a:lnSpc>
-              <a:buNone/>
-            </a:pPr>
-            <a:r>
-              <a:rPr lang="en-US" sz="1200" b="1" i="0" u="none" strike="noStrike">
-                <a:solidFill>
-                  <a:srgbClr val="000000"/>
-                </a:solidFill>
-                <a:effectLst/>
-                <a:uFillTx/>
-                <a:latin typeface="Times New Roman"/>
-              </a:rPr>
-              <a:t>Supervisor Audio</a:t>
-            </a:r>
-            <a:endParaRPr lang="en-IN" sz="1200"/>
-          </a:p>
-          <a:p>
-            <a:pPr algn="ctr">
-              <a:lnSpc>
-                <a:spcPct val="100000"/>
-              </a:lnSpc>
-              <a:buNone/>
-            </a:pPr>
-            <a:r>
-              <a:rPr lang="en-US" sz="1100" b="0" i="0" u="none" strike="noStrike">
-                <a:solidFill>
-                  <a:srgbClr val="000000"/>
-                </a:solidFill>
-                <a:effectLst/>
-                <a:uFillTx/>
-                <a:latin typeface="Times New Roman"/>
-              </a:rPr>
-              <a:t>Mic recording</a:t>
-            </a:r>
-            <a:endParaRPr lang="en-IN" sz="1100"/>
-          </a:p>
-          <a:p>
-            <a:pPr algn="ctr">
-              <a:lnSpc>
-                <a:spcPct val="100000"/>
-              </a:lnSpc>
-              <a:buNone/>
-            </a:pPr>
-            <a:r>
-              <a:rPr lang="en-US" sz="1100" b="0" i="0" u="none" strike="noStrike">
-                <a:solidFill>
-                  <a:srgbClr val="000000"/>
-                </a:solidFill>
-                <a:effectLst/>
-                <a:uFillTx/>
-                <a:latin typeface="Times New Roman"/>
-              </a:rPr>
-              <a:t>or file upload</a:t>
-            </a:r>
-            <a:endParaRPr lang="en-IN" sz="1100"/>
-          </a:p>
-        </p:txBody>
-      </p:sp>
-      <p:sp>
-        <p:nvSpPr>
-          <p:cNvPr id="61" name="box61"/>
-          <p:cNvSpPr/>
-          <p:nvPr/>
-        </p:nvSpPr>
-        <p:spPr>
-          <a:xfrm>
-            <a:off x="2194560" y="1554480"/>
-            <a:ext cx="1600200" cy="1005840"/>
-          </a:xfrm>
-          <a:prstGeom prst="roundRect">
-            <a:avLst>
-              <a:gd name="adj" fmla="val 12000"/>
-            </a:avLst>
-          </a:prstGeom>
-          <a:solidFill>
-            <a:srgbClr val="D0D8E8"/>
-          </a:solidFill>
-          <a:ln w="12700">
-            <a:solidFill>
-              <a:srgbClr val="4F81BD"/>
-            </a:solidFill>
-          </a:ln>
-        </p:spPr>
-        <p:txBody>
-          <a:bodyPr lIns="45720" tIns="27432" rIns="45720" bIns="27432" anchor="ctr">
-            <a:normAutofit/>
-          </a:bodyPr>
-          <a:lstStyle/>
-          <a:p>
-            <a:pPr algn="ctr">
-              <a:lnSpc>
-                <a:spcPct val="100000"/>
-              </a:lnSpc>
-              <a:buNone/>
-            </a:pPr>
-            <a:r>
-              <a:rPr lang="en-US" sz="1200" b="1" i="0" u="none" strike="noStrike">
-                <a:solidFill>
-                  <a:srgbClr val="000000"/>
-                </a:solidFill>
-                <a:effectLst/>
-                <a:uFillTx/>
-                <a:latin typeface="Times New Roman"/>
-              </a:rPr>
-              <a:t>Stage 1: ASR</a:t>
-            </a:r>
-            <a:endParaRPr lang="en-IN" sz="1200"/>
-          </a:p>
-          <a:p>
-            <a:pPr algn="ctr">
-              <a:lnSpc>
-                <a:spcPct val="100000"/>
-              </a:lnSpc>
-              <a:buNone/>
-            </a:pPr>
-            <a:r>
-              <a:rPr lang="en-US" sz="1100" b="0" i="0" u="none" strike="noStrike">
-                <a:solidFill>
-                  <a:srgbClr val="000000"/>
-                </a:solidFill>
-                <a:effectLst/>
-                <a:uFillTx/>
-                <a:latin typeface="Times New Roman"/>
-              </a:rPr>
-              <a:t>Whisper (fine-tuned)</a:t>
-            </a:r>
-            <a:endParaRPr lang="en-IN" sz="1100"/>
-          </a:p>
-          <a:p>
-            <a:pPr algn="ctr">
-              <a:lnSpc>
-                <a:spcPct val="100000"/>
-              </a:lnSpc>
-              <a:buNone/>
-            </a:pPr>
-            <a:r>
-              <a:rPr lang="en-US" sz="1100" b="0" i="0" u="none" strike="noStrike">
-                <a:solidFill>
-                  <a:srgbClr val="000000"/>
-                </a:solidFill>
-                <a:effectLst/>
-                <a:uFillTx/>
-                <a:latin typeface="Times New Roman"/>
-              </a:rPr>
-              <a:t>hi / mr</a:t>
-            </a:r>
-            <a:endParaRPr lang="en-IN" sz="1100"/>
-          </a:p>
-        </p:txBody>
-      </p:sp>
-      <p:sp>
-        <p:nvSpPr>
-          <p:cNvPr id="62" name="box62"/>
-          <p:cNvSpPr/>
-          <p:nvPr/>
-        </p:nvSpPr>
-        <p:spPr>
-          <a:xfrm>
-            <a:off x="3931920" y="1554480"/>
-            <a:ext cx="1600200" cy="1005840"/>
-          </a:xfrm>
-          <a:prstGeom prst="roundRect">
-            <a:avLst>
-              <a:gd name="adj" fmla="val 12000"/>
-            </a:avLst>
-          </a:prstGeom>
-          <a:solidFill>
-            <a:srgbClr val="D0D8E8"/>
-          </a:solidFill>
-          <a:ln w="12700">
-            <a:solidFill>
-              <a:srgbClr val="4F81BD"/>
-            </a:solidFill>
-          </a:ln>
-        </p:spPr>
-        <p:txBody>
-          <a:bodyPr lIns="45720" tIns="27432" rIns="45720" bIns="27432" anchor="ctr">
-            <a:normAutofit/>
-          </a:bodyPr>
-          <a:lstStyle/>
-          <a:p>
-            <a:pPr algn="ctr">
-              <a:lnSpc>
-                <a:spcPct val="100000"/>
-              </a:lnSpc>
-              <a:buNone/>
-            </a:pPr>
-            <a:r>
-              <a:rPr lang="en-US" sz="1200" b="1" i="0" u="none" strike="noStrike">
-                <a:solidFill>
-                  <a:srgbClr val="000000"/>
-                </a:solidFill>
-                <a:effectLst/>
-                <a:uFillTx/>
-                <a:latin typeface="Times New Roman"/>
-              </a:rPr>
-              <a:t>Stage 2: LLM</a:t>
-            </a:r>
-            <a:endParaRPr lang="en-IN" sz="1200"/>
-          </a:p>
-          <a:p>
-            <a:pPr algn="ctr">
-              <a:lnSpc>
-                <a:spcPct val="100000"/>
-              </a:lnSpc>
-              <a:buNone/>
-            </a:pPr>
-            <a:r>
-              <a:rPr lang="en-US" sz="1100" b="0" i="0" u="none" strike="noStrike">
-                <a:solidFill>
-                  <a:srgbClr val="000000"/>
-                </a:solidFill>
-                <a:effectLst/>
-                <a:uFillTx/>
-                <a:latin typeface="Times New Roman"/>
-              </a:rPr>
-              <a:t>Order steps +</a:t>
-            </a:r>
-            <a:endParaRPr lang="en-IN" sz="1100"/>
-          </a:p>
-          <a:p>
-            <a:pPr algn="ctr">
-              <a:lnSpc>
-                <a:spcPct val="100000"/>
-              </a:lnSpc>
-              <a:buNone/>
-            </a:pPr>
-            <a:r>
-              <a:rPr lang="en-US" sz="1100" b="0" i="0" u="none" strike="noStrike">
-                <a:solidFill>
-                  <a:srgbClr val="000000"/>
-                </a:solidFill>
-                <a:effectLst/>
-                <a:uFillTx/>
-                <a:latin typeface="Times New Roman"/>
-              </a:rPr>
-              <a:t>flag hazards</a:t>
-            </a:r>
-            <a:endParaRPr lang="en-IN" sz="1100"/>
-          </a:p>
-        </p:txBody>
-      </p:sp>
-      <p:sp>
-        <p:nvSpPr>
-          <p:cNvPr id="63" name="box63"/>
-          <p:cNvSpPr/>
-          <p:nvPr/>
-        </p:nvSpPr>
-        <p:spPr>
-          <a:xfrm>
-            <a:off x="5669280" y="1554480"/>
-            <a:ext cx="1600200" cy="1005840"/>
-          </a:xfrm>
-          <a:prstGeom prst="roundRect">
-            <a:avLst>
-              <a:gd name="adj" fmla="val 12000"/>
-            </a:avLst>
-          </a:prstGeom>
-          <a:solidFill>
-            <a:srgbClr val="D0D8E8"/>
-          </a:solidFill>
-          <a:ln w="12700">
-            <a:solidFill>
-              <a:srgbClr val="4F81BD"/>
-            </a:solidFill>
-          </a:ln>
-        </p:spPr>
-        <p:txBody>
-          <a:bodyPr lIns="45720" tIns="27432" rIns="45720" bIns="27432" anchor="ctr">
-            <a:normAutofit/>
-          </a:bodyPr>
-          <a:lstStyle/>
-          <a:p>
-            <a:pPr algn="ctr">
-              <a:lnSpc>
-                <a:spcPct val="100000"/>
-              </a:lnSpc>
-              <a:buNone/>
-            </a:pPr>
-            <a:r>
-              <a:rPr lang="en-US" sz="1200" b="1" i="0" u="none" strike="noStrike">
-                <a:solidFill>
-                  <a:srgbClr val="000000"/>
-                </a:solidFill>
-                <a:effectLst/>
-                <a:uFillTx/>
-                <a:latin typeface="Times New Roman"/>
-              </a:rPr>
-              <a:t>Stage 3: TTS</a:t>
-            </a:r>
-            <a:endParaRPr lang="en-IN" sz="1200"/>
-          </a:p>
-          <a:p>
-            <a:pPr algn="ctr">
-              <a:lnSpc>
-                <a:spcPct val="100000"/>
-              </a:lnSpc>
-              <a:buNone/>
-            </a:pPr>
-            <a:r>
-              <a:rPr lang="en-US" sz="1100" b="0" i="0" u="none" strike="noStrike">
-                <a:solidFill>
-                  <a:srgbClr val="000000"/>
-                </a:solidFill>
-                <a:effectLst/>
-                <a:uFillTx/>
-                <a:latin typeface="Times New Roman"/>
-              </a:rPr>
-              <a:t>edge-tts</a:t>
-            </a:r>
-            <a:endParaRPr lang="en-IN" sz="1100"/>
-          </a:p>
-          <a:p>
-            <a:pPr algn="ctr">
-              <a:lnSpc>
-                <a:spcPct val="100000"/>
-              </a:lnSpc>
-              <a:buNone/>
-            </a:pPr>
-            <a:r>
-              <a:rPr lang="en-US" sz="1100" b="0" i="0" u="none" strike="noStrike">
-                <a:solidFill>
-                  <a:srgbClr val="000000"/>
-                </a:solidFill>
-                <a:effectLst/>
-                <a:uFillTx/>
-                <a:latin typeface="Times New Roman"/>
-              </a:rPr>
-              <a:t>per-step audio</a:t>
-            </a:r>
-            <a:endParaRPr lang="en-IN" sz="1100"/>
-          </a:p>
-        </p:txBody>
-      </p:sp>
-      <p:sp>
-        <p:nvSpPr>
-          <p:cNvPr id="64" name="box64"/>
-          <p:cNvSpPr/>
-          <p:nvPr/>
-        </p:nvSpPr>
-        <p:spPr>
-          <a:xfrm>
-            <a:off x="7406640" y="1554480"/>
-            <a:ext cx="1600200" cy="1005840"/>
-          </a:xfrm>
-          <a:prstGeom prst="roundRect">
-            <a:avLst>
-              <a:gd name="adj" fmla="val 12000"/>
-            </a:avLst>
-          </a:prstGeom>
-          <a:solidFill>
-            <a:srgbClr val="E9EDF4"/>
-          </a:solidFill>
-          <a:ln w="12700">
-            <a:solidFill>
-              <a:srgbClr val="8A97A8"/>
-            </a:solidFill>
-          </a:ln>
-        </p:spPr>
-        <p:txBody>
-          <a:bodyPr lIns="45720" tIns="27432" rIns="45720" bIns="27432" anchor="ctr">
-            <a:normAutofit/>
-          </a:bodyPr>
-          <a:lstStyle/>
-          <a:p>
-            <a:pPr algn="ctr">
-              <a:lnSpc>
-                <a:spcPct val="100000"/>
-              </a:lnSpc>
-              <a:buNone/>
-            </a:pPr>
-            <a:r>
-              <a:rPr lang="en-US" sz="1200" b="1" i="0" u="none" strike="noStrike">
-                <a:solidFill>
-                  <a:srgbClr val="000000"/>
-                </a:solidFill>
-                <a:effectLst/>
-                <a:uFillTx/>
-                <a:latin typeface="Times New Roman"/>
-              </a:rPr>
-              <a:t>Stage 4: UI</a:t>
-            </a:r>
-            <a:endParaRPr lang="en-IN" sz="1200"/>
-          </a:p>
-          <a:p>
-            <a:pPr algn="ctr">
-              <a:lnSpc>
-                <a:spcPct val="100000"/>
-              </a:lnSpc>
-              <a:buNone/>
-            </a:pPr>
-            <a:r>
-              <a:rPr lang="en-US" sz="1100" b="0" i="0" u="none" strike="noStrike">
-                <a:solidFill>
-                  <a:srgbClr val="000000"/>
-                </a:solidFill>
-                <a:effectLst/>
-                <a:uFillTx/>
-                <a:latin typeface="Times New Roman"/>
-              </a:rPr>
-              <a:t>Visual SOP</a:t>
-            </a:r>
-            <a:endParaRPr lang="en-IN" sz="1100"/>
-          </a:p>
-          <a:p>
-            <a:pPr algn="ctr">
-              <a:lnSpc>
-                <a:spcPct val="100000"/>
-              </a:lnSpc>
-              <a:buNone/>
-            </a:pPr>
-            <a:r>
-              <a:rPr lang="en-US" sz="1100" b="0" i="0" u="none" strike="noStrike">
-                <a:solidFill>
-                  <a:srgbClr val="000000"/>
-                </a:solidFill>
-                <a:effectLst/>
-                <a:uFillTx/>
-                <a:latin typeface="Times New Roman"/>
-              </a:rPr>
-              <a:t>cards</a:t>
-            </a:r>
-            <a:endParaRPr lang="en-IN" sz="1100"/>
-          </a:p>
-        </p:txBody>
-      </p:sp>
-      <p:sp>
-        <p:nvSpPr>
-          <p:cNvPr id="70" name="arr70"/>
-          <p:cNvSpPr/>
-          <p:nvPr/>
-        </p:nvSpPr>
-        <p:spPr>
-          <a:xfrm>
-            <a:off x="2066544" y="2011680"/>
-            <a:ext cx="118872" cy="91440"/>
-          </a:xfrm>
-          <a:prstGeom prst="rightArrow">
-            <a:avLst/>
-          </a:prstGeom>
-          <a:solidFill>
-            <a:srgbClr val="8A97A8"/>
-          </a:solidFill>
-          <a:ln w="0">
-            <a:noFill/>
-          </a:ln>
-        </p:spPr>
-        <p:txBody>
-          <a:bodyPr/>
-          <a:lstStyle/>
-          <a:p>
-            <a:pPr>
-              <a:buNone/>
-            </a:pPr>
-            <a:endParaRPr lang="en-IN" sz="900"/>
-          </a:p>
-        </p:txBody>
-      </p:sp>
-      <p:sp>
-        <p:nvSpPr>
-          <p:cNvPr id="71" name="arr71"/>
-          <p:cNvSpPr/>
-          <p:nvPr/>
-        </p:nvSpPr>
-        <p:spPr>
-          <a:xfrm>
-            <a:off x="3803904" y="2011680"/>
-            <a:ext cx="118872" cy="91440"/>
-          </a:xfrm>
-          <a:prstGeom prst="rightArrow">
-            <a:avLst/>
-          </a:prstGeom>
-          <a:solidFill>
-            <a:srgbClr val="8A97A8"/>
-          </a:solidFill>
-          <a:ln w="0">
-            <a:noFill/>
-          </a:ln>
-        </p:spPr>
-        <p:txBody>
-          <a:bodyPr/>
-          <a:lstStyle/>
-          <a:p>
-            <a:pPr>
-              <a:buNone/>
-            </a:pPr>
-            <a:endParaRPr lang="en-IN" sz="900"/>
-          </a:p>
-        </p:txBody>
-      </p:sp>
-      <p:sp>
-        <p:nvSpPr>
-          <p:cNvPr id="72" name="arr72"/>
-          <p:cNvSpPr/>
-          <p:nvPr/>
-        </p:nvSpPr>
-        <p:spPr>
-          <a:xfrm>
-            <a:off x="5541264" y="2011680"/>
-            <a:ext cx="118872" cy="91440"/>
-          </a:xfrm>
-          <a:prstGeom prst="rightArrow">
-            <a:avLst/>
-          </a:prstGeom>
-          <a:solidFill>
-            <a:srgbClr val="8A97A8"/>
-          </a:solidFill>
-          <a:ln w="0">
-            <a:noFill/>
-          </a:ln>
-        </p:spPr>
-        <p:txBody>
-          <a:bodyPr/>
-          <a:lstStyle/>
-          <a:p>
-            <a:pPr>
-              <a:buNone/>
-            </a:pPr>
-            <a:endParaRPr lang="en-IN" sz="900"/>
-          </a:p>
-        </p:txBody>
-      </p:sp>
-      <p:sp>
-        <p:nvSpPr>
-          <p:cNvPr id="73" name="arr73"/>
-          <p:cNvSpPr/>
-          <p:nvPr/>
-        </p:nvSpPr>
-        <p:spPr>
-          <a:xfrm>
-            <a:off x="7278624" y="2011680"/>
-            <a:ext cx="118872" cy="91440"/>
-          </a:xfrm>
-          <a:prstGeom prst="rightArrow">
-            <a:avLst/>
-          </a:prstGeom>
-          <a:solidFill>
-            <a:srgbClr val="8A97A8"/>
-          </a:solidFill>
-          <a:ln w="0">
-            <a:noFill/>
-          </a:ln>
-        </p:spPr>
-        <p:txBody>
-          <a:bodyPr/>
-          <a:lstStyle/>
-          <a:p>
-            <a:pPr>
-              <a:buNone/>
-            </a:pPr>
-            <a:endParaRPr lang="en-IN" sz="900"/>
-          </a:p>
-        </p:txBody>
-      </p:sp>
-      <p:sp>
-        <p:nvSpPr>
-          <p:cNvPr id="80" name="lbl80"/>
+          <p:cNvPr id="19" name="TextBox 18"/>
           <p:cNvSpPr txBox="1"/>
           <p:nvPr/>
         </p:nvSpPr>
         <p:spPr>
           <a:xfrm>
-            <a:off x="457200" y="2651760"/>
-            <a:ext cx="1600200" cy="274320"/>
-          </a:xfrm>
-          <a:prstGeom prst="rect">
-            <a:avLst/>
-          </a:prstGeom>
-          <a:noFill/>
-          <a:ln w="0">
-            <a:noFill/>
-          </a:ln>
-        </p:spPr>
-        <p:txBody>
-          <a:bodyPr lIns="0" tIns="0" rIns="0" bIns="0" anchor="ctr">
-            <a:noAutofit/>
-          </a:bodyPr>
-          <a:lstStyle/>
-          <a:p>
-            <a:pPr algn="ctr">
-              <a:buNone/>
-            </a:pPr>
-            <a:r>
-              <a:rPr lang="en-US" sz="1000" b="0" i="1" u="none" strike="noStrike">
-                <a:solidFill>
-                  <a:srgbClr val="595959"/>
-                </a:solidFill>
-                <a:effectLst/>
-                <a:uFillTx/>
-                <a:latin typeface="Times New Roman"/>
-              </a:rPr>
-              <a:t>raw audio</a:t>
-            </a:r>
-            <a:endParaRPr lang="en-IN" sz="1000"/>
-          </a:p>
-        </p:txBody>
-      </p:sp>
-      <p:sp>
-        <p:nvSpPr>
-          <p:cNvPr id="81" name="lbl81"/>
-          <p:cNvSpPr txBox="1"/>
-          <p:nvPr/>
-        </p:nvSpPr>
-        <p:spPr>
-          <a:xfrm>
-            <a:off x="2194560" y="2651760"/>
-            <a:ext cx="1600200" cy="274320"/>
-          </a:xfrm>
-          <a:prstGeom prst="rect">
-            <a:avLst/>
-          </a:prstGeom>
-          <a:noFill/>
-          <a:ln w="0">
-            <a:noFill/>
-          </a:ln>
-        </p:spPr>
-        <p:txBody>
-          <a:bodyPr lIns="0" tIns="0" rIns="0" bIns="0" anchor="ctr">
-            <a:noAutofit/>
-          </a:bodyPr>
-          <a:lstStyle/>
-          <a:p>
-            <a:pPr algn="ctr">
-              <a:buNone/>
-            </a:pPr>
-            <a:r>
-              <a:rPr lang="en-US" sz="1000" b="0" i="1" u="none" strike="noStrike">
-                <a:solidFill>
-                  <a:srgbClr val="595959"/>
-                </a:solidFill>
-                <a:effectLst/>
-                <a:uFillTx/>
-                <a:latin typeface="Times New Roman"/>
-              </a:rPr>
-              <a:t>transcript (text)</a:t>
-            </a:r>
-            <a:endParaRPr lang="en-IN" sz="1000"/>
-          </a:p>
-        </p:txBody>
-      </p:sp>
-      <p:sp>
-        <p:nvSpPr>
-          <p:cNvPr id="82" name="lbl82"/>
-          <p:cNvSpPr txBox="1"/>
-          <p:nvPr/>
-        </p:nvSpPr>
-        <p:spPr>
-          <a:xfrm>
-            <a:off x="3931920" y="2651760"/>
-            <a:ext cx="1600200" cy="274320"/>
-          </a:xfrm>
-          <a:prstGeom prst="rect">
-            <a:avLst/>
-          </a:prstGeom>
-          <a:noFill/>
-          <a:ln w="0">
-            <a:noFill/>
-          </a:ln>
-        </p:spPr>
-        <p:txBody>
-          <a:bodyPr lIns="0" tIns="0" rIns="0" bIns="0" anchor="ctr">
-            <a:noAutofit/>
-          </a:bodyPr>
-          <a:lstStyle/>
-          <a:p>
-            <a:pPr algn="ctr">
-              <a:buNone/>
-            </a:pPr>
-            <a:r>
-              <a:rPr lang="en-US" sz="1000" b="0" i="1" u="none" strike="noStrike">
-                <a:solidFill>
-                  <a:srgbClr val="595959"/>
-                </a:solidFill>
-                <a:effectLst/>
-                <a:uFillTx/>
-                <a:latin typeface="Times New Roman"/>
-              </a:rPr>
-              <a:t>steps JSON</a:t>
-            </a:r>
-            <a:endParaRPr lang="en-IN" sz="1000"/>
-          </a:p>
-        </p:txBody>
-      </p:sp>
-      <p:sp>
-        <p:nvSpPr>
-          <p:cNvPr id="83" name="lbl83"/>
-          <p:cNvSpPr txBox="1"/>
-          <p:nvPr/>
-        </p:nvSpPr>
-        <p:spPr>
-          <a:xfrm>
-            <a:off x="5669280" y="2651760"/>
-            <a:ext cx="1600200" cy="274320"/>
-          </a:xfrm>
-          <a:prstGeom prst="rect">
-            <a:avLst/>
-          </a:prstGeom>
-          <a:noFill/>
-          <a:ln w="0">
-            <a:noFill/>
-          </a:ln>
-        </p:spPr>
-        <p:txBody>
-          <a:bodyPr lIns="0" tIns="0" rIns="0" bIns="0" anchor="ctr">
-            <a:noAutofit/>
-          </a:bodyPr>
-          <a:lstStyle/>
-          <a:p>
-            <a:pPr algn="ctr">
-              <a:buNone/>
-            </a:pPr>
-            <a:r>
-              <a:rPr lang="en-US" sz="1000" b="0" i="1" u="none" strike="noStrike">
-                <a:solidFill>
-                  <a:srgbClr val="595959"/>
-                </a:solidFill>
-                <a:effectLst/>
-                <a:uFillTx/>
-                <a:latin typeface="Times New Roman"/>
-              </a:rPr>
-              <a:t>audio clips</a:t>
-            </a:r>
-            <a:endParaRPr lang="en-IN" sz="1000"/>
-          </a:p>
-        </p:txBody>
-      </p:sp>
-      <p:sp>
-        <p:nvSpPr>
-          <p:cNvPr id="90" name="TextBox 89"/>
-          <p:cNvSpPr txBox="1"/>
-          <p:nvPr/>
-        </p:nvSpPr>
-        <p:spPr>
-          <a:xfrm>
-            <a:off x="457200" y="3291840"/>
-            <a:ext cx="8229600" cy="2834640"/>
+            <a:off x="457200" y="1188720"/>
+            <a:ext cx="8229600" cy="4876800"/>
           </a:xfrm>
           <a:prstGeom prst="rect">
             <a:avLst/>
@@ -5479,26 +4725,9 @@
           </a:bodyPr>
           <a:lstStyle/>
           <a:p>
-            <a:pPr indent="0">
-              <a:buNone/>
-            </a:pPr>
-            <a:r>
-              <a:rPr lang="en-US" sz="1500" b="1" i="0" u="none" strike="noStrike" dirty="0">
-                <a:solidFill>
-                  <a:srgbClr val="000000"/>
-                </a:solidFill>
-                <a:effectLst/>
-                <a:uFillTx/>
-                <a:latin typeface="Times New Roman"/>
-              </a:rPr>
-              <a:t>Data flow</a:t>
-            </a:r>
-            <a:endParaRPr lang="en-IN" sz="1500" dirty="0"/>
-          </a:p>
-          <a:p>
             <a:pPr marL="285750" indent="-285750">
               <a:spcBef>
-                <a:spcPts val="400"/>
+                <a:spcPts val="800"/>
               </a:spcBef>
               <a:buClr>
                 <a:srgbClr val="000000"/>
@@ -5521,22 +4750,33 @@
               </a:tabLst>
             </a:pPr>
             <a:r>
-              <a:rPr lang="en-US" sz="1400" b="0" i="0" u="none" strike="noStrike" dirty="0">
-                <a:solidFill>
-                  <a:srgbClr val="000000"/>
-                </a:solidFill>
-                <a:effectLst/>
-                <a:uFillTx/>
-                <a:latin typeface="Times New Roman"/>
-              </a:rPr>
-              <a:t>Backend: FastAPI with separate ASR, structuring and TTS modules (asr.py, structuring.py, tts.py), each independently testable.</a:t>
-            </a:r>
-            <a:endParaRPr lang="en-IN" sz="1400" dirty="0"/>
+              <a:rPr lang="en-US" sz="1600" b="1" i="0" u="none" strike="noStrike" dirty="0">
+                <a:solidFill>
+                  <a:srgbClr val="000000"/>
+                </a:solidFill>
+                <a:effectLst/>
+                <a:uFillTx/>
+                <a:latin typeface="Times New Roman"/>
+              </a:rPr>
+              <a:t>Feature 3 - Plant CRM Modules: </a:t>
+            </a:r>
+            <a:r>
+              <a:rPr lang="en-US" sz="1600" b="0" i="0" u="none" strike="noStrike" dirty="0">
+                <a:solidFill>
+                  <a:srgbClr val="000000"/>
+                </a:solidFill>
+                <a:effectLst/>
+                <a:uFillTx/>
+                <a:latin typeface="Times New Roman"/>
+              </a:rPr>
+              <a:t>Employee, Workforce and HR management, built on the same org structure (plants / lines) and authorization shapes (scope_sql, author_scope_sql, may_author_line) the first two features already established.</a:t>
+            </a:r>
+            <a:endParaRPr lang="en-IN" sz="1600" dirty="0"/>
           </a:p>
           <a:p>
             <a:pPr marL="285750" indent="-285750">
               <a:spcBef>
-                <a:spcPts val="400"/>
+                <a:spcPts val="800"/>
               </a:spcBef>
               <a:buClr>
                 <a:srgbClr val="000000"/>
@@ -5559,22 +4799,33 @@
               </a:tabLst>
             </a:pPr>
             <a:r>
-              <a:rPr lang="en-US" sz="1400" b="0" i="0" u="none" strike="noStrike" dirty="0">
-                <a:solidFill>
-                  <a:srgbClr val="000000"/>
-                </a:solidFill>
-                <a:effectLst/>
-                <a:uFillTx/>
-                <a:latin typeface="Times New Roman"/>
-              </a:rPr>
-              <a:t>ASR runs on local CPU/GPU; the LLM is any OpenAI-compatible endpoint (Ollama offline, Groq when hosted); edge-tts is the free voice service.</a:t>
-            </a:r>
-            <a:endParaRPr lang="en-IN" sz="1400" dirty="0"/>
+              <a:rPr lang="en-US" sz="1600" b="1" i="0" u="none" strike="noStrike" dirty="0">
+                <a:solidFill>
+                  <a:srgbClr val="000000"/>
+                </a:solidFill>
+                <a:effectLst/>
+                <a:uFillTx/>
+                <a:latin typeface="Times New Roman"/>
+              </a:rPr>
+              <a:t>Employee management: </a:t>
+            </a:r>
+            <a:r>
+              <a:rPr lang="en-US" sz="1600" b="0" i="0" u="none" strike="noStrike" dirty="0">
+                <a:solidFill>
+                  <a:srgbClr val="000000"/>
+                </a:solidFill>
+                <a:effectLst/>
+                <a:uFillTx/>
+                <a:latin typeface="Times New Roman"/>
+              </a:rPr>
+              <a:t>a plant-wide directory with departments, job titles and a direct-manager org chart; a worker can now be tracked by name for scheduling without ever being given a login.</a:t>
+            </a:r>
+            <a:endParaRPr lang="en-IN" sz="1600" dirty="0"/>
           </a:p>
           <a:p>
             <a:pPr marL="285750" indent="-285750">
               <a:spcBef>
-                <a:spcPts val="400"/>
+                <a:spcPts val="800"/>
               </a:spcBef>
               <a:buClr>
                 <a:srgbClr val="000000"/>
@@ -5597,17 +4848,115 @@
               </a:tabLst>
             </a:pPr>
             <a:r>
-              <a:rPr lang="en-US" sz="1400" b="0" i="0" u="none" strike="noStrike" dirty="0">
-                <a:solidFill>
-                  <a:srgbClr val="000000"/>
-                </a:solidFill>
-                <a:effectLst/>
-                <a:uFillTx/>
-                <a:latin typeface="Times New Roman"/>
-              </a:rPr>
-              <a:t>Output contract: { step_number, text, is_safety_warning, icon } per step; every approved edit is saved as a new SOP version.</a:t>
-            </a:r>
-            <a:endParaRPr lang="en-IN" sz="1400" dirty="0"/>
+              <a:rPr lang="en-US" sz="1600" b="1" i="0" u="none" strike="noStrike" dirty="0">
+                <a:solidFill>
+                  <a:srgbClr val="000000"/>
+                </a:solidFill>
+                <a:effectLst/>
+                <a:uFillTx/>
+                <a:latin typeface="Times New Roman"/>
+              </a:rPr>
+              <a:t>Workforce management: </a:t>
+            </a:r>
+            <a:r>
+              <a:rPr lang="en-US" sz="1600" b="0" i="0" u="none" strike="noStrike" dirty="0">
+                <a:solidFill>
+                  <a:srgbClr val="000000"/>
+                </a:solidFill>
+                <a:effectLst/>
+                <a:uFillTx/>
+                <a:latin typeface="Times New Roman"/>
+              </a:rPr>
+              <a:t>shift definitions, line-scoped shift assignments and attendance; clock-in/out is supervisor-operated and kiosk-style, since it is tied to one worker's identity by definition - unlike an anonymous problem report.</a:t>
+            </a:r>
+            <a:endParaRPr lang="en-IN" sz="1600" dirty="0"/>
+          </a:p>
+          <a:p>
+            <a:pPr marL="285750" indent="-285750">
+              <a:spcBef>
+                <a:spcPts val="800"/>
+              </a:spcBef>
+              <a:buClr>
+                <a:srgbClr val="000000"/>
+              </a:buClr>
+              <a:buFont typeface="Arial" panose="020B0604020202020204" pitchFamily="34" charset="0"/>
+              <a:buChar char="•"/>
+              <a:tabLst>
+                <a:tab pos="0" algn="l"/>
+                <a:tab pos="914400" algn="l"/>
+                <a:tab pos="1828800" algn="l"/>
+                <a:tab pos="2743200" algn="l"/>
+                <a:tab pos="3657600" algn="l"/>
+                <a:tab pos="4572000" algn="l"/>
+                <a:tab pos="5486400" algn="l"/>
+                <a:tab pos="6400800" algn="l"/>
+                <a:tab pos="7315200" algn="l"/>
+                <a:tab pos="8229600" algn="l"/>
+                <a:tab pos="9144000" algn="l"/>
+                <a:tab pos="10058400" algn="l"/>
+              </a:tabLst>
+            </a:pPr>
+            <a:r>
+              <a:rPr lang="en-US" sz="1600" b="1" i="0" u="none" strike="noStrike" dirty="0">
+                <a:solidFill>
+                  <a:srgbClr val="000000"/>
+                </a:solidFill>
+                <a:effectLst/>
+                <a:uFillTx/>
+                <a:latin typeface="Times New Roman"/>
+              </a:rPr>
+              <a:t>HR management: </a:t>
+            </a:r>
+            <a:r>
+              <a:rPr lang="en-US" sz="1600" b="0" i="0" u="none" strike="noStrike" dirty="0">
+                <a:solidFill>
+                  <a:srgbClr val="000000"/>
+                </a:solidFill>
+                <a:effectLst/>
+                <a:uFillTx/>
+                <a:latin typeface="Times New Roman"/>
+              </a:rPr>
+              <a:t>self-service leave requests with balance tracking and manager approval, plus a minimal recruitment pipeline (job postings → candidates → applications) with resumes uploaded straight to cloud storage.</a:t>
+            </a:r>
+            <a:endParaRPr lang="en-IN" sz="1600" dirty="0"/>
+          </a:p>
+          <a:p>
+            <a:pPr marL="285750" indent="-285750">
+              <a:spcBef>
+                <a:spcPts val="800"/>
+              </a:spcBef>
+              <a:buClr>
+                <a:srgbClr val="000000"/>
+              </a:buClr>
+              <a:buFont typeface="Arial" panose="020B0604020202020204" pitchFamily="34" charset="0"/>
+              <a:buChar char="•"/>
+              <a:tabLst>
+                <a:tab pos="0" algn="l"/>
+                <a:tab pos="914400" algn="l"/>
+                <a:tab pos="1828800" algn="l"/>
+                <a:tab pos="2743200" algn="l"/>
+                <a:tab pos="3657600" algn="l"/>
+                <a:tab pos="4572000" algn="l"/>
+                <a:tab pos="5486400" algn="l"/>
+                <a:tab pos="6400800" algn="l"/>
+                <a:tab pos="7315200" algn="l"/>
+                <a:tab pos="8229600" algn="l"/>
+                <a:tab pos="9144000" algn="l"/>
+                <a:tab pos="10058400" algn="l"/>
+              </a:tabLst>
+            </a:pPr>
+            <a:r>
+              <a:rPr lang="en-US" sz="1600" b="0" i="0" u="none" strike="noStrike" dirty="0">
+                <a:solidFill>
+                  <a:srgbClr val="000000"/>
+                </a:solidFill>
+                <a:effectLst/>
+                <a:uFillTx/>
+                <a:latin typeface="Times New Roman"/>
+              </a:rPr>
+              <a:t>Directory writes, shift definitions and recruitment stay admin-gated; leave and shift-assignment data stay scoped to the lines a manager or supervisor actually runs - the same two-layer authorization as the original features.</a:t>
+            </a:r>
+            <a:endParaRPr lang="en-IN" sz="1600" dirty="0"/>
           </a:p>
         </p:txBody>
       </p:sp>
@@ -5842,52 +5191,9 @@
                 <a:uFillTx/>
                 <a:latin typeface="Calibri"/>
               </a:rPr>
-              <a:t>10</a:t>
+              <a:t>13</a:t>
             </a:fld>
             <a:endParaRPr lang="en-IN" sz="1200"/>
-          </a:p>
-        </p:txBody>
-      </p:sp>
-      <p:sp>
-        <p:nvSpPr>
-          <p:cNvPr id="501" name="FeatureHeading"/>
-          <p:cNvSpPr txBox="1"/>
-          <p:nvPr/>
-        </p:nvSpPr>
-        <p:spPr>
-          <a:xfrm>
-            <a:off x="457200" y="1161288"/>
-            <a:ext cx="8229600" cy="338328"/>
-          </a:xfrm>
-          <a:prstGeom prst="rect">
-            <a:avLst/>
-          </a:prstGeom>
-          <a:noFill/>
-          <a:ln w="0">
-            <a:noFill/>
-          </a:ln>
-        </p:spPr>
-        <p:txBody>
-          <a:bodyPr anchor="t">
-            <a:normAutofit/>
-          </a:bodyPr>
-          <a:lstStyle/>
-          <a:p>
-            <a:pPr indent="0">
-              <a:buNone/>
-            </a:pPr>
-            <a:r>
-              <a:rPr lang="en-US" sz="1500" b="1" i="0" u="none" strike="noStrike" dirty="0">
-                <a:solidFill>
-                  <a:srgbClr val="000000"/>
-                </a:solidFill>
-                <a:effectLst/>
-                <a:uFillTx/>
-                <a:latin typeface="Times New Roman"/>
-              </a:rPr>
-              <a:t>Feature 1 - Voice-to-SOP (supervisor → worker)</a:t>
-            </a:r>
-            <a:endParaRPr lang="en-IN" sz="1500" dirty="0"/>
           </a:p>
         </p:txBody>
       </p:sp>
@@ -5971,7 +5277,7 @@
                 <a:uFillTx/>
                 <a:latin typeface="Times New Roman"/>
               </a:rPr>
-              <a:t>System Architecture (contd.)</a:t>
+              <a:t>System Architecture</a:t>
             </a:r>
             <a:endParaRPr lang="en-IN" sz="4000"/>
           </a:p>
@@ -6023,7 +5329,7 @@
                 <a:uFillTx/>
                 <a:latin typeface="Times New Roman"/>
               </a:rPr>
-              <a:t>Worker Voice</a:t>
+              <a:t>Supervisor Audio</a:t>
             </a:r>
             <a:endParaRPr lang="en-IN" sz="1200"/>
           </a:p>
@@ -6043,7 +5349,7 @@
                 <a:uFillTx/>
                 <a:latin typeface="Times New Roman"/>
               </a:rPr>
-              <a:t>Holds mic on</a:t>
+              <a:t>Mic recording</a:t>
             </a:r>
             <a:endParaRPr lang="en-IN" sz="1100"/>
           </a:p>
@@ -6063,7 +5369,7 @@
                 <a:uFillTx/>
                 <a:latin typeface="Times New Roman"/>
               </a:rPr>
-              <a:t>the SOP card</a:t>
+              <a:t>or file upload</a:t>
             </a:r>
             <a:endParaRPr lang="en-IN" sz="1100"/>
           </a:p>
@@ -6135,7 +5441,7 @@
                 <a:uFillTx/>
                 <a:latin typeface="Times New Roman"/>
               </a:rPr>
-              <a:t>Whisper hi / mr</a:t>
+              <a:t>Whisper (fine-tuned)</a:t>
             </a:r>
             <a:endParaRPr lang="en-IN" sz="1100"/>
           </a:p>
@@ -6155,7 +5461,7 @@
                 <a:uFillTx/>
                 <a:latin typeface="Times New Roman"/>
               </a:rPr>
-              <a:t>audio discarded</a:t>
+              <a:t>hi / mr</a:t>
             </a:r>
             <a:endParaRPr lang="en-IN" sz="1100"/>
           </a:p>
@@ -6207,7 +5513,7 @@
                 <a:uFillTx/>
                 <a:latin typeface="Times New Roman"/>
               </a:rPr>
-              <a:t>Stage 2: Triage</a:t>
+              <a:t>Stage 2: LLM</a:t>
             </a:r>
             <a:endParaRPr lang="en-IN" sz="1200"/>
           </a:p>
@@ -6227,7 +5533,7 @@
                 <a:uFillTx/>
                 <a:latin typeface="Times New Roman"/>
               </a:rPr>
-              <a:t>LLM vs SOP step</a:t>
+              <a:t>Order steps +</a:t>
             </a:r>
             <a:endParaRPr lang="en-IN" sz="1100"/>
           </a:p>
@@ -6247,7 +5553,7 @@
                 <a:uFillTx/>
                 <a:latin typeface="Times New Roman"/>
               </a:rPr>
-              <a:t>kind + severity</a:t>
+              <a:t>flag hazards</a:t>
             </a:r>
             <a:endParaRPr lang="en-IN" sz="1100"/>
           </a:p>
@@ -6299,7 +5605,7 @@
                 <a:uFillTx/>
                 <a:latin typeface="Times New Roman"/>
               </a:rPr>
-              <a:t>Stage 3: Routing</a:t>
+              <a:t>Stage 3: TTS</a:t>
             </a:r>
             <a:endParaRPr lang="en-IN" sz="1200"/>
           </a:p>
@@ -6319,7 +5625,7 @@
                 <a:uFillTx/>
                 <a:latin typeface="Times New Roman"/>
               </a:rPr>
-              <a:t>Line manager,</a:t>
+              <a:t>edge-tts</a:t>
             </a:r>
             <a:endParaRPr lang="en-IN" sz="1100"/>
           </a:p>
@@ -6339,7 +5645,7 @@
                 <a:uFillTx/>
                 <a:latin typeface="Times New Roman"/>
               </a:rPr>
-              <a:t>SLA + clustering</a:t>
+              <a:t>per-step audio</a:t>
             </a:r>
             <a:endParaRPr lang="en-IN" sz="1100"/>
           </a:p>
@@ -6391,7 +5697,7 @@
                 <a:uFillTx/>
                 <a:latin typeface="Times New Roman"/>
               </a:rPr>
-              <a:t>Manager Inbox</a:t>
+              <a:t>Stage 4: UI</a:t>
             </a:r>
             <a:endParaRPr lang="en-IN" sz="1200"/>
           </a:p>
@@ -6411,7 +5717,7 @@
                 <a:uFillTx/>
                 <a:latin typeface="Times New Roman"/>
               </a:rPr>
-              <a:t>Act on report /</a:t>
+              <a:t>Visual SOP</a:t>
             </a:r>
             <a:endParaRPr lang="en-IN" sz="1100"/>
           </a:p>
@@ -6431,7 +5737,7 @@
                 <a:uFillTx/>
                 <a:latin typeface="Times New Roman"/>
               </a:rPr>
-              <a:t>approve card fix</a:t>
+              <a:t>cards</a:t>
             </a:r>
             <a:endParaRPr lang="en-IN" sz="1100"/>
           </a:p>
@@ -6602,7 +5908,7 @@
                 <a:uFillTx/>
                 <a:latin typeface="Times New Roman"/>
               </a:rPr>
-              <a:t>raw audio (not stored)</a:t>
+              <a:t>raw audio</a:t>
             </a:r>
             <a:endParaRPr lang="en-IN" sz="1000"/>
           </a:p>
@@ -6688,7 +5994,7 @@
                 <a:uFillTx/>
                 <a:latin typeface="Times New Roman"/>
               </a:rPr>
-              <a:t>kind, severity, step</a:t>
+              <a:t>steps JSON</a:t>
             </a:r>
             <a:endParaRPr lang="en-IN" sz="1000"/>
           </a:p>
@@ -6731,7 +6037,7 @@
                 <a:uFillTx/>
                 <a:latin typeface="Times New Roman"/>
               </a:rPr>
-              <a:t>routed report + SLA</a:t>
+              <a:t>audio clips</a:t>
             </a:r>
             <a:endParaRPr lang="en-IN" sz="1000"/>
           </a:p>
@@ -6812,7 +6118,7 @@
                 <a:uFillTx/>
                 <a:latin typeface="Times New Roman"/>
               </a:rPr>
-              <a:t>SLA: 24 h for a high-severity machine fault, 72 h otherwise; a report not acted on in time escalates one level higher automatically.</a:t>
+              <a:t>Backend: FastAPI with separate ASR, structuring and TTS modules (asr.py, structuring.py, tts.py), each independently testable.</a:t>
             </a:r>
             <a:endParaRPr lang="en-IN" sz="1400" dirty="0"/>
           </a:p>
@@ -6850,7 +6156,7 @@
                 <a:uFillTx/>
                 <a:latin typeface="Times New Roman"/>
               </a:rPr>
-              <a:t>Clustering: 3 'sop' reports on one step within 30 days → auto-drafted card correction → manager approval → next SOP version.</a:t>
+              <a:t>ASR runs on local CPU/GPU; the LLM is any OpenAI-compatible endpoint (Ollama offline, Groq when hosted); edge-tts is the free voice service.</a:t>
             </a:r>
             <a:endParaRPr lang="en-IN" sz="1400" dirty="0"/>
           </a:p>
@@ -6888,45 +6194,7 @@
                 <a:uFillTx/>
                 <a:latin typeface="Times New Roman"/>
               </a:rPr>
-              <a:t>Privacy: worker routes (/api/report, /api/ask, /api/receipt) need no login; only the triaged text with machine and step is stored.</a:t>
-            </a:r>
-            <a:endParaRPr lang="en-IN" sz="1400" dirty="0"/>
-          </a:p>
-          <a:p>
-            <a:pPr marL="285750" indent="-285750">
-              <a:spcBef>
-                <a:spcPts val="400"/>
-              </a:spcBef>
-              <a:buClr>
-                <a:srgbClr val="000000"/>
-              </a:buClr>
-              <a:buFont typeface="Arial" panose="020B0604020202020204" pitchFamily="34" charset="0"/>
-              <a:buChar char="•"/>
-              <a:tabLst>
-                <a:tab pos="0" algn="l"/>
-                <a:tab pos="914400" algn="l"/>
-                <a:tab pos="1828800" algn="l"/>
-                <a:tab pos="2743200" algn="l"/>
-                <a:tab pos="3657600" algn="l"/>
-                <a:tab pos="4572000" algn="l"/>
-                <a:tab pos="5486400" algn="l"/>
-                <a:tab pos="6400800" algn="l"/>
-                <a:tab pos="7315200" algn="l"/>
-                <a:tab pos="8229600" algn="l"/>
-                <a:tab pos="9144000" algn="l"/>
-                <a:tab pos="10058400" algn="l"/>
-              </a:tabLst>
-            </a:pPr>
-            <a:r>
-              <a:rPr lang="en-US" sz="1400" b="0" i="0" u="none" strike="noStrike" dirty="0">
-                <a:solidFill>
-                  <a:srgbClr val="000000"/>
-                </a:solidFill>
-                <a:effectLst/>
-                <a:uFillTx/>
-                <a:latin typeface="Times New Roman"/>
-              </a:rPr>
-              <a:t>Access: staff sign in with ID + PIN (scrypt-hashed, HMAC-signed token); a manager sees only the lines he runs.</a:t>
+              <a:t>Output contract: { step_number, text, is_safety_warning, icon } per step; every approved edit is saved as a new SOP version.</a:t>
             </a:r>
             <a:endParaRPr lang="en-IN" sz="1400" dirty="0"/>
           </a:p>
@@ -7163,7 +6431,7 @@
                 <a:uFillTx/>
                 <a:latin typeface="Calibri"/>
               </a:rPr>
-              <a:t>10</a:t>
+              <a:t>14</a:t>
             </a:fld>
             <a:endParaRPr lang="en-IN" sz="1200"/>
           </a:p>
@@ -7171,7 +6439,7 @@
       </p:sp>
       <p:sp>
         <p:nvSpPr>
-          <p:cNvPr id="502" name="FeatureHeading"/>
+          <p:cNvPr id="501" name="FeatureHeading"/>
           <p:cNvSpPr txBox="1"/>
           <p:nvPr/>
         </p:nvSpPr>
@@ -7206,7 +6474,7 @@
                 <a:uFillTx/>
                 <a:latin typeface="Times New Roman"/>
               </a:rPr>
-              <a:t>Feature 2 - Worker Voice Feedback (worker → manager)</a:t>
+              <a:t>Feature 1 - Voice-to-SOP (supervisor → worker)</a:t>
             </a:r>
             <a:endParaRPr lang="en-IN" sz="1500" dirty="0"/>
           </a:p>
@@ -7344,7 +6612,7 @@
                 <a:uFillTx/>
                 <a:latin typeface="Times New Roman"/>
               </a:rPr>
-              <a:t>Supervisor Audio</a:t>
+              <a:t>Worker Voice</a:t>
             </a:r>
             <a:endParaRPr lang="en-IN" sz="1200"/>
           </a:p>
@@ -7364,7 +6632,7 @@
                 <a:uFillTx/>
                 <a:latin typeface="Times New Roman"/>
               </a:rPr>
-              <a:t>Mic recording</a:t>
+              <a:t>Holds mic on</a:t>
             </a:r>
             <a:endParaRPr lang="en-IN" sz="1100"/>
           </a:p>
@@ -7384,7 +6652,7 @@
                 <a:uFillTx/>
                 <a:latin typeface="Times New Roman"/>
               </a:rPr>
-              <a:t>or file upload</a:t>
+              <a:t>the SOP card</a:t>
             </a:r>
             <a:endParaRPr lang="en-IN" sz="1100"/>
           </a:p>
@@ -7456,7 +6724,7 @@
                 <a:uFillTx/>
                 <a:latin typeface="Times New Roman"/>
               </a:rPr>
-              <a:t>Whisper (fine-tuned)</a:t>
+              <a:t>Whisper hi / mr</a:t>
             </a:r>
             <a:endParaRPr lang="en-IN" sz="1100"/>
           </a:p>
@@ -7476,7 +6744,7 @@
                 <a:uFillTx/>
                 <a:latin typeface="Times New Roman"/>
               </a:rPr>
-              <a:t>hi / mr</a:t>
+              <a:t>audio discarded</a:t>
             </a:r>
             <a:endParaRPr lang="en-IN" sz="1100"/>
           </a:p>
@@ -7528,7 +6796,7 @@
                 <a:uFillTx/>
                 <a:latin typeface="Times New Roman"/>
               </a:rPr>
-              <a:t>Stage 2: LLM</a:t>
+              <a:t>Stage 2: Triage</a:t>
             </a:r>
             <a:endParaRPr lang="en-IN" sz="1200"/>
           </a:p>
@@ -7548,7 +6816,7 @@
                 <a:uFillTx/>
                 <a:latin typeface="Times New Roman"/>
               </a:rPr>
-              <a:t>Order steps +</a:t>
+              <a:t>LLM vs SOP step</a:t>
             </a:r>
             <a:endParaRPr lang="en-IN" sz="1100"/>
           </a:p>
@@ -7568,7 +6836,7 @@
                 <a:uFillTx/>
                 <a:latin typeface="Times New Roman"/>
               </a:rPr>
-              <a:t>flag hazards</a:t>
+              <a:t>kind + severity</a:t>
             </a:r>
             <a:endParaRPr lang="en-IN" sz="1100"/>
           </a:p>
@@ -7620,7 +6888,7 @@
                 <a:uFillTx/>
                 <a:latin typeface="Times New Roman"/>
               </a:rPr>
-              <a:t>Stage 3: TTS</a:t>
+              <a:t>Stage 3: Routing</a:t>
             </a:r>
             <a:endParaRPr lang="en-IN" sz="1200"/>
           </a:p>
@@ -7640,7 +6908,7 @@
                 <a:uFillTx/>
                 <a:latin typeface="Times New Roman"/>
               </a:rPr>
-              <a:t>edge-tts</a:t>
+              <a:t>Line manager,</a:t>
             </a:r>
             <a:endParaRPr lang="en-IN" sz="1100"/>
           </a:p>
@@ -7660,7 +6928,7 @@
                 <a:uFillTx/>
                 <a:latin typeface="Times New Roman"/>
               </a:rPr>
-              <a:t>per-step audio</a:t>
+              <a:t>SLA + clustering</a:t>
             </a:r>
             <a:endParaRPr lang="en-IN" sz="1100"/>
           </a:p>
@@ -7712,7 +6980,7 @@
                 <a:uFillTx/>
                 <a:latin typeface="Times New Roman"/>
               </a:rPr>
-              <a:t>Stage 4: UI</a:t>
+              <a:t>Manager Inbox</a:t>
             </a:r>
             <a:endParaRPr lang="en-IN" sz="1200"/>
           </a:p>
@@ -7732,7 +7000,7 @@
                 <a:uFillTx/>
                 <a:latin typeface="Times New Roman"/>
               </a:rPr>
-              <a:t>Visual SOP</a:t>
+              <a:t>Act on report /</a:t>
             </a:r>
             <a:endParaRPr lang="en-IN" sz="1100"/>
           </a:p>
@@ -7752,7 +7020,7 @@
                 <a:uFillTx/>
                 <a:latin typeface="Times New Roman"/>
               </a:rPr>
-              <a:t>cards</a:t>
+              <a:t>approve card fix</a:t>
             </a:r>
             <a:endParaRPr lang="en-IN" sz="1100"/>
           </a:p>
@@ -7888,14 +7156,186 @@
       </p:sp>
       <p:sp>
         <p:nvSpPr>
+          <p:cNvPr id="80" name="lbl80"/>
+          <p:cNvSpPr txBox="1"/>
+          <p:nvPr/>
+        </p:nvSpPr>
+        <p:spPr>
+          <a:xfrm>
+            <a:off x="457200" y="2651760"/>
+            <a:ext cx="1600200" cy="274320"/>
+          </a:xfrm>
+          <a:prstGeom prst="rect">
+            <a:avLst/>
+          </a:prstGeom>
+          <a:noFill/>
+          <a:ln w="0">
+            <a:noFill/>
+          </a:ln>
+        </p:spPr>
+        <p:txBody>
+          <a:bodyPr lIns="0" tIns="0" rIns="0" bIns="0" anchor="ctr">
+            <a:noAutofit/>
+          </a:bodyPr>
+          <a:lstStyle/>
+          <a:p>
+            <a:pPr algn="ctr">
+              <a:buNone/>
+            </a:pPr>
+            <a:r>
+              <a:rPr lang="en-US" sz="1000" b="0" i="1" u="none" strike="noStrike">
+                <a:solidFill>
+                  <a:srgbClr val="595959"/>
+                </a:solidFill>
+                <a:effectLst/>
+                <a:uFillTx/>
+                <a:latin typeface="Times New Roman"/>
+              </a:rPr>
+              <a:t>raw audio (not stored)</a:t>
+            </a:r>
+            <a:endParaRPr lang="en-IN" sz="1000"/>
+          </a:p>
+        </p:txBody>
+      </p:sp>
+      <p:sp>
+        <p:nvSpPr>
+          <p:cNvPr id="81" name="lbl81"/>
+          <p:cNvSpPr txBox="1"/>
+          <p:nvPr/>
+        </p:nvSpPr>
+        <p:spPr>
+          <a:xfrm>
+            <a:off x="2194560" y="2651760"/>
+            <a:ext cx="1600200" cy="274320"/>
+          </a:xfrm>
+          <a:prstGeom prst="rect">
+            <a:avLst/>
+          </a:prstGeom>
+          <a:noFill/>
+          <a:ln w="0">
+            <a:noFill/>
+          </a:ln>
+        </p:spPr>
+        <p:txBody>
+          <a:bodyPr lIns="0" tIns="0" rIns="0" bIns="0" anchor="ctr">
+            <a:noAutofit/>
+          </a:bodyPr>
+          <a:lstStyle/>
+          <a:p>
+            <a:pPr algn="ctr">
+              <a:buNone/>
+            </a:pPr>
+            <a:r>
+              <a:rPr lang="en-US" sz="1000" b="0" i="1" u="none" strike="noStrike">
+                <a:solidFill>
+                  <a:srgbClr val="595959"/>
+                </a:solidFill>
+                <a:effectLst/>
+                <a:uFillTx/>
+                <a:latin typeface="Times New Roman"/>
+              </a:rPr>
+              <a:t>transcript (text)</a:t>
+            </a:r>
+            <a:endParaRPr lang="en-IN" sz="1000"/>
+          </a:p>
+        </p:txBody>
+      </p:sp>
+      <p:sp>
+        <p:nvSpPr>
+          <p:cNvPr id="82" name="lbl82"/>
+          <p:cNvSpPr txBox="1"/>
+          <p:nvPr/>
+        </p:nvSpPr>
+        <p:spPr>
+          <a:xfrm>
+            <a:off x="3931920" y="2651760"/>
+            <a:ext cx="1600200" cy="274320"/>
+          </a:xfrm>
+          <a:prstGeom prst="rect">
+            <a:avLst/>
+          </a:prstGeom>
+          <a:noFill/>
+          <a:ln w="0">
+            <a:noFill/>
+          </a:ln>
+        </p:spPr>
+        <p:txBody>
+          <a:bodyPr lIns="0" tIns="0" rIns="0" bIns="0" anchor="ctr">
+            <a:noAutofit/>
+          </a:bodyPr>
+          <a:lstStyle/>
+          <a:p>
+            <a:pPr algn="ctr">
+              <a:buNone/>
+            </a:pPr>
+            <a:r>
+              <a:rPr lang="en-US" sz="1000" b="0" i="1" u="none" strike="noStrike">
+                <a:solidFill>
+                  <a:srgbClr val="595959"/>
+                </a:solidFill>
+                <a:effectLst/>
+                <a:uFillTx/>
+                <a:latin typeface="Times New Roman"/>
+              </a:rPr>
+              <a:t>kind, severity, step</a:t>
+            </a:r>
+            <a:endParaRPr lang="en-IN" sz="1000"/>
+          </a:p>
+        </p:txBody>
+      </p:sp>
+      <p:sp>
+        <p:nvSpPr>
+          <p:cNvPr id="83" name="lbl83"/>
+          <p:cNvSpPr txBox="1"/>
+          <p:nvPr/>
+        </p:nvSpPr>
+        <p:spPr>
+          <a:xfrm>
+            <a:off x="5669280" y="2651760"/>
+            <a:ext cx="1600200" cy="274320"/>
+          </a:xfrm>
+          <a:prstGeom prst="rect">
+            <a:avLst/>
+          </a:prstGeom>
+          <a:noFill/>
+          <a:ln w="0">
+            <a:noFill/>
+          </a:ln>
+        </p:spPr>
+        <p:txBody>
+          <a:bodyPr lIns="0" tIns="0" rIns="0" bIns="0" anchor="ctr">
+            <a:noAutofit/>
+          </a:bodyPr>
+          <a:lstStyle/>
+          <a:p>
+            <a:pPr algn="ctr">
+              <a:buNone/>
+            </a:pPr>
+            <a:r>
+              <a:rPr lang="en-US" sz="1000" b="0" i="1" u="none" strike="noStrike">
+                <a:solidFill>
+                  <a:srgbClr val="595959"/>
+                </a:solidFill>
+                <a:effectLst/>
+                <a:uFillTx/>
+                <a:latin typeface="Times New Roman"/>
+              </a:rPr>
+              <a:t>routed report + SLA</a:t>
+            </a:r>
+            <a:endParaRPr lang="en-IN" sz="1000"/>
+          </a:p>
+        </p:txBody>
+      </p:sp>
+      <p:sp>
+        <p:nvSpPr>
           <p:cNvPr id="90" name="TextBox 89"/>
           <p:cNvSpPr txBox="1"/>
           <p:nvPr/>
         </p:nvSpPr>
         <p:spPr>
           <a:xfrm>
-            <a:off x="457200" y="4434840"/>
-            <a:ext cx="8229600" cy="1874520"/>
+            <a:off x="457200" y="3291840"/>
+            <a:ext cx="8229600" cy="2834640"/>
           </a:xfrm>
           <a:prstGeom prst="rect">
             <a:avLst/>
@@ -7923,7 +7363,7 @@
                 <a:uFillTx/>
                 <a:latin typeface="Times New Roman"/>
               </a:rPr>
-              <a:t>How the two features connect</a:t>
+              <a:t>Data flow</a:t>
             </a:r>
             <a:endParaRPr lang="en-IN" sz="1500" dirty="0"/>
           </a:p>
@@ -7961,7 +7401,7 @@
                 <a:uFillTx/>
                 <a:latin typeface="Times New Roman"/>
               </a:rPr>
-              <a:t>One shared speech stack: the same per-language Whisper ASR and edge-tts voices serve both the supervisor and the worker.</a:t>
+              <a:t>SLA: 24 h for a high-severity machine fault, 72 h otherwise; a report not acted on in time escalates one level higher automatically.</a:t>
             </a:r>
             <a:endParaRPr lang="en-IN" sz="1400" dirty="0"/>
           </a:p>
@@ -7999,7 +7439,7 @@
                 <a:uFillTx/>
                 <a:latin typeface="Times New Roman"/>
               </a:rPr>
-              <a:t>The card is the bridge: a worker reports from the exact card and step he is using, so every report is tied to a machine, a step and an SOP version.</a:t>
+              <a:t>Clustering: 3 'sop' reports on one step within 30 days → auto-drafted card correction → manager approval → next SOP version.</a:t>
             </a:r>
             <a:endParaRPr lang="en-IN" sz="1400" dirty="0"/>
           </a:p>
@@ -8037,7 +7477,45 @@
                 <a:uFillTx/>
                 <a:latin typeface="Times New Roman"/>
               </a:rPr>
-              <a:t>The loop closes both ways: an approved fix republishes the card, and the worker hears the outcome in his own language.</a:t>
+              <a:t>Privacy: worker routes (/api/report, /api/ask, /api/receipt) need no login; only the triaged text with machine and step is stored.</a:t>
+            </a:r>
+            <a:endParaRPr lang="en-IN" sz="1400" dirty="0"/>
+          </a:p>
+          <a:p>
+            <a:pPr marL="285750" indent="-285750">
+              <a:spcBef>
+                <a:spcPts val="400"/>
+              </a:spcBef>
+              <a:buClr>
+                <a:srgbClr val="000000"/>
+              </a:buClr>
+              <a:buFont typeface="Arial" panose="020B0604020202020204" pitchFamily="34" charset="0"/>
+              <a:buChar char="•"/>
+              <a:tabLst>
+                <a:tab pos="0" algn="l"/>
+                <a:tab pos="914400" algn="l"/>
+                <a:tab pos="1828800" algn="l"/>
+                <a:tab pos="2743200" algn="l"/>
+                <a:tab pos="3657600" algn="l"/>
+                <a:tab pos="4572000" algn="l"/>
+                <a:tab pos="5486400" algn="l"/>
+                <a:tab pos="6400800" algn="l"/>
+                <a:tab pos="7315200" algn="l"/>
+                <a:tab pos="8229600" algn="l"/>
+                <a:tab pos="9144000" algn="l"/>
+                <a:tab pos="10058400" algn="l"/>
+              </a:tabLst>
+            </a:pPr>
+            <a:r>
+              <a:rPr lang="en-US" sz="1400" b="0" i="0" u="none" strike="noStrike" dirty="0">
+                <a:solidFill>
+                  <a:srgbClr val="000000"/>
+                </a:solidFill>
+                <a:effectLst/>
+                <a:uFillTx/>
+                <a:latin typeface="Times New Roman"/>
+              </a:rPr>
+              <a:t>Access: staff sign in with ID + PIN (scrypt-hashed, HMAC-signed token); a manager sees only the lines he runs.</a:t>
             </a:r>
             <a:endParaRPr lang="en-IN" sz="1400" dirty="0"/>
           </a:p>
@@ -8274,7 +7752,7 @@
                 <a:uFillTx/>
                 <a:latin typeface="Calibri"/>
               </a:rPr>
-              <a:t>10</a:t>
+              <a:t>15</a:t>
             </a:fld>
             <a:endParaRPr lang="en-IN" sz="1200"/>
           </a:p>
@@ -8282,7 +7760,7 @@
       </p:sp>
       <p:sp>
         <p:nvSpPr>
-          <p:cNvPr id="503" name="FeatureHeading"/>
+          <p:cNvPr id="502" name="FeatureHeading"/>
           <p:cNvSpPr txBox="1"/>
           <p:nvPr/>
         </p:nvSpPr>
@@ -8317,672 +7795,9 @@
                 <a:uFillTx/>
                 <a:latin typeface="Times New Roman"/>
               </a:rPr>
-              <a:t>Closed loop: Feature 1 (top) publishes the cards, Feature 2 (bottom) improves them</a:t>
+              <a:t>Feature 2 - Worker Voice Feedback (worker → manager)</a:t>
             </a:r>
             <a:endParaRPr lang="en-IN" sz="1500" dirty="0"/>
-          </a:p>
-        </p:txBody>
-      </p:sp>
-      <p:sp>
-        <p:nvSpPr>
-          <p:cNvPr id="504" name="box60_f2"/>
-          <p:cNvSpPr/>
-          <p:nvPr/>
-        </p:nvSpPr>
-        <p:spPr>
-          <a:xfrm>
-            <a:off x="457200" y="3246120"/>
-            <a:ext cx="1600200" cy="1005840"/>
-          </a:xfrm>
-          <a:prstGeom prst="roundRect">
-            <a:avLst>
-              <a:gd name="adj" fmla="val 12000"/>
-            </a:avLst>
-          </a:prstGeom>
-          <a:solidFill>
-            <a:srgbClr val="E9EDF4"/>
-          </a:solidFill>
-          <a:ln w="12700">
-            <a:solidFill>
-              <a:srgbClr val="8A97A8"/>
-            </a:solidFill>
-          </a:ln>
-        </p:spPr>
-        <p:txBody>
-          <a:bodyPr lIns="45720" tIns="27432" rIns="45720" bIns="27432" anchor="ctr">
-            <a:normAutofit/>
-          </a:bodyPr>
-          <a:lstStyle/>
-          <a:p>
-            <a:pPr algn="ctr">
-              <a:lnSpc>
-                <a:spcPct val="100000"/>
-              </a:lnSpc>
-              <a:buNone/>
-            </a:pPr>
-            <a:r>
-              <a:rPr lang="en-US" sz="1200" b="1" i="0" u="none" strike="noStrike">
-                <a:solidFill>
-                  <a:srgbClr val="000000"/>
-                </a:solidFill>
-                <a:effectLst/>
-                <a:uFillTx/>
-                <a:latin typeface="Times New Roman"/>
-              </a:rPr>
-              <a:t>Worker Voice</a:t>
-            </a:r>
-            <a:endParaRPr lang="en-IN" sz="1200"/>
-          </a:p>
-          <a:p>
-            <a:pPr algn="ctr">
-              <a:lnSpc>
-                <a:spcPct val="100000"/>
-              </a:lnSpc>
-              <a:buNone/>
-            </a:pPr>
-            <a:r>
-              <a:rPr lang="en-US" sz="1100" b="0" i="0" u="none" strike="noStrike">
-                <a:solidFill>
-                  <a:srgbClr val="000000"/>
-                </a:solidFill>
-                <a:effectLst/>
-                <a:uFillTx/>
-                <a:latin typeface="Times New Roman"/>
-              </a:rPr>
-              <a:t>Holds mic on</a:t>
-            </a:r>
-            <a:endParaRPr lang="en-IN" sz="1100"/>
-          </a:p>
-          <a:p>
-            <a:pPr algn="ctr">
-              <a:lnSpc>
-                <a:spcPct val="100000"/>
-              </a:lnSpc>
-              <a:buNone/>
-            </a:pPr>
-            <a:r>
-              <a:rPr lang="en-US" sz="1100" b="0" i="0" u="none" strike="noStrike">
-                <a:solidFill>
-                  <a:srgbClr val="000000"/>
-                </a:solidFill>
-                <a:effectLst/>
-                <a:uFillTx/>
-                <a:latin typeface="Times New Roman"/>
-              </a:rPr>
-              <a:t>the SOP card</a:t>
-            </a:r>
-            <a:endParaRPr lang="en-IN" sz="1100"/>
-          </a:p>
-        </p:txBody>
-      </p:sp>
-      <p:sp>
-        <p:nvSpPr>
-          <p:cNvPr id="505" name="box61_f2"/>
-          <p:cNvSpPr/>
-          <p:nvPr/>
-        </p:nvSpPr>
-        <p:spPr>
-          <a:xfrm>
-            <a:off x="2194560" y="3246120"/>
-            <a:ext cx="1600200" cy="1005840"/>
-          </a:xfrm>
-          <a:prstGeom prst="roundRect">
-            <a:avLst>
-              <a:gd name="adj" fmla="val 12000"/>
-            </a:avLst>
-          </a:prstGeom>
-          <a:solidFill>
-            <a:srgbClr val="D0D8E8"/>
-          </a:solidFill>
-          <a:ln w="12700">
-            <a:solidFill>
-              <a:srgbClr val="4F81BD"/>
-            </a:solidFill>
-          </a:ln>
-        </p:spPr>
-        <p:txBody>
-          <a:bodyPr lIns="45720" tIns="27432" rIns="45720" bIns="27432" anchor="ctr">
-            <a:normAutofit/>
-          </a:bodyPr>
-          <a:lstStyle/>
-          <a:p>
-            <a:pPr algn="ctr">
-              <a:lnSpc>
-                <a:spcPct val="100000"/>
-              </a:lnSpc>
-              <a:buNone/>
-            </a:pPr>
-            <a:r>
-              <a:rPr lang="en-US" sz="1200" b="1" i="0" u="none" strike="noStrike">
-                <a:solidFill>
-                  <a:srgbClr val="000000"/>
-                </a:solidFill>
-                <a:effectLst/>
-                <a:uFillTx/>
-                <a:latin typeface="Times New Roman"/>
-              </a:rPr>
-              <a:t>Stage 1: ASR</a:t>
-            </a:r>
-            <a:endParaRPr lang="en-IN" sz="1200"/>
-          </a:p>
-          <a:p>
-            <a:pPr algn="ctr">
-              <a:lnSpc>
-                <a:spcPct val="100000"/>
-              </a:lnSpc>
-              <a:buNone/>
-            </a:pPr>
-            <a:r>
-              <a:rPr lang="en-US" sz="1100" b="0" i="0" u="none" strike="noStrike">
-                <a:solidFill>
-                  <a:srgbClr val="000000"/>
-                </a:solidFill>
-                <a:effectLst/>
-                <a:uFillTx/>
-                <a:latin typeface="Times New Roman"/>
-              </a:rPr>
-              <a:t>Whisper hi / mr</a:t>
-            </a:r>
-            <a:endParaRPr lang="en-IN" sz="1100"/>
-          </a:p>
-          <a:p>
-            <a:pPr algn="ctr">
-              <a:lnSpc>
-                <a:spcPct val="100000"/>
-              </a:lnSpc>
-              <a:buNone/>
-            </a:pPr>
-            <a:r>
-              <a:rPr lang="en-US" sz="1100" b="0" i="0" u="none" strike="noStrike">
-                <a:solidFill>
-                  <a:srgbClr val="000000"/>
-                </a:solidFill>
-                <a:effectLst/>
-                <a:uFillTx/>
-                <a:latin typeface="Times New Roman"/>
-              </a:rPr>
-              <a:t>audio discarded</a:t>
-            </a:r>
-            <a:endParaRPr lang="en-IN" sz="1100"/>
-          </a:p>
-        </p:txBody>
-      </p:sp>
-      <p:sp>
-        <p:nvSpPr>
-          <p:cNvPr id="506" name="box62_f2"/>
-          <p:cNvSpPr/>
-          <p:nvPr/>
-        </p:nvSpPr>
-        <p:spPr>
-          <a:xfrm>
-            <a:off x="3931920" y="3246120"/>
-            <a:ext cx="1600200" cy="1005840"/>
-          </a:xfrm>
-          <a:prstGeom prst="roundRect">
-            <a:avLst>
-              <a:gd name="adj" fmla="val 12000"/>
-            </a:avLst>
-          </a:prstGeom>
-          <a:solidFill>
-            <a:srgbClr val="D0D8E8"/>
-          </a:solidFill>
-          <a:ln w="12700">
-            <a:solidFill>
-              <a:srgbClr val="4F81BD"/>
-            </a:solidFill>
-          </a:ln>
-        </p:spPr>
-        <p:txBody>
-          <a:bodyPr lIns="45720" tIns="27432" rIns="45720" bIns="27432" anchor="ctr">
-            <a:normAutofit/>
-          </a:bodyPr>
-          <a:lstStyle/>
-          <a:p>
-            <a:pPr algn="ctr">
-              <a:lnSpc>
-                <a:spcPct val="100000"/>
-              </a:lnSpc>
-              <a:buNone/>
-            </a:pPr>
-            <a:r>
-              <a:rPr lang="en-US" sz="1200" b="1" i="0" u="none" strike="noStrike">
-                <a:solidFill>
-                  <a:srgbClr val="000000"/>
-                </a:solidFill>
-                <a:effectLst/>
-                <a:uFillTx/>
-                <a:latin typeface="Times New Roman"/>
-              </a:rPr>
-              <a:t>Stage 2: Triage</a:t>
-            </a:r>
-            <a:endParaRPr lang="en-IN" sz="1200"/>
-          </a:p>
-          <a:p>
-            <a:pPr algn="ctr">
-              <a:lnSpc>
-                <a:spcPct val="100000"/>
-              </a:lnSpc>
-              <a:buNone/>
-            </a:pPr>
-            <a:r>
-              <a:rPr lang="en-US" sz="1100" b="0" i="0" u="none" strike="noStrike">
-                <a:solidFill>
-                  <a:srgbClr val="000000"/>
-                </a:solidFill>
-                <a:effectLst/>
-                <a:uFillTx/>
-                <a:latin typeface="Times New Roman"/>
-              </a:rPr>
-              <a:t>LLM vs SOP step</a:t>
-            </a:r>
-            <a:endParaRPr lang="en-IN" sz="1100"/>
-          </a:p>
-          <a:p>
-            <a:pPr algn="ctr">
-              <a:lnSpc>
-                <a:spcPct val="100000"/>
-              </a:lnSpc>
-              <a:buNone/>
-            </a:pPr>
-            <a:r>
-              <a:rPr lang="en-US" sz="1100" b="0" i="0" u="none" strike="noStrike">
-                <a:solidFill>
-                  <a:srgbClr val="000000"/>
-                </a:solidFill>
-                <a:effectLst/>
-                <a:uFillTx/>
-                <a:latin typeface="Times New Roman"/>
-              </a:rPr>
-              <a:t>kind + severity</a:t>
-            </a:r>
-            <a:endParaRPr lang="en-IN" sz="1100"/>
-          </a:p>
-        </p:txBody>
-      </p:sp>
-      <p:sp>
-        <p:nvSpPr>
-          <p:cNvPr id="507" name="box63_f2"/>
-          <p:cNvSpPr/>
-          <p:nvPr/>
-        </p:nvSpPr>
-        <p:spPr>
-          <a:xfrm>
-            <a:off x="5669280" y="3246120"/>
-            <a:ext cx="1600200" cy="1005840"/>
-          </a:xfrm>
-          <a:prstGeom prst="roundRect">
-            <a:avLst>
-              <a:gd name="adj" fmla="val 12000"/>
-            </a:avLst>
-          </a:prstGeom>
-          <a:solidFill>
-            <a:srgbClr val="D0D8E8"/>
-          </a:solidFill>
-          <a:ln w="12700">
-            <a:solidFill>
-              <a:srgbClr val="4F81BD"/>
-            </a:solidFill>
-          </a:ln>
-        </p:spPr>
-        <p:txBody>
-          <a:bodyPr lIns="45720" tIns="27432" rIns="45720" bIns="27432" anchor="ctr">
-            <a:normAutofit/>
-          </a:bodyPr>
-          <a:lstStyle/>
-          <a:p>
-            <a:pPr algn="ctr">
-              <a:lnSpc>
-                <a:spcPct val="100000"/>
-              </a:lnSpc>
-              <a:buNone/>
-            </a:pPr>
-            <a:r>
-              <a:rPr lang="en-US" sz="1200" b="1" i="0" u="none" strike="noStrike">
-                <a:solidFill>
-                  <a:srgbClr val="000000"/>
-                </a:solidFill>
-                <a:effectLst/>
-                <a:uFillTx/>
-                <a:latin typeface="Times New Roman"/>
-              </a:rPr>
-              <a:t>Stage 3: Routing</a:t>
-            </a:r>
-            <a:endParaRPr lang="en-IN" sz="1200"/>
-          </a:p>
-          <a:p>
-            <a:pPr algn="ctr">
-              <a:lnSpc>
-                <a:spcPct val="100000"/>
-              </a:lnSpc>
-              <a:buNone/>
-            </a:pPr>
-            <a:r>
-              <a:rPr lang="en-US" sz="1100" b="0" i="0" u="none" strike="noStrike">
-                <a:solidFill>
-                  <a:srgbClr val="000000"/>
-                </a:solidFill>
-                <a:effectLst/>
-                <a:uFillTx/>
-                <a:latin typeface="Times New Roman"/>
-              </a:rPr>
-              <a:t>Line manager,</a:t>
-            </a:r>
-            <a:endParaRPr lang="en-IN" sz="1100"/>
-          </a:p>
-          <a:p>
-            <a:pPr algn="ctr">
-              <a:lnSpc>
-                <a:spcPct val="100000"/>
-              </a:lnSpc>
-              <a:buNone/>
-            </a:pPr>
-            <a:r>
-              <a:rPr lang="en-US" sz="1100" b="0" i="0" u="none" strike="noStrike">
-                <a:solidFill>
-                  <a:srgbClr val="000000"/>
-                </a:solidFill>
-                <a:effectLst/>
-                <a:uFillTx/>
-                <a:latin typeface="Times New Roman"/>
-              </a:rPr>
-              <a:t>SLA + clustering</a:t>
-            </a:r>
-            <a:endParaRPr lang="en-IN" sz="1100"/>
-          </a:p>
-        </p:txBody>
-      </p:sp>
-      <p:sp>
-        <p:nvSpPr>
-          <p:cNvPr id="508" name="box64_f2"/>
-          <p:cNvSpPr/>
-          <p:nvPr/>
-        </p:nvSpPr>
-        <p:spPr>
-          <a:xfrm>
-            <a:off x="7406640" y="3246120"/>
-            <a:ext cx="1600200" cy="1005840"/>
-          </a:xfrm>
-          <a:prstGeom prst="roundRect">
-            <a:avLst>
-              <a:gd name="adj" fmla="val 12000"/>
-            </a:avLst>
-          </a:prstGeom>
-          <a:solidFill>
-            <a:srgbClr val="E9EDF4"/>
-          </a:solidFill>
-          <a:ln w="12700">
-            <a:solidFill>
-              <a:srgbClr val="8A97A8"/>
-            </a:solidFill>
-          </a:ln>
-        </p:spPr>
-        <p:txBody>
-          <a:bodyPr lIns="45720" tIns="27432" rIns="45720" bIns="27432" anchor="ctr">
-            <a:normAutofit/>
-          </a:bodyPr>
-          <a:lstStyle/>
-          <a:p>
-            <a:pPr algn="ctr">
-              <a:lnSpc>
-                <a:spcPct val="100000"/>
-              </a:lnSpc>
-              <a:buNone/>
-            </a:pPr>
-            <a:r>
-              <a:rPr lang="en-US" sz="1200" b="1" i="0" u="none" strike="noStrike">
-                <a:solidFill>
-                  <a:srgbClr val="000000"/>
-                </a:solidFill>
-                <a:effectLst/>
-                <a:uFillTx/>
-                <a:latin typeface="Times New Roman"/>
-              </a:rPr>
-              <a:t>Manager Inbox</a:t>
-            </a:r>
-            <a:endParaRPr lang="en-IN" sz="1200"/>
-          </a:p>
-          <a:p>
-            <a:pPr algn="ctr">
-              <a:lnSpc>
-                <a:spcPct val="100000"/>
-              </a:lnSpc>
-              <a:buNone/>
-            </a:pPr>
-            <a:r>
-              <a:rPr lang="en-US" sz="1100" b="0" i="0" u="none" strike="noStrike">
-                <a:solidFill>
-                  <a:srgbClr val="000000"/>
-                </a:solidFill>
-                <a:effectLst/>
-                <a:uFillTx/>
-                <a:latin typeface="Times New Roman"/>
-              </a:rPr>
-              <a:t>Act on report /</a:t>
-            </a:r>
-            <a:endParaRPr lang="en-IN" sz="1100"/>
-          </a:p>
-          <a:p>
-            <a:pPr algn="ctr">
-              <a:lnSpc>
-                <a:spcPct val="100000"/>
-              </a:lnSpc>
-              <a:buNone/>
-            </a:pPr>
-            <a:r>
-              <a:rPr lang="en-US" sz="1100" b="0" i="0" u="none" strike="noStrike">
-                <a:solidFill>
-                  <a:srgbClr val="000000"/>
-                </a:solidFill>
-                <a:effectLst/>
-                <a:uFillTx/>
-                <a:latin typeface="Times New Roman"/>
-              </a:rPr>
-              <a:t>approve card fix</a:t>
-            </a:r>
-            <a:endParaRPr lang="en-IN" sz="1100"/>
-          </a:p>
-        </p:txBody>
-      </p:sp>
-      <p:sp>
-        <p:nvSpPr>
-          <p:cNvPr id="509" name="arr70_f2"/>
-          <p:cNvSpPr/>
-          <p:nvPr/>
-        </p:nvSpPr>
-        <p:spPr>
-          <a:xfrm>
-            <a:off x="2066544" y="3703320"/>
-            <a:ext cx="118872" cy="91440"/>
-          </a:xfrm>
-          <a:prstGeom prst="rightArrow">
-            <a:avLst/>
-          </a:prstGeom>
-          <a:solidFill>
-            <a:srgbClr val="8A97A8"/>
-          </a:solidFill>
-          <a:ln w="0">
-            <a:noFill/>
-          </a:ln>
-        </p:spPr>
-        <p:txBody>
-          <a:bodyPr/>
-          <a:lstStyle/>
-          <a:p>
-            <a:pPr>
-              <a:buNone/>
-            </a:pPr>
-            <a:endParaRPr lang="en-IN" sz="900"/>
-          </a:p>
-        </p:txBody>
-      </p:sp>
-      <p:sp>
-        <p:nvSpPr>
-          <p:cNvPr id="510" name="arr71_f2"/>
-          <p:cNvSpPr/>
-          <p:nvPr/>
-        </p:nvSpPr>
-        <p:spPr>
-          <a:xfrm>
-            <a:off x="3803904" y="3703320"/>
-            <a:ext cx="118872" cy="91440"/>
-          </a:xfrm>
-          <a:prstGeom prst="rightArrow">
-            <a:avLst/>
-          </a:prstGeom>
-          <a:solidFill>
-            <a:srgbClr val="8A97A8"/>
-          </a:solidFill>
-          <a:ln w="0">
-            <a:noFill/>
-          </a:ln>
-        </p:spPr>
-        <p:txBody>
-          <a:bodyPr/>
-          <a:lstStyle/>
-          <a:p>
-            <a:pPr>
-              <a:buNone/>
-            </a:pPr>
-            <a:endParaRPr lang="en-IN" sz="900"/>
-          </a:p>
-        </p:txBody>
-      </p:sp>
-      <p:sp>
-        <p:nvSpPr>
-          <p:cNvPr id="511" name="arr72_f2"/>
-          <p:cNvSpPr/>
-          <p:nvPr/>
-        </p:nvSpPr>
-        <p:spPr>
-          <a:xfrm>
-            <a:off x="5541264" y="3703320"/>
-            <a:ext cx="118872" cy="91440"/>
-          </a:xfrm>
-          <a:prstGeom prst="rightArrow">
-            <a:avLst/>
-          </a:prstGeom>
-          <a:solidFill>
-            <a:srgbClr val="8A97A8"/>
-          </a:solidFill>
-          <a:ln w="0">
-            <a:noFill/>
-          </a:ln>
-        </p:spPr>
-        <p:txBody>
-          <a:bodyPr/>
-          <a:lstStyle/>
-          <a:p>
-            <a:pPr>
-              <a:buNone/>
-            </a:pPr>
-            <a:endParaRPr lang="en-IN" sz="900"/>
-          </a:p>
-        </p:txBody>
-      </p:sp>
-      <p:sp>
-        <p:nvSpPr>
-          <p:cNvPr id="512" name="arr73_f2"/>
-          <p:cNvSpPr/>
-          <p:nvPr/>
-        </p:nvSpPr>
-        <p:spPr>
-          <a:xfrm>
-            <a:off x="7278624" y="3703320"/>
-            <a:ext cx="118872" cy="91440"/>
-          </a:xfrm>
-          <a:prstGeom prst="rightArrow">
-            <a:avLst/>
-          </a:prstGeom>
-          <a:solidFill>
-            <a:srgbClr val="8A97A8"/>
-          </a:solidFill>
-          <a:ln w="0">
-            <a:noFill/>
-          </a:ln>
-        </p:spPr>
-        <p:txBody>
-          <a:bodyPr/>
-          <a:lstStyle/>
-          <a:p>
-            <a:pPr>
-              <a:buNone/>
-            </a:pPr>
-            <a:endParaRPr lang="en-IN" sz="900"/>
-          </a:p>
-        </p:txBody>
-      </p:sp>
-      <p:sp>
-        <p:nvSpPr>
-          <p:cNvPr id="513" name="arrUp"/>
-          <p:cNvSpPr/>
-          <p:nvPr/>
-        </p:nvSpPr>
-        <p:spPr>
-          <a:xfrm>
-            <a:off x="8115300" y="2651760"/>
-            <a:ext cx="182880" cy="502920"/>
-          </a:xfrm>
-          <a:prstGeom prst="upArrow">
-            <a:avLst/>
-          </a:prstGeom>
-          <a:solidFill>
-            <a:srgbClr val="8A97A8"/>
-          </a:solidFill>
-          <a:ln w="0">
-            <a:noFill/>
-          </a:ln>
-        </p:spPr>
-        <p:txBody>
-          <a:bodyPr/>
-          <a:lstStyle/>
-          <a:p>
-            <a:pPr>
-              <a:buNone/>
-            </a:pPr>
-            <a:endParaRPr lang="en-IN" sz="900"/>
-          </a:p>
-        </p:txBody>
-      </p:sp>
-      <p:sp>
-        <p:nvSpPr>
-          <p:cNvPr id="514" name="lblUp"/>
-          <p:cNvSpPr txBox="1"/>
-          <p:nvPr/>
-        </p:nvSpPr>
-        <p:spPr>
-          <a:xfrm>
-            <a:off x="5669280" y="2788920"/>
-            <a:ext cx="2377440" cy="274320"/>
-          </a:xfrm>
-          <a:prstGeom prst="rect">
-            <a:avLst/>
-          </a:prstGeom>
-          <a:noFill/>
-          <a:ln w="0">
-            <a:noFill/>
-          </a:ln>
-        </p:spPr>
-        <p:txBody>
-          <a:bodyPr lIns="0" tIns="0" rIns="0" bIns="0" anchor="ctr">
-            <a:noAutofit/>
-          </a:bodyPr>
-          <a:lstStyle/>
-          <a:p>
-            <a:pPr algn="r">
-              <a:buNone/>
-            </a:pPr>
-            <a:r>
-              <a:rPr lang="en-US" sz="1000" b="0" i="1" u="none" strike="noStrike">
-                <a:solidFill>
-                  <a:srgbClr val="595959"/>
-                </a:solidFill>
-                <a:effectLst/>
-                <a:uFillTx/>
-                <a:latin typeface="Times New Roman"/>
-              </a:rPr>
-              <a:t>approved fix → next SOP version</a:t>
-            </a:r>
-            <a:endParaRPr lang="en-IN" sz="1000"/>
           </a:p>
         </p:txBody>
       </p:sp>
@@ -9066,7 +7881,7 @@
                 <a:uFillTx/>
                 <a:latin typeface="Times New Roman"/>
               </a:rPr>
-              <a:t>Applications</a:t>
+              <a:t>System Architecture (contd.)</a:t>
             </a:r>
             <a:endParaRPr lang="en-IN" sz="4000"/>
           </a:p>
@@ -9074,14 +7889,602 @@
       </p:sp>
       <p:sp>
         <p:nvSpPr>
-          <p:cNvPr id="19" name="TextBox 18"/>
+          <p:cNvPr id="60" name="box60"/>
+          <p:cNvSpPr/>
+          <p:nvPr/>
+        </p:nvSpPr>
+        <p:spPr>
+          <a:xfrm>
+            <a:off x="457200" y="1554480"/>
+            <a:ext cx="1600200" cy="1005840"/>
+          </a:xfrm>
+          <a:prstGeom prst="roundRect">
+            <a:avLst>
+              <a:gd name="adj" fmla="val 12000"/>
+            </a:avLst>
+          </a:prstGeom>
+          <a:solidFill>
+            <a:srgbClr val="E9EDF4"/>
+          </a:solidFill>
+          <a:ln w="12700">
+            <a:solidFill>
+              <a:srgbClr val="8A97A8"/>
+            </a:solidFill>
+          </a:ln>
+        </p:spPr>
+        <p:txBody>
+          <a:bodyPr lIns="45720" tIns="27432" rIns="45720" bIns="27432" anchor="ctr">
+            <a:normAutofit/>
+          </a:bodyPr>
+          <a:lstStyle/>
+          <a:p>
+            <a:pPr algn="ctr">
+              <a:lnSpc>
+                <a:spcPct val="100000"/>
+              </a:lnSpc>
+              <a:buNone/>
+            </a:pPr>
+            <a:r>
+              <a:rPr lang="en-US" sz="1200" b="1" i="0" u="none" strike="noStrike">
+                <a:solidFill>
+                  <a:srgbClr val="000000"/>
+                </a:solidFill>
+                <a:effectLst/>
+                <a:uFillTx/>
+                <a:latin typeface="Times New Roman"/>
+              </a:rPr>
+              <a:t>Supervisor Audio</a:t>
+            </a:r>
+            <a:endParaRPr lang="en-IN" sz="1200"/>
+          </a:p>
+          <a:p>
+            <a:pPr algn="ctr">
+              <a:lnSpc>
+                <a:spcPct val="100000"/>
+              </a:lnSpc>
+              <a:buNone/>
+            </a:pPr>
+            <a:r>
+              <a:rPr lang="en-US" sz="1100" b="0" i="0" u="none" strike="noStrike">
+                <a:solidFill>
+                  <a:srgbClr val="000000"/>
+                </a:solidFill>
+                <a:effectLst/>
+                <a:uFillTx/>
+                <a:latin typeface="Times New Roman"/>
+              </a:rPr>
+              <a:t>Mic recording</a:t>
+            </a:r>
+            <a:endParaRPr lang="en-IN" sz="1100"/>
+          </a:p>
+          <a:p>
+            <a:pPr algn="ctr">
+              <a:lnSpc>
+                <a:spcPct val="100000"/>
+              </a:lnSpc>
+              <a:buNone/>
+            </a:pPr>
+            <a:r>
+              <a:rPr lang="en-US" sz="1100" b="0" i="0" u="none" strike="noStrike">
+                <a:solidFill>
+                  <a:srgbClr val="000000"/>
+                </a:solidFill>
+                <a:effectLst/>
+                <a:uFillTx/>
+                <a:latin typeface="Times New Roman"/>
+              </a:rPr>
+              <a:t>or file upload</a:t>
+            </a:r>
+            <a:endParaRPr lang="en-IN" sz="1100"/>
+          </a:p>
+        </p:txBody>
+      </p:sp>
+      <p:sp>
+        <p:nvSpPr>
+          <p:cNvPr id="61" name="box61"/>
+          <p:cNvSpPr/>
+          <p:nvPr/>
+        </p:nvSpPr>
+        <p:spPr>
+          <a:xfrm>
+            <a:off x="2194560" y="1554480"/>
+            <a:ext cx="1600200" cy="1005840"/>
+          </a:xfrm>
+          <a:prstGeom prst="roundRect">
+            <a:avLst>
+              <a:gd name="adj" fmla="val 12000"/>
+            </a:avLst>
+          </a:prstGeom>
+          <a:solidFill>
+            <a:srgbClr val="D0D8E8"/>
+          </a:solidFill>
+          <a:ln w="12700">
+            <a:solidFill>
+              <a:srgbClr val="4F81BD"/>
+            </a:solidFill>
+          </a:ln>
+        </p:spPr>
+        <p:txBody>
+          <a:bodyPr lIns="45720" tIns="27432" rIns="45720" bIns="27432" anchor="ctr">
+            <a:normAutofit/>
+          </a:bodyPr>
+          <a:lstStyle/>
+          <a:p>
+            <a:pPr algn="ctr">
+              <a:lnSpc>
+                <a:spcPct val="100000"/>
+              </a:lnSpc>
+              <a:buNone/>
+            </a:pPr>
+            <a:r>
+              <a:rPr lang="en-US" sz="1200" b="1" i="0" u="none" strike="noStrike">
+                <a:solidFill>
+                  <a:srgbClr val="000000"/>
+                </a:solidFill>
+                <a:effectLst/>
+                <a:uFillTx/>
+                <a:latin typeface="Times New Roman"/>
+              </a:rPr>
+              <a:t>Stage 1: ASR</a:t>
+            </a:r>
+            <a:endParaRPr lang="en-IN" sz="1200"/>
+          </a:p>
+          <a:p>
+            <a:pPr algn="ctr">
+              <a:lnSpc>
+                <a:spcPct val="100000"/>
+              </a:lnSpc>
+              <a:buNone/>
+            </a:pPr>
+            <a:r>
+              <a:rPr lang="en-US" sz="1100" b="0" i="0" u="none" strike="noStrike">
+                <a:solidFill>
+                  <a:srgbClr val="000000"/>
+                </a:solidFill>
+                <a:effectLst/>
+                <a:uFillTx/>
+                <a:latin typeface="Times New Roman"/>
+              </a:rPr>
+              <a:t>Whisper (fine-tuned)</a:t>
+            </a:r>
+            <a:endParaRPr lang="en-IN" sz="1100"/>
+          </a:p>
+          <a:p>
+            <a:pPr algn="ctr">
+              <a:lnSpc>
+                <a:spcPct val="100000"/>
+              </a:lnSpc>
+              <a:buNone/>
+            </a:pPr>
+            <a:r>
+              <a:rPr lang="en-US" sz="1100" b="0" i="0" u="none" strike="noStrike">
+                <a:solidFill>
+                  <a:srgbClr val="000000"/>
+                </a:solidFill>
+                <a:effectLst/>
+                <a:uFillTx/>
+                <a:latin typeface="Times New Roman"/>
+              </a:rPr>
+              <a:t>hi / mr</a:t>
+            </a:r>
+            <a:endParaRPr lang="en-IN" sz="1100"/>
+          </a:p>
+        </p:txBody>
+      </p:sp>
+      <p:sp>
+        <p:nvSpPr>
+          <p:cNvPr id="62" name="box62"/>
+          <p:cNvSpPr/>
+          <p:nvPr/>
+        </p:nvSpPr>
+        <p:spPr>
+          <a:xfrm>
+            <a:off x="3931920" y="1554480"/>
+            <a:ext cx="1600200" cy="1005840"/>
+          </a:xfrm>
+          <a:prstGeom prst="roundRect">
+            <a:avLst>
+              <a:gd name="adj" fmla="val 12000"/>
+            </a:avLst>
+          </a:prstGeom>
+          <a:solidFill>
+            <a:srgbClr val="D0D8E8"/>
+          </a:solidFill>
+          <a:ln w="12700">
+            <a:solidFill>
+              <a:srgbClr val="4F81BD"/>
+            </a:solidFill>
+          </a:ln>
+        </p:spPr>
+        <p:txBody>
+          <a:bodyPr lIns="45720" tIns="27432" rIns="45720" bIns="27432" anchor="ctr">
+            <a:normAutofit/>
+          </a:bodyPr>
+          <a:lstStyle/>
+          <a:p>
+            <a:pPr algn="ctr">
+              <a:lnSpc>
+                <a:spcPct val="100000"/>
+              </a:lnSpc>
+              <a:buNone/>
+            </a:pPr>
+            <a:r>
+              <a:rPr lang="en-US" sz="1200" b="1" i="0" u="none" strike="noStrike">
+                <a:solidFill>
+                  <a:srgbClr val="000000"/>
+                </a:solidFill>
+                <a:effectLst/>
+                <a:uFillTx/>
+                <a:latin typeface="Times New Roman"/>
+              </a:rPr>
+              <a:t>Stage 2: LLM</a:t>
+            </a:r>
+            <a:endParaRPr lang="en-IN" sz="1200"/>
+          </a:p>
+          <a:p>
+            <a:pPr algn="ctr">
+              <a:lnSpc>
+                <a:spcPct val="100000"/>
+              </a:lnSpc>
+              <a:buNone/>
+            </a:pPr>
+            <a:r>
+              <a:rPr lang="en-US" sz="1100" b="0" i="0" u="none" strike="noStrike">
+                <a:solidFill>
+                  <a:srgbClr val="000000"/>
+                </a:solidFill>
+                <a:effectLst/>
+                <a:uFillTx/>
+                <a:latin typeface="Times New Roman"/>
+              </a:rPr>
+              <a:t>Order steps +</a:t>
+            </a:r>
+            <a:endParaRPr lang="en-IN" sz="1100"/>
+          </a:p>
+          <a:p>
+            <a:pPr algn="ctr">
+              <a:lnSpc>
+                <a:spcPct val="100000"/>
+              </a:lnSpc>
+              <a:buNone/>
+            </a:pPr>
+            <a:r>
+              <a:rPr lang="en-US" sz="1100" b="0" i="0" u="none" strike="noStrike">
+                <a:solidFill>
+                  <a:srgbClr val="000000"/>
+                </a:solidFill>
+                <a:effectLst/>
+                <a:uFillTx/>
+                <a:latin typeface="Times New Roman"/>
+              </a:rPr>
+              <a:t>flag hazards</a:t>
+            </a:r>
+            <a:endParaRPr lang="en-IN" sz="1100"/>
+          </a:p>
+        </p:txBody>
+      </p:sp>
+      <p:sp>
+        <p:nvSpPr>
+          <p:cNvPr id="63" name="box63"/>
+          <p:cNvSpPr/>
+          <p:nvPr/>
+        </p:nvSpPr>
+        <p:spPr>
+          <a:xfrm>
+            <a:off x="5669280" y="1554480"/>
+            <a:ext cx="1600200" cy="1005840"/>
+          </a:xfrm>
+          <a:prstGeom prst="roundRect">
+            <a:avLst>
+              <a:gd name="adj" fmla="val 12000"/>
+            </a:avLst>
+          </a:prstGeom>
+          <a:solidFill>
+            <a:srgbClr val="D0D8E8"/>
+          </a:solidFill>
+          <a:ln w="12700">
+            <a:solidFill>
+              <a:srgbClr val="4F81BD"/>
+            </a:solidFill>
+          </a:ln>
+        </p:spPr>
+        <p:txBody>
+          <a:bodyPr lIns="45720" tIns="27432" rIns="45720" bIns="27432" anchor="ctr">
+            <a:normAutofit/>
+          </a:bodyPr>
+          <a:lstStyle/>
+          <a:p>
+            <a:pPr algn="ctr">
+              <a:lnSpc>
+                <a:spcPct val="100000"/>
+              </a:lnSpc>
+              <a:buNone/>
+            </a:pPr>
+            <a:r>
+              <a:rPr lang="en-US" sz="1200" b="1" i="0" u="none" strike="noStrike">
+                <a:solidFill>
+                  <a:srgbClr val="000000"/>
+                </a:solidFill>
+                <a:effectLst/>
+                <a:uFillTx/>
+                <a:latin typeface="Times New Roman"/>
+              </a:rPr>
+              <a:t>Stage 3: TTS</a:t>
+            </a:r>
+            <a:endParaRPr lang="en-IN" sz="1200"/>
+          </a:p>
+          <a:p>
+            <a:pPr algn="ctr">
+              <a:lnSpc>
+                <a:spcPct val="100000"/>
+              </a:lnSpc>
+              <a:buNone/>
+            </a:pPr>
+            <a:r>
+              <a:rPr lang="en-US" sz="1100" b="0" i="0" u="none" strike="noStrike">
+                <a:solidFill>
+                  <a:srgbClr val="000000"/>
+                </a:solidFill>
+                <a:effectLst/>
+                <a:uFillTx/>
+                <a:latin typeface="Times New Roman"/>
+              </a:rPr>
+              <a:t>edge-tts</a:t>
+            </a:r>
+            <a:endParaRPr lang="en-IN" sz="1100"/>
+          </a:p>
+          <a:p>
+            <a:pPr algn="ctr">
+              <a:lnSpc>
+                <a:spcPct val="100000"/>
+              </a:lnSpc>
+              <a:buNone/>
+            </a:pPr>
+            <a:r>
+              <a:rPr lang="en-US" sz="1100" b="0" i="0" u="none" strike="noStrike">
+                <a:solidFill>
+                  <a:srgbClr val="000000"/>
+                </a:solidFill>
+                <a:effectLst/>
+                <a:uFillTx/>
+                <a:latin typeface="Times New Roman"/>
+              </a:rPr>
+              <a:t>per-step audio</a:t>
+            </a:r>
+            <a:endParaRPr lang="en-IN" sz="1100"/>
+          </a:p>
+        </p:txBody>
+      </p:sp>
+      <p:sp>
+        <p:nvSpPr>
+          <p:cNvPr id="64" name="box64"/>
+          <p:cNvSpPr/>
+          <p:nvPr/>
+        </p:nvSpPr>
+        <p:spPr>
+          <a:xfrm>
+            <a:off x="7406640" y="1554480"/>
+            <a:ext cx="1600200" cy="1005840"/>
+          </a:xfrm>
+          <a:prstGeom prst="roundRect">
+            <a:avLst>
+              <a:gd name="adj" fmla="val 12000"/>
+            </a:avLst>
+          </a:prstGeom>
+          <a:solidFill>
+            <a:srgbClr val="E9EDF4"/>
+          </a:solidFill>
+          <a:ln w="12700">
+            <a:solidFill>
+              <a:srgbClr val="8A97A8"/>
+            </a:solidFill>
+          </a:ln>
+        </p:spPr>
+        <p:txBody>
+          <a:bodyPr lIns="45720" tIns="27432" rIns="45720" bIns="27432" anchor="ctr">
+            <a:normAutofit/>
+          </a:bodyPr>
+          <a:lstStyle/>
+          <a:p>
+            <a:pPr algn="ctr">
+              <a:lnSpc>
+                <a:spcPct val="100000"/>
+              </a:lnSpc>
+              <a:buNone/>
+            </a:pPr>
+            <a:r>
+              <a:rPr lang="en-US" sz="1200" b="1" i="0" u="none" strike="noStrike">
+                <a:solidFill>
+                  <a:srgbClr val="000000"/>
+                </a:solidFill>
+                <a:effectLst/>
+                <a:uFillTx/>
+                <a:latin typeface="Times New Roman"/>
+              </a:rPr>
+              <a:t>Stage 4: UI</a:t>
+            </a:r>
+            <a:endParaRPr lang="en-IN" sz="1200"/>
+          </a:p>
+          <a:p>
+            <a:pPr algn="ctr">
+              <a:lnSpc>
+                <a:spcPct val="100000"/>
+              </a:lnSpc>
+              <a:buNone/>
+            </a:pPr>
+            <a:r>
+              <a:rPr lang="en-US" sz="1100" b="0" i="0" u="none" strike="noStrike">
+                <a:solidFill>
+                  <a:srgbClr val="000000"/>
+                </a:solidFill>
+                <a:effectLst/>
+                <a:uFillTx/>
+                <a:latin typeface="Times New Roman"/>
+              </a:rPr>
+              <a:t>Visual SOP</a:t>
+            </a:r>
+            <a:endParaRPr lang="en-IN" sz="1100"/>
+          </a:p>
+          <a:p>
+            <a:pPr algn="ctr">
+              <a:lnSpc>
+                <a:spcPct val="100000"/>
+              </a:lnSpc>
+              <a:buNone/>
+            </a:pPr>
+            <a:r>
+              <a:rPr lang="en-US" sz="1100" b="0" i="0" u="none" strike="noStrike">
+                <a:solidFill>
+                  <a:srgbClr val="000000"/>
+                </a:solidFill>
+                <a:effectLst/>
+                <a:uFillTx/>
+                <a:latin typeface="Times New Roman"/>
+              </a:rPr>
+              <a:t>cards</a:t>
+            </a:r>
+            <a:endParaRPr lang="en-IN" sz="1100"/>
+          </a:p>
+        </p:txBody>
+      </p:sp>
+      <p:sp>
+        <p:nvSpPr>
+          <p:cNvPr id="70" name="arr70"/>
+          <p:cNvSpPr/>
+          <p:nvPr/>
+        </p:nvSpPr>
+        <p:spPr>
+          <a:xfrm>
+            <a:off x="2066544" y="2011680"/>
+            <a:ext cx="118872" cy="91440"/>
+          </a:xfrm>
+          <a:prstGeom prst="rightArrow">
+            <a:avLst/>
+          </a:prstGeom>
+          <a:solidFill>
+            <a:srgbClr val="8A97A8"/>
+          </a:solidFill>
+          <a:ln w="0">
+            <a:noFill/>
+          </a:ln>
+        </p:spPr>
+        <p:txBody>
+          <a:bodyPr/>
+          <a:lstStyle/>
+          <a:p>
+            <a:pPr>
+              <a:buNone/>
+            </a:pPr>
+            <a:endParaRPr lang="en-IN" sz="900"/>
+          </a:p>
+        </p:txBody>
+      </p:sp>
+      <p:sp>
+        <p:nvSpPr>
+          <p:cNvPr id="71" name="arr71"/>
+          <p:cNvSpPr/>
+          <p:nvPr/>
+        </p:nvSpPr>
+        <p:spPr>
+          <a:xfrm>
+            <a:off x="3803904" y="2011680"/>
+            <a:ext cx="118872" cy="91440"/>
+          </a:xfrm>
+          <a:prstGeom prst="rightArrow">
+            <a:avLst/>
+          </a:prstGeom>
+          <a:solidFill>
+            <a:srgbClr val="8A97A8"/>
+          </a:solidFill>
+          <a:ln w="0">
+            <a:noFill/>
+          </a:ln>
+        </p:spPr>
+        <p:txBody>
+          <a:bodyPr/>
+          <a:lstStyle/>
+          <a:p>
+            <a:pPr>
+              <a:buNone/>
+            </a:pPr>
+            <a:endParaRPr lang="en-IN" sz="900"/>
+          </a:p>
+        </p:txBody>
+      </p:sp>
+      <p:sp>
+        <p:nvSpPr>
+          <p:cNvPr id="72" name="arr72"/>
+          <p:cNvSpPr/>
+          <p:nvPr/>
+        </p:nvSpPr>
+        <p:spPr>
+          <a:xfrm>
+            <a:off x="5541264" y="2011680"/>
+            <a:ext cx="118872" cy="91440"/>
+          </a:xfrm>
+          <a:prstGeom prst="rightArrow">
+            <a:avLst/>
+          </a:prstGeom>
+          <a:solidFill>
+            <a:srgbClr val="8A97A8"/>
+          </a:solidFill>
+          <a:ln w="0">
+            <a:noFill/>
+          </a:ln>
+        </p:spPr>
+        <p:txBody>
+          <a:bodyPr/>
+          <a:lstStyle/>
+          <a:p>
+            <a:pPr>
+              <a:buNone/>
+            </a:pPr>
+            <a:endParaRPr lang="en-IN" sz="900"/>
+          </a:p>
+        </p:txBody>
+      </p:sp>
+      <p:sp>
+        <p:nvSpPr>
+          <p:cNvPr id="73" name="arr73"/>
+          <p:cNvSpPr/>
+          <p:nvPr/>
+        </p:nvSpPr>
+        <p:spPr>
+          <a:xfrm>
+            <a:off x="7278624" y="2011680"/>
+            <a:ext cx="118872" cy="91440"/>
+          </a:xfrm>
+          <a:prstGeom prst="rightArrow">
+            <a:avLst/>
+          </a:prstGeom>
+          <a:solidFill>
+            <a:srgbClr val="8A97A8"/>
+          </a:solidFill>
+          <a:ln w="0">
+            <a:noFill/>
+          </a:ln>
+        </p:spPr>
+        <p:txBody>
+          <a:bodyPr/>
+          <a:lstStyle/>
+          <a:p>
+            <a:pPr>
+              <a:buNone/>
+            </a:pPr>
+            <a:endParaRPr lang="en-IN" sz="900"/>
+          </a:p>
+        </p:txBody>
+      </p:sp>
+      <p:sp>
+        <p:nvSpPr>
+          <p:cNvPr id="90" name="TextBox 89"/>
           <p:cNvSpPr txBox="1"/>
           <p:nvPr/>
         </p:nvSpPr>
         <p:spPr>
           <a:xfrm>
-            <a:off x="457200" y="1188720"/>
-            <a:ext cx="8229600" cy="4876800"/>
+            <a:off x="457200" y="4434840"/>
+            <a:ext cx="8229600" cy="1874520"/>
           </a:xfrm>
           <a:prstGeom prst="rect">
             <a:avLst/>
@@ -9097,9 +8500,26 @@
           </a:bodyPr>
           <a:lstStyle/>
           <a:p>
-            <a:pPr marL="342900" indent="-342900">
+            <a:pPr indent="0">
+              <a:buNone/>
+            </a:pPr>
+            <a:r>
+              <a:rPr lang="en-US" sz="1500" b="1" i="0" u="none" strike="noStrike" dirty="0">
+                <a:solidFill>
+                  <a:srgbClr val="000000"/>
+                </a:solidFill>
+                <a:effectLst/>
+                <a:uFillTx/>
+                <a:latin typeface="Times New Roman"/>
+              </a:rPr>
+              <a:t>How the two features connect</a:t>
+            </a:r>
+            <a:endParaRPr lang="en-IN" sz="1500" dirty="0"/>
+          </a:p>
+          <a:p>
+            <a:pPr marL="285750" indent="-285750">
               <a:spcBef>
-                <a:spcPts val="900"/>
+                <a:spcPts val="400"/>
               </a:spcBef>
               <a:buClr>
                 <a:srgbClr val="000000"/>
@@ -9122,22 +8542,22 @@
               </a:tabLst>
             </a:pPr>
             <a:r>
-              <a:rPr lang="en-US" sz="1700" b="0" i="0" u="none" strike="noStrike" dirty="0" err="1">
-                <a:solidFill>
-                  <a:srgbClr val="000000"/>
-                </a:solidFill>
-                <a:effectLst/>
-                <a:uFillTx/>
-                <a:latin typeface="Times New Roman"/>
-              </a:rPr>
-              <a:t>Digitising machine operating procedures on manufacturing shop floors without a technical writer.</a:t>
-            </a:r>
-            <a:endParaRPr lang="en-IN" sz="1700" dirty="0"/>
-          </a:p>
-          <a:p>
-            <a:pPr marL="342900" indent="-342900">
+              <a:rPr lang="en-US" sz="1400" b="0" i="0" u="none" strike="noStrike" dirty="0">
+                <a:solidFill>
+                  <a:srgbClr val="000000"/>
+                </a:solidFill>
+                <a:effectLst/>
+                <a:uFillTx/>
+                <a:latin typeface="Times New Roman"/>
+              </a:rPr>
+              <a:t>One shared speech stack: the same per-language Whisper ASR and edge-tts voices serve both the supervisor and the worker.</a:t>
+            </a:r>
+            <a:endParaRPr lang="en-IN" sz="1400" dirty="0"/>
+          </a:p>
+          <a:p>
+            <a:pPr marL="285750" indent="-285750">
               <a:spcBef>
-                <a:spcPts val="900"/>
+                <a:spcPts val="400"/>
               </a:spcBef>
               <a:buClr>
                 <a:srgbClr val="000000"/>
@@ -9160,22 +8580,22 @@
               </a:tabLst>
             </a:pPr>
             <a:r>
-              <a:rPr lang="en-US" sz="1700" b="0" i="0" u="none" strike="noStrike" dirty="0" err="1">
-                <a:solidFill>
-                  <a:srgbClr val="000000"/>
-                </a:solidFill>
-                <a:effectLst/>
-                <a:uFillTx/>
-                <a:latin typeface="Times New Roman"/>
-              </a:rPr>
-              <a:t>Onboarding and training new or migrant workers in the language they actually speak.</a:t>
-            </a:r>
-            <a:endParaRPr lang="en-IN" sz="1700" dirty="0"/>
-          </a:p>
-          <a:p>
-            <a:pPr marL="342900" indent="-342900">
+              <a:rPr lang="en-US" sz="1400" b="0" i="0" u="none" strike="noStrike" dirty="0">
+                <a:solidFill>
+                  <a:srgbClr val="000000"/>
+                </a:solidFill>
+                <a:effectLst/>
+                <a:uFillTx/>
+                <a:latin typeface="Times New Roman"/>
+              </a:rPr>
+              <a:t>The card is the bridge: a worker reports from the exact card and step he is using, so every report is tied to a machine, a step and an SOP version.</a:t>
+            </a:r>
+            <a:endParaRPr lang="en-IN" sz="1400" dirty="0"/>
+          </a:p>
+          <a:p>
+            <a:pPr marL="285750" indent="-285750">
               <a:spcBef>
-                <a:spcPts val="900"/>
+                <a:spcPts val="400"/>
               </a:spcBef>
               <a:buClr>
                 <a:srgbClr val="000000"/>
@@ -9198,245 +8618,17 @@
               </a:tabLst>
             </a:pPr>
             <a:r>
-              <a:rPr lang="en-US" sz="1700" b="0" i="0" u="none" strike="noStrike" dirty="0" err="1">
-                <a:solidFill>
-                  <a:srgbClr val="000000"/>
-                </a:solidFill>
-                <a:effectLst/>
-                <a:uFillTx/>
-                <a:latin typeface="Times New Roman"/>
-              </a:rPr>
-              <a:t>Anonymous hazard and near-miss reporting for non-literate workers - catching worn pedals, missing guards and wrong cards before an injury.</a:t>
-            </a:r>
-            <a:endParaRPr lang="en-IN" sz="1700" dirty="0"/>
-          </a:p>
-          <a:p>
-            <a:pPr marL="342900" indent="-342900">
-              <a:spcBef>
-                <a:spcPts val="900"/>
-              </a:spcBef>
-              <a:buClr>
-                <a:srgbClr val="000000"/>
-              </a:buClr>
-              <a:buFont typeface="Arial" panose="020B0604020202020204" pitchFamily="34" charset="0"/>
-              <a:buChar char="•"/>
-              <a:tabLst>
-                <a:tab pos="0" algn="l"/>
-                <a:tab pos="914400" algn="l"/>
-                <a:tab pos="1828800" algn="l"/>
-                <a:tab pos="2743200" algn="l"/>
-                <a:tab pos="3657600" algn="l"/>
-                <a:tab pos="4572000" algn="l"/>
-                <a:tab pos="5486400" algn="l"/>
-                <a:tab pos="6400800" algn="l"/>
-                <a:tab pos="7315200" algn="l"/>
-                <a:tab pos="8229600" algn="l"/>
-                <a:tab pos="9144000" algn="l"/>
-                <a:tab pos="10058400" algn="l"/>
-              </a:tabLst>
-            </a:pPr>
-            <a:r>
-              <a:rPr lang="en-US" sz="1700" b="0" i="0" u="none" strike="noStrike" dirty="0" err="1">
-                <a:solidFill>
-                  <a:srgbClr val="000000"/>
-                </a:solidFill>
-                <a:effectLst/>
-                <a:uFillTx/>
-                <a:latin typeface="Times New Roman"/>
-              </a:rPr>
-              <a:t>Continuous SOP improvement: confirmed worker reports become reviewed card corrections.</a:t>
-            </a:r>
-            <a:endParaRPr lang="en-IN" sz="1700" dirty="0"/>
-          </a:p>
-          <a:p>
-            <a:pPr marL="342900" indent="-342900">
-              <a:spcBef>
-                <a:spcPts val="900"/>
-              </a:spcBef>
-              <a:buClr>
-                <a:srgbClr val="000000"/>
-              </a:buClr>
-              <a:buFont typeface="Arial" panose="020B0604020202020204" pitchFamily="34" charset="0"/>
-              <a:buChar char="•"/>
-              <a:tabLst>
-                <a:tab pos="0" algn="l"/>
-                <a:tab pos="914400" algn="l"/>
-                <a:tab pos="1828800" algn="l"/>
-                <a:tab pos="2743200" algn="l"/>
-                <a:tab pos="3657600" algn="l"/>
-                <a:tab pos="4572000" algn="l"/>
-                <a:tab pos="5486400" algn="l"/>
-                <a:tab pos="6400800" algn="l"/>
-                <a:tab pos="7315200" algn="l"/>
-                <a:tab pos="8229600" algn="l"/>
-                <a:tab pos="9144000" algn="l"/>
-                <a:tab pos="10058400" algn="l"/>
-              </a:tabLst>
-            </a:pPr>
-            <a:r>
-              <a:rPr lang="en-US" sz="1700" b="0" i="0" u="none" strike="noStrike" dirty="0" err="1">
-                <a:solidFill>
-                  <a:srgbClr val="000000"/>
-                </a:solidFill>
-                <a:effectLst/>
-                <a:uFillTx/>
-                <a:latin typeface="Times New Roman"/>
-              </a:rPr>
-              <a:t>Safety compliance and audit - hazard steps, report SLAs and escalations are logged per line and machine.</a:t>
-            </a:r>
-            <a:endParaRPr lang="en-IN" sz="1700" dirty="0"/>
-          </a:p>
-          <a:p>
-            <a:pPr marL="342900" indent="-342900">
-              <a:spcBef>
-                <a:spcPts val="900"/>
-              </a:spcBef>
-              <a:buClr>
-                <a:srgbClr val="000000"/>
-              </a:buClr>
-              <a:buFont typeface="Arial" panose="020B0604020202020204" pitchFamily="34" charset="0"/>
-              <a:buChar char="•"/>
-              <a:tabLst>
-                <a:tab pos="0" algn="l"/>
-                <a:tab pos="914400" algn="l"/>
-                <a:tab pos="1828800" algn="l"/>
-                <a:tab pos="2743200" algn="l"/>
-                <a:tab pos="3657600" algn="l"/>
-                <a:tab pos="4572000" algn="l"/>
-                <a:tab pos="5486400" algn="l"/>
-                <a:tab pos="6400800" algn="l"/>
-                <a:tab pos="7315200" algn="l"/>
-                <a:tab pos="8229600" algn="l"/>
-                <a:tab pos="9144000" algn="l"/>
-                <a:tab pos="10058400" algn="l"/>
-              </a:tabLst>
-            </a:pPr>
-            <a:r>
-              <a:rPr lang="en-US" sz="1700" b="0" i="0" u="none" strike="noStrike" dirty="0" err="1">
-                <a:solidFill>
-                  <a:srgbClr val="000000"/>
-                </a:solidFill>
-                <a:effectLst/>
-                <a:uFillTx/>
-                <a:latin typeface="Times New Roman"/>
-              </a:rPr>
-              <a:t>Training-needs analysis from 'understanding' reports, which point to steps workers find confusing.</a:t>
-            </a:r>
-            <a:endParaRPr lang="en-IN" sz="1700" dirty="0"/>
-          </a:p>
-          <a:p>
-            <a:pPr marL="342900" indent="-342900">
-              <a:spcBef>
-                <a:spcPts val="900"/>
-              </a:spcBef>
-              <a:buClr>
-                <a:srgbClr val="000000"/>
-              </a:buClr>
-              <a:buFont typeface="Arial" panose="020B0604020202020204" pitchFamily="34" charset="0"/>
-              <a:buChar char="•"/>
-              <a:tabLst>
-                <a:tab pos="0" algn="l"/>
-                <a:tab pos="914400" algn="l"/>
-                <a:tab pos="1828800" algn="l"/>
-                <a:tab pos="2743200" algn="l"/>
-                <a:tab pos="3657600" algn="l"/>
-                <a:tab pos="4572000" algn="l"/>
-                <a:tab pos="5486400" algn="l"/>
-                <a:tab pos="6400800" algn="l"/>
-                <a:tab pos="7315200" algn="l"/>
-                <a:tab pos="8229600" algn="l"/>
-                <a:tab pos="9144000" algn="l"/>
-                <a:tab pos="10058400" algn="l"/>
-              </a:tabLst>
-            </a:pPr>
-            <a:r>
-              <a:rPr lang="en-US" sz="1700" b="0" i="0" u="none" strike="noStrike" dirty="0" err="1">
-                <a:solidFill>
-                  <a:srgbClr val="000000"/>
-                </a:solidFill>
-                <a:effectLst/>
-                <a:uFillTx/>
-                <a:latin typeface="Times New Roman"/>
-              </a:rPr>
-              <a:t>Transferable to agriculture advisories, healthcare protocols and rural skill training with only a vocabulary change.</a:t>
-            </a:r>
-            <a:endParaRPr lang="en-IN" sz="1700" dirty="0"/>
-          </a:p>
-          <a:p>
-            <a:pPr marL="342900" indent="-342900">
-              <a:spcBef>
-                <a:spcPts val="900"/>
-              </a:spcBef>
-              <a:buClr>
-                <a:srgbClr val="000000"/>
-              </a:buClr>
-              <a:buFont typeface="Arial" panose="020B0604020202020204" pitchFamily="34" charset="0"/>
-              <a:buChar char="•"/>
-              <a:tabLst>
-                <a:tab pos="0" algn="l"/>
-                <a:tab pos="914400" algn="l"/>
-                <a:tab pos="1828800" algn="l"/>
-                <a:tab pos="2743200" algn="l"/>
-                <a:tab pos="3657600" algn="l"/>
-                <a:tab pos="4572000" algn="l"/>
-                <a:tab pos="5486400" algn="l"/>
-                <a:tab pos="6400800" algn="l"/>
-                <a:tab pos="7315200" algn="l"/>
-                <a:tab pos="8229600" algn="l"/>
-                <a:tab pos="9144000" algn="l"/>
-                <a:tab pos="10058400" algn="l"/>
-              </a:tabLst>
-            </a:pPr>
-            <a:r>
-              <a:rPr lang="en-US" sz="1700" b="0" i="0" u="none" strike="noStrike" dirty="0" err="1">
-                <a:solidFill>
-                  <a:srgbClr val="000000"/>
-                </a:solidFill>
-                <a:effectLst/>
-                <a:uFillTx/>
-                <a:latin typeface="Times New Roman"/>
-              </a:rPr>
-              <a:t>Plant-wide employee directory, shift scheduling and supervisor-run clock-in/out, replacing paper registers and verbal rosters.</a:t>
-            </a:r>
-            <a:endParaRPr lang="en-IN" sz="1700" dirty="0"/>
-          </a:p>
-          <a:p>
-            <a:pPr marL="342900" indent="-342900">
-              <a:spcBef>
-                <a:spcPts val="900"/>
-              </a:spcBef>
-              <a:buClr>
-                <a:srgbClr val="000000"/>
-              </a:buClr>
-              <a:buFont typeface="Arial" panose="020B0604020202020204" pitchFamily="34" charset="0"/>
-              <a:buChar char="•"/>
-              <a:tabLst>
-                <a:tab pos="0" algn="l"/>
-                <a:tab pos="914400" algn="l"/>
-                <a:tab pos="1828800" algn="l"/>
-                <a:tab pos="2743200" algn="l"/>
-                <a:tab pos="3657600" algn="l"/>
-                <a:tab pos="4572000" algn="l"/>
-                <a:tab pos="5486400" algn="l"/>
-                <a:tab pos="6400800" algn="l"/>
-                <a:tab pos="7315200" algn="l"/>
-                <a:tab pos="8229600" algn="l"/>
-                <a:tab pos="9144000" algn="l"/>
-                <a:tab pos="10058400" algn="l"/>
-              </a:tabLst>
-            </a:pPr>
-            <a:r>
-              <a:rPr lang="en-US" sz="1700" b="0" i="0" u="none" strike="noStrike" dirty="0" err="1">
-                <a:solidFill>
-                  <a:srgbClr val="000000"/>
-                </a:solidFill>
-                <a:effectLst/>
-                <a:uFillTx/>
-                <a:latin typeface="Times New Roman"/>
-              </a:rPr>
-              <a:t>Self-service leave requests and a lightweight recruitment pipeline, under the same login a supervisor or manager already has.</a:t>
-            </a:r>
-            <a:endParaRPr lang="en-IN" sz="1700" dirty="0"/>
+              <a:rPr lang="en-US" sz="1400" b="0" i="0" u="none" strike="noStrike" dirty="0">
+                <a:solidFill>
+                  <a:srgbClr val="000000"/>
+                </a:solidFill>
+                <a:effectLst/>
+                <a:uFillTx/>
+                <a:latin typeface="Times New Roman"/>
+              </a:rPr>
+              <a:t>The loop closes both ways: an approved fix republishes the card, and the worker hears the outcome in his own language.</a:t>
+            </a:r>
+            <a:endParaRPr lang="en-IN" sz="1400" dirty="0"/>
           </a:p>
         </p:txBody>
       </p:sp>
@@ -9671,9 +8863,715 @@
                 <a:uFillTx/>
                 <a:latin typeface="Calibri"/>
               </a:rPr>
-              <a:t>11</a:t>
+              <a:t>16</a:t>
             </a:fld>
             <a:endParaRPr lang="en-IN" sz="1200"/>
+          </a:p>
+        </p:txBody>
+      </p:sp>
+      <p:sp>
+        <p:nvSpPr>
+          <p:cNvPr id="503" name="FeatureHeading"/>
+          <p:cNvSpPr txBox="1"/>
+          <p:nvPr/>
+        </p:nvSpPr>
+        <p:spPr>
+          <a:xfrm>
+            <a:off x="457200" y="1161288"/>
+            <a:ext cx="8229600" cy="338328"/>
+          </a:xfrm>
+          <a:prstGeom prst="rect">
+            <a:avLst/>
+          </a:prstGeom>
+          <a:noFill/>
+          <a:ln w="0">
+            <a:noFill/>
+          </a:ln>
+        </p:spPr>
+        <p:txBody>
+          <a:bodyPr anchor="t">
+            <a:normAutofit/>
+          </a:bodyPr>
+          <a:lstStyle/>
+          <a:p>
+            <a:pPr indent="0">
+              <a:buNone/>
+            </a:pPr>
+            <a:r>
+              <a:rPr lang="en-US" sz="1500" b="1" i="0" u="none" strike="noStrike" dirty="0">
+                <a:solidFill>
+                  <a:srgbClr val="000000"/>
+                </a:solidFill>
+                <a:effectLst/>
+                <a:uFillTx/>
+                <a:latin typeface="Times New Roman"/>
+              </a:rPr>
+              <a:t>Closed loop: Feature 1 (top) publishes the cards, Feature 2 (bottom) improves them</a:t>
+            </a:r>
+            <a:endParaRPr lang="en-IN" sz="1500" dirty="0"/>
+          </a:p>
+        </p:txBody>
+      </p:sp>
+      <p:sp>
+        <p:nvSpPr>
+          <p:cNvPr id="504" name="box60_f2"/>
+          <p:cNvSpPr/>
+          <p:nvPr/>
+        </p:nvSpPr>
+        <p:spPr>
+          <a:xfrm>
+            <a:off x="457200" y="3246120"/>
+            <a:ext cx="1600200" cy="1005840"/>
+          </a:xfrm>
+          <a:prstGeom prst="roundRect">
+            <a:avLst>
+              <a:gd name="adj" fmla="val 12000"/>
+            </a:avLst>
+          </a:prstGeom>
+          <a:solidFill>
+            <a:srgbClr val="E9EDF4"/>
+          </a:solidFill>
+          <a:ln w="12700">
+            <a:solidFill>
+              <a:srgbClr val="8A97A8"/>
+            </a:solidFill>
+          </a:ln>
+        </p:spPr>
+        <p:txBody>
+          <a:bodyPr lIns="45720" tIns="27432" rIns="45720" bIns="27432" anchor="ctr">
+            <a:normAutofit/>
+          </a:bodyPr>
+          <a:lstStyle/>
+          <a:p>
+            <a:pPr algn="ctr">
+              <a:lnSpc>
+                <a:spcPct val="100000"/>
+              </a:lnSpc>
+              <a:buNone/>
+            </a:pPr>
+            <a:r>
+              <a:rPr lang="en-US" sz="1200" b="1" i="0" u="none" strike="noStrike">
+                <a:solidFill>
+                  <a:srgbClr val="000000"/>
+                </a:solidFill>
+                <a:effectLst/>
+                <a:uFillTx/>
+                <a:latin typeface="Times New Roman"/>
+              </a:rPr>
+              <a:t>Worker Voice</a:t>
+            </a:r>
+            <a:endParaRPr lang="en-IN" sz="1200"/>
+          </a:p>
+          <a:p>
+            <a:pPr algn="ctr">
+              <a:lnSpc>
+                <a:spcPct val="100000"/>
+              </a:lnSpc>
+              <a:buNone/>
+            </a:pPr>
+            <a:r>
+              <a:rPr lang="en-US" sz="1100" b="0" i="0" u="none" strike="noStrike">
+                <a:solidFill>
+                  <a:srgbClr val="000000"/>
+                </a:solidFill>
+                <a:effectLst/>
+                <a:uFillTx/>
+                <a:latin typeface="Times New Roman"/>
+              </a:rPr>
+              <a:t>Holds mic on</a:t>
+            </a:r>
+            <a:endParaRPr lang="en-IN" sz="1100"/>
+          </a:p>
+          <a:p>
+            <a:pPr algn="ctr">
+              <a:lnSpc>
+                <a:spcPct val="100000"/>
+              </a:lnSpc>
+              <a:buNone/>
+            </a:pPr>
+            <a:r>
+              <a:rPr lang="en-US" sz="1100" b="0" i="0" u="none" strike="noStrike">
+                <a:solidFill>
+                  <a:srgbClr val="000000"/>
+                </a:solidFill>
+                <a:effectLst/>
+                <a:uFillTx/>
+                <a:latin typeface="Times New Roman"/>
+              </a:rPr>
+              <a:t>the SOP card</a:t>
+            </a:r>
+            <a:endParaRPr lang="en-IN" sz="1100"/>
+          </a:p>
+        </p:txBody>
+      </p:sp>
+      <p:sp>
+        <p:nvSpPr>
+          <p:cNvPr id="505" name="box61_f2"/>
+          <p:cNvSpPr/>
+          <p:nvPr/>
+        </p:nvSpPr>
+        <p:spPr>
+          <a:xfrm>
+            <a:off x="2194560" y="3246120"/>
+            <a:ext cx="1600200" cy="1005840"/>
+          </a:xfrm>
+          <a:prstGeom prst="roundRect">
+            <a:avLst>
+              <a:gd name="adj" fmla="val 12000"/>
+            </a:avLst>
+          </a:prstGeom>
+          <a:solidFill>
+            <a:srgbClr val="D0D8E8"/>
+          </a:solidFill>
+          <a:ln w="12700">
+            <a:solidFill>
+              <a:srgbClr val="4F81BD"/>
+            </a:solidFill>
+          </a:ln>
+        </p:spPr>
+        <p:txBody>
+          <a:bodyPr lIns="45720" tIns="27432" rIns="45720" bIns="27432" anchor="ctr">
+            <a:normAutofit/>
+          </a:bodyPr>
+          <a:lstStyle/>
+          <a:p>
+            <a:pPr algn="ctr">
+              <a:lnSpc>
+                <a:spcPct val="100000"/>
+              </a:lnSpc>
+              <a:buNone/>
+            </a:pPr>
+            <a:r>
+              <a:rPr lang="en-US" sz="1200" b="1" i="0" u="none" strike="noStrike">
+                <a:solidFill>
+                  <a:srgbClr val="000000"/>
+                </a:solidFill>
+                <a:effectLst/>
+                <a:uFillTx/>
+                <a:latin typeface="Times New Roman"/>
+              </a:rPr>
+              <a:t>Stage 1: ASR</a:t>
+            </a:r>
+            <a:endParaRPr lang="en-IN" sz="1200"/>
+          </a:p>
+          <a:p>
+            <a:pPr algn="ctr">
+              <a:lnSpc>
+                <a:spcPct val="100000"/>
+              </a:lnSpc>
+              <a:buNone/>
+            </a:pPr>
+            <a:r>
+              <a:rPr lang="en-US" sz="1100" b="0" i="0" u="none" strike="noStrike">
+                <a:solidFill>
+                  <a:srgbClr val="000000"/>
+                </a:solidFill>
+                <a:effectLst/>
+                <a:uFillTx/>
+                <a:latin typeface="Times New Roman"/>
+              </a:rPr>
+              <a:t>Whisper hi / mr</a:t>
+            </a:r>
+            <a:endParaRPr lang="en-IN" sz="1100"/>
+          </a:p>
+          <a:p>
+            <a:pPr algn="ctr">
+              <a:lnSpc>
+                <a:spcPct val="100000"/>
+              </a:lnSpc>
+              <a:buNone/>
+            </a:pPr>
+            <a:r>
+              <a:rPr lang="en-US" sz="1100" b="0" i="0" u="none" strike="noStrike">
+                <a:solidFill>
+                  <a:srgbClr val="000000"/>
+                </a:solidFill>
+                <a:effectLst/>
+                <a:uFillTx/>
+                <a:latin typeface="Times New Roman"/>
+              </a:rPr>
+              <a:t>audio discarded</a:t>
+            </a:r>
+            <a:endParaRPr lang="en-IN" sz="1100"/>
+          </a:p>
+        </p:txBody>
+      </p:sp>
+      <p:sp>
+        <p:nvSpPr>
+          <p:cNvPr id="506" name="box62_f2"/>
+          <p:cNvSpPr/>
+          <p:nvPr/>
+        </p:nvSpPr>
+        <p:spPr>
+          <a:xfrm>
+            <a:off x="3931920" y="3246120"/>
+            <a:ext cx="1600200" cy="1005840"/>
+          </a:xfrm>
+          <a:prstGeom prst="roundRect">
+            <a:avLst>
+              <a:gd name="adj" fmla="val 12000"/>
+            </a:avLst>
+          </a:prstGeom>
+          <a:solidFill>
+            <a:srgbClr val="D0D8E8"/>
+          </a:solidFill>
+          <a:ln w="12700">
+            <a:solidFill>
+              <a:srgbClr val="4F81BD"/>
+            </a:solidFill>
+          </a:ln>
+        </p:spPr>
+        <p:txBody>
+          <a:bodyPr lIns="45720" tIns="27432" rIns="45720" bIns="27432" anchor="ctr">
+            <a:normAutofit/>
+          </a:bodyPr>
+          <a:lstStyle/>
+          <a:p>
+            <a:pPr algn="ctr">
+              <a:lnSpc>
+                <a:spcPct val="100000"/>
+              </a:lnSpc>
+              <a:buNone/>
+            </a:pPr>
+            <a:r>
+              <a:rPr lang="en-US" sz="1200" b="1" i="0" u="none" strike="noStrike">
+                <a:solidFill>
+                  <a:srgbClr val="000000"/>
+                </a:solidFill>
+                <a:effectLst/>
+                <a:uFillTx/>
+                <a:latin typeface="Times New Roman"/>
+              </a:rPr>
+              <a:t>Stage 2: Triage</a:t>
+            </a:r>
+            <a:endParaRPr lang="en-IN" sz="1200"/>
+          </a:p>
+          <a:p>
+            <a:pPr algn="ctr">
+              <a:lnSpc>
+                <a:spcPct val="100000"/>
+              </a:lnSpc>
+              <a:buNone/>
+            </a:pPr>
+            <a:r>
+              <a:rPr lang="en-US" sz="1100" b="0" i="0" u="none" strike="noStrike">
+                <a:solidFill>
+                  <a:srgbClr val="000000"/>
+                </a:solidFill>
+                <a:effectLst/>
+                <a:uFillTx/>
+                <a:latin typeface="Times New Roman"/>
+              </a:rPr>
+              <a:t>LLM vs SOP step</a:t>
+            </a:r>
+            <a:endParaRPr lang="en-IN" sz="1100"/>
+          </a:p>
+          <a:p>
+            <a:pPr algn="ctr">
+              <a:lnSpc>
+                <a:spcPct val="100000"/>
+              </a:lnSpc>
+              <a:buNone/>
+            </a:pPr>
+            <a:r>
+              <a:rPr lang="en-US" sz="1100" b="0" i="0" u="none" strike="noStrike">
+                <a:solidFill>
+                  <a:srgbClr val="000000"/>
+                </a:solidFill>
+                <a:effectLst/>
+                <a:uFillTx/>
+                <a:latin typeface="Times New Roman"/>
+              </a:rPr>
+              <a:t>kind + severity</a:t>
+            </a:r>
+            <a:endParaRPr lang="en-IN" sz="1100"/>
+          </a:p>
+        </p:txBody>
+      </p:sp>
+      <p:sp>
+        <p:nvSpPr>
+          <p:cNvPr id="507" name="box63_f2"/>
+          <p:cNvSpPr/>
+          <p:nvPr/>
+        </p:nvSpPr>
+        <p:spPr>
+          <a:xfrm>
+            <a:off x="5669280" y="3246120"/>
+            <a:ext cx="1600200" cy="1005840"/>
+          </a:xfrm>
+          <a:prstGeom prst="roundRect">
+            <a:avLst>
+              <a:gd name="adj" fmla="val 12000"/>
+            </a:avLst>
+          </a:prstGeom>
+          <a:solidFill>
+            <a:srgbClr val="D0D8E8"/>
+          </a:solidFill>
+          <a:ln w="12700">
+            <a:solidFill>
+              <a:srgbClr val="4F81BD"/>
+            </a:solidFill>
+          </a:ln>
+        </p:spPr>
+        <p:txBody>
+          <a:bodyPr lIns="45720" tIns="27432" rIns="45720" bIns="27432" anchor="ctr">
+            <a:normAutofit/>
+          </a:bodyPr>
+          <a:lstStyle/>
+          <a:p>
+            <a:pPr algn="ctr">
+              <a:lnSpc>
+                <a:spcPct val="100000"/>
+              </a:lnSpc>
+              <a:buNone/>
+            </a:pPr>
+            <a:r>
+              <a:rPr lang="en-US" sz="1200" b="1" i="0" u="none" strike="noStrike">
+                <a:solidFill>
+                  <a:srgbClr val="000000"/>
+                </a:solidFill>
+                <a:effectLst/>
+                <a:uFillTx/>
+                <a:latin typeface="Times New Roman"/>
+              </a:rPr>
+              <a:t>Stage 3: Routing</a:t>
+            </a:r>
+            <a:endParaRPr lang="en-IN" sz="1200"/>
+          </a:p>
+          <a:p>
+            <a:pPr algn="ctr">
+              <a:lnSpc>
+                <a:spcPct val="100000"/>
+              </a:lnSpc>
+              <a:buNone/>
+            </a:pPr>
+            <a:r>
+              <a:rPr lang="en-US" sz="1100" b="0" i="0" u="none" strike="noStrike">
+                <a:solidFill>
+                  <a:srgbClr val="000000"/>
+                </a:solidFill>
+                <a:effectLst/>
+                <a:uFillTx/>
+                <a:latin typeface="Times New Roman"/>
+              </a:rPr>
+              <a:t>Line manager,</a:t>
+            </a:r>
+            <a:endParaRPr lang="en-IN" sz="1100"/>
+          </a:p>
+          <a:p>
+            <a:pPr algn="ctr">
+              <a:lnSpc>
+                <a:spcPct val="100000"/>
+              </a:lnSpc>
+              <a:buNone/>
+            </a:pPr>
+            <a:r>
+              <a:rPr lang="en-US" sz="1100" b="0" i="0" u="none" strike="noStrike">
+                <a:solidFill>
+                  <a:srgbClr val="000000"/>
+                </a:solidFill>
+                <a:effectLst/>
+                <a:uFillTx/>
+                <a:latin typeface="Times New Roman"/>
+              </a:rPr>
+              <a:t>SLA + clustering</a:t>
+            </a:r>
+            <a:endParaRPr lang="en-IN" sz="1100"/>
+          </a:p>
+        </p:txBody>
+      </p:sp>
+      <p:sp>
+        <p:nvSpPr>
+          <p:cNvPr id="508" name="box64_f2"/>
+          <p:cNvSpPr/>
+          <p:nvPr/>
+        </p:nvSpPr>
+        <p:spPr>
+          <a:xfrm>
+            <a:off x="7406640" y="3246120"/>
+            <a:ext cx="1600200" cy="1005840"/>
+          </a:xfrm>
+          <a:prstGeom prst="roundRect">
+            <a:avLst>
+              <a:gd name="adj" fmla="val 12000"/>
+            </a:avLst>
+          </a:prstGeom>
+          <a:solidFill>
+            <a:srgbClr val="E9EDF4"/>
+          </a:solidFill>
+          <a:ln w="12700">
+            <a:solidFill>
+              <a:srgbClr val="8A97A8"/>
+            </a:solidFill>
+          </a:ln>
+        </p:spPr>
+        <p:txBody>
+          <a:bodyPr lIns="45720" tIns="27432" rIns="45720" bIns="27432" anchor="ctr">
+            <a:normAutofit/>
+          </a:bodyPr>
+          <a:lstStyle/>
+          <a:p>
+            <a:pPr algn="ctr">
+              <a:lnSpc>
+                <a:spcPct val="100000"/>
+              </a:lnSpc>
+              <a:buNone/>
+            </a:pPr>
+            <a:r>
+              <a:rPr lang="en-US" sz="1200" b="1" i="0" u="none" strike="noStrike">
+                <a:solidFill>
+                  <a:srgbClr val="000000"/>
+                </a:solidFill>
+                <a:effectLst/>
+                <a:uFillTx/>
+                <a:latin typeface="Times New Roman"/>
+              </a:rPr>
+              <a:t>Manager Inbox</a:t>
+            </a:r>
+            <a:endParaRPr lang="en-IN" sz="1200"/>
+          </a:p>
+          <a:p>
+            <a:pPr algn="ctr">
+              <a:lnSpc>
+                <a:spcPct val="100000"/>
+              </a:lnSpc>
+              <a:buNone/>
+            </a:pPr>
+            <a:r>
+              <a:rPr lang="en-US" sz="1100" b="0" i="0" u="none" strike="noStrike">
+                <a:solidFill>
+                  <a:srgbClr val="000000"/>
+                </a:solidFill>
+                <a:effectLst/>
+                <a:uFillTx/>
+                <a:latin typeface="Times New Roman"/>
+              </a:rPr>
+              <a:t>Act on report /</a:t>
+            </a:r>
+            <a:endParaRPr lang="en-IN" sz="1100"/>
+          </a:p>
+          <a:p>
+            <a:pPr algn="ctr">
+              <a:lnSpc>
+                <a:spcPct val="100000"/>
+              </a:lnSpc>
+              <a:buNone/>
+            </a:pPr>
+            <a:r>
+              <a:rPr lang="en-US" sz="1100" b="0" i="0" u="none" strike="noStrike">
+                <a:solidFill>
+                  <a:srgbClr val="000000"/>
+                </a:solidFill>
+                <a:effectLst/>
+                <a:uFillTx/>
+                <a:latin typeface="Times New Roman"/>
+              </a:rPr>
+              <a:t>approve card fix</a:t>
+            </a:r>
+            <a:endParaRPr lang="en-IN" sz="1100"/>
+          </a:p>
+        </p:txBody>
+      </p:sp>
+      <p:sp>
+        <p:nvSpPr>
+          <p:cNvPr id="509" name="arr70_f2"/>
+          <p:cNvSpPr/>
+          <p:nvPr/>
+        </p:nvSpPr>
+        <p:spPr>
+          <a:xfrm>
+            <a:off x="2066544" y="3703320"/>
+            <a:ext cx="118872" cy="91440"/>
+          </a:xfrm>
+          <a:prstGeom prst="rightArrow">
+            <a:avLst/>
+          </a:prstGeom>
+          <a:solidFill>
+            <a:srgbClr val="8A97A8"/>
+          </a:solidFill>
+          <a:ln w="0">
+            <a:noFill/>
+          </a:ln>
+        </p:spPr>
+        <p:txBody>
+          <a:bodyPr/>
+          <a:lstStyle/>
+          <a:p>
+            <a:pPr>
+              <a:buNone/>
+            </a:pPr>
+            <a:endParaRPr lang="en-IN" sz="900"/>
+          </a:p>
+        </p:txBody>
+      </p:sp>
+      <p:sp>
+        <p:nvSpPr>
+          <p:cNvPr id="510" name="arr71_f2"/>
+          <p:cNvSpPr/>
+          <p:nvPr/>
+        </p:nvSpPr>
+        <p:spPr>
+          <a:xfrm>
+            <a:off x="3803904" y="3703320"/>
+            <a:ext cx="118872" cy="91440"/>
+          </a:xfrm>
+          <a:prstGeom prst="rightArrow">
+            <a:avLst/>
+          </a:prstGeom>
+          <a:solidFill>
+            <a:srgbClr val="8A97A8"/>
+          </a:solidFill>
+          <a:ln w="0">
+            <a:noFill/>
+          </a:ln>
+        </p:spPr>
+        <p:txBody>
+          <a:bodyPr/>
+          <a:lstStyle/>
+          <a:p>
+            <a:pPr>
+              <a:buNone/>
+            </a:pPr>
+            <a:endParaRPr lang="en-IN" sz="900"/>
+          </a:p>
+        </p:txBody>
+      </p:sp>
+      <p:sp>
+        <p:nvSpPr>
+          <p:cNvPr id="511" name="arr72_f2"/>
+          <p:cNvSpPr/>
+          <p:nvPr/>
+        </p:nvSpPr>
+        <p:spPr>
+          <a:xfrm>
+            <a:off x="5541264" y="3703320"/>
+            <a:ext cx="118872" cy="91440"/>
+          </a:xfrm>
+          <a:prstGeom prst="rightArrow">
+            <a:avLst/>
+          </a:prstGeom>
+          <a:solidFill>
+            <a:srgbClr val="8A97A8"/>
+          </a:solidFill>
+          <a:ln w="0">
+            <a:noFill/>
+          </a:ln>
+        </p:spPr>
+        <p:txBody>
+          <a:bodyPr/>
+          <a:lstStyle/>
+          <a:p>
+            <a:pPr>
+              <a:buNone/>
+            </a:pPr>
+            <a:endParaRPr lang="en-IN" sz="900"/>
+          </a:p>
+        </p:txBody>
+      </p:sp>
+      <p:sp>
+        <p:nvSpPr>
+          <p:cNvPr id="512" name="arr73_f2"/>
+          <p:cNvSpPr/>
+          <p:nvPr/>
+        </p:nvSpPr>
+        <p:spPr>
+          <a:xfrm>
+            <a:off x="7278624" y="3703320"/>
+            <a:ext cx="118872" cy="91440"/>
+          </a:xfrm>
+          <a:prstGeom prst="rightArrow">
+            <a:avLst/>
+          </a:prstGeom>
+          <a:solidFill>
+            <a:srgbClr val="8A97A8"/>
+          </a:solidFill>
+          <a:ln w="0">
+            <a:noFill/>
+          </a:ln>
+        </p:spPr>
+        <p:txBody>
+          <a:bodyPr/>
+          <a:lstStyle/>
+          <a:p>
+            <a:pPr>
+              <a:buNone/>
+            </a:pPr>
+            <a:endParaRPr lang="en-IN" sz="900"/>
+          </a:p>
+        </p:txBody>
+      </p:sp>
+      <p:sp>
+        <p:nvSpPr>
+          <p:cNvPr id="513" name="arrUp"/>
+          <p:cNvSpPr/>
+          <p:nvPr/>
+        </p:nvSpPr>
+        <p:spPr>
+          <a:xfrm>
+            <a:off x="8115300" y="2651760"/>
+            <a:ext cx="182880" cy="502920"/>
+          </a:xfrm>
+          <a:prstGeom prst="upArrow">
+            <a:avLst/>
+          </a:prstGeom>
+          <a:solidFill>
+            <a:srgbClr val="8A97A8"/>
+          </a:solidFill>
+          <a:ln w="0">
+            <a:noFill/>
+          </a:ln>
+        </p:spPr>
+        <p:txBody>
+          <a:bodyPr/>
+          <a:lstStyle/>
+          <a:p>
+            <a:pPr>
+              <a:buNone/>
+            </a:pPr>
+            <a:endParaRPr lang="en-IN" sz="900"/>
+          </a:p>
+        </p:txBody>
+      </p:sp>
+      <p:sp>
+        <p:nvSpPr>
+          <p:cNvPr id="514" name="lblUp"/>
+          <p:cNvSpPr txBox="1"/>
+          <p:nvPr/>
+        </p:nvSpPr>
+        <p:spPr>
+          <a:xfrm>
+            <a:off x="5669280" y="2788920"/>
+            <a:ext cx="2377440" cy="274320"/>
+          </a:xfrm>
+          <a:prstGeom prst="rect">
+            <a:avLst/>
+          </a:prstGeom>
+          <a:noFill/>
+          <a:ln w="0">
+            <a:noFill/>
+          </a:ln>
+        </p:spPr>
+        <p:txBody>
+          <a:bodyPr lIns="0" tIns="0" rIns="0" bIns="0" anchor="ctr">
+            <a:noAutofit/>
+          </a:bodyPr>
+          <a:lstStyle/>
+          <a:p>
+            <a:pPr algn="r">
+              <a:buNone/>
+            </a:pPr>
+            <a:r>
+              <a:rPr lang="en-US" sz="1000" b="0" i="1" u="none" strike="noStrike">
+                <a:solidFill>
+                  <a:srgbClr val="595959"/>
+                </a:solidFill>
+                <a:effectLst/>
+                <a:uFillTx/>
+                <a:latin typeface="Times New Roman"/>
+              </a:rPr>
+              <a:t>approved fix → next SOP version</a:t>
+            </a:r>
+            <a:endParaRPr lang="en-IN" sz="1000"/>
           </a:p>
         </p:txBody>
       </p:sp>
@@ -9757,7 +9655,7 @@
                 <a:uFillTx/>
                 <a:latin typeface="Times New Roman"/>
               </a:rPr>
-              <a:t>Conclusion</a:t>
+              <a:t>System Architecture (contd.)</a:t>
             </a:r>
             <a:endParaRPr lang="en-IN" sz="4000"/>
           </a:p>
@@ -9765,14 +9663,14 @@
       </p:sp>
       <p:sp>
         <p:nvSpPr>
-          <p:cNvPr id="95" name="TextBox 94"/>
+          <p:cNvPr id="19" name="TextBox 18"/>
           <p:cNvSpPr txBox="1"/>
           <p:nvPr/>
         </p:nvSpPr>
         <p:spPr>
           <a:xfrm>
             <a:off x="457200" y="1188720"/>
-            <a:ext cx="8229600" cy="3108960"/>
+            <a:ext cx="8229600" cy="4876800"/>
           </a:xfrm>
           <a:prstGeom prst="rect">
             <a:avLst/>
@@ -9788,26 +9686,9 @@
           </a:bodyPr>
           <a:lstStyle/>
           <a:p>
-            <a:pPr indent="0">
-              <a:buNone/>
-            </a:pPr>
-            <a:r>
-              <a:rPr lang="en-US" sz="1800" b="1" i="0" u="none" strike="noStrike" dirty="0">
-                <a:solidFill>
-                  <a:srgbClr val="000000"/>
-                </a:solidFill>
-                <a:effectLst/>
-                <a:uFillTx/>
-                <a:latin typeface="Times New Roman"/>
-              </a:rPr>
-              <a:t>Work Completed</a:t>
-            </a:r>
-            <a:endParaRPr lang="en-IN" sz="1800" dirty="0"/>
-          </a:p>
-          <a:p>
             <a:pPr marL="285750" indent="-285750">
               <a:spcBef>
-                <a:spcPts val="500"/>
+                <a:spcPts val="800"/>
               </a:spcBef>
               <a:buClr>
                 <a:srgbClr val="000000"/>
@@ -9830,22 +9711,22 @@
               </a:tabLst>
             </a:pPr>
             <a:r>
-              <a:rPr lang="en-US" sz="1500" b="0" i="0" u="none" strike="noStrike" dirty="0">
-                <a:solidFill>
-                  <a:srgbClr val="000000"/>
-                </a:solidFill>
-                <a:effectLst/>
-                <a:uFillTx/>
-                <a:latin typeface="Times New Roman"/>
-              </a:rPr>
-              <a:t>Voice-to-SOP is implemented end to end: Hindi / Marathi transcription, LLM structuring into ordered steps with safety flags, and per-step vernacular audio on visual cards.</a:t>
-            </a:r>
-            <a:endParaRPr lang="en-IN" sz="1500" dirty="0"/>
+              <a:rPr lang="en-US" sz="1600" b="0" i="0" u="none" strike="noStrike" dirty="0">
+                <a:solidFill>
+                  <a:srgbClr val="000000"/>
+                </a:solidFill>
+                <a:effectLst/>
+                <a:uFillTx/>
+                <a:latin typeface="Times New Roman"/>
+              </a:rPr>
+              <a:t>Backend migration: SQLite and a hand-rolled PIN + HMAC login → Supabase Postgres, Supabase Auth and Row Level Security.</a:t>
+            </a:r>
+            <a:endParaRPr lang="en-IN" sz="1600" dirty="0"/>
           </a:p>
           <a:p>
             <a:pPr marL="285750" indent="-285750">
               <a:spcBef>
-                <a:spcPts val="500"/>
+                <a:spcPts val="800"/>
               </a:spcBef>
               <a:buClr>
                 <a:srgbClr val="000000"/>
@@ -9868,22 +9749,22 @@
               </a:tabLst>
             </a:pPr>
             <a:r>
-              <a:rPr lang="en-US" sz="1500" b="0" i="0" u="none" strike="noStrike" dirty="0">
-                <a:solidFill>
-                  <a:srgbClr val="000000"/>
-                </a:solidFill>
-                <a:effectLst/>
-                <a:uFillTx/>
-                <a:latin typeface="Times New Roman"/>
-              </a:rPr>
-              <a:t>Worker Voice Feedback is implemented: hold-to-talk reports, SOP-aware triage, skip-level routing with SLA escalation, clustering and auto-drafted card corrections.</a:t>
-            </a:r>
-            <a:endParaRPr lang="en-IN" sz="1500" dirty="0"/>
+              <a:rPr lang="en-US" sz="1600" b="0" i="0" u="none" strike="noStrike" dirty="0">
+                <a:solidFill>
+                  <a:srgbClr val="000000"/>
+                </a:solidFill>
+                <a:effectLst/>
+                <a:uFillTx/>
+                <a:latin typeface="Times New Roman"/>
+              </a:rPr>
+              <a:t>Database: accessed via SQLAlchemy Core (raw SQL, named binds, no ORM); every table, view and RLS policy is hand-written Postgres DDL in an Alembic migration, applied explicitly - nothing is auto-created on boot.</a:t>
+            </a:r>
+            <a:endParaRPr lang="en-IN" sz="1600" dirty="0"/>
           </a:p>
           <a:p>
             <a:pPr marL="285750" indent="-285750">
               <a:spcBef>
-                <a:spcPts val="500"/>
+                <a:spcPts val="800"/>
               </a:spcBef>
               <a:buClr>
                 <a:srgbClr val="000000"/>
@@ -9906,22 +9787,22 @@
               </a:tabLst>
             </a:pPr>
             <a:r>
-              <a:rPr lang="en-US" sz="1500" b="0" i="0" u="none" strike="noStrike" dirty="0">
-                <a:solidFill>
-                  <a:srgbClr val="000000"/>
-                </a:solidFill>
-                <a:effectLst/>
-                <a:uFillTx/>
-                <a:latin typeface="Times New Roman"/>
-              </a:rPr>
-              <a:t>Worker identity is protected by design - no stored audio and no worker account; staff access is scoped to their own lines and enforced again by Postgres Row Level Security.</a:t>
-            </a:r>
-            <a:endParaRPr lang="en-IN" sz="1500" dirty="0"/>
+              <a:rPr lang="en-US" sz="1600" b="0" i="0" u="none" strike="noStrike" dirty="0">
+                <a:solidFill>
+                  <a:srgbClr val="000000"/>
+                </a:solidFill>
+                <a:effectLst/>
+                <a:uFillTx/>
+                <a:latin typeface="Times New Roman"/>
+              </a:rPr>
+              <a:t>Staff sign-in: Supabase Auth (email + password); the backend verifies each request's JWT locally against Supabase's public key set, so a role change applies immediately with no re-login.</a:t>
+            </a:r>
+            <a:endParaRPr lang="en-IN" sz="1600" dirty="0"/>
           </a:p>
           <a:p>
             <a:pPr marL="285750" indent="-285750">
               <a:spcBef>
-                <a:spcPts val="500"/>
+                <a:spcPts val="800"/>
               </a:spcBef>
               <a:buClr>
                 <a:srgbClr val="000000"/>
@@ -9944,22 +9825,22 @@
               </a:tabLst>
             </a:pPr>
             <a:r>
-              <a:rPr lang="en-US" sz="1500" b="0" i="0" u="none" strike="noStrike" dirty="0">
-                <a:solidFill>
-                  <a:srgbClr val="000000"/>
-                </a:solidFill>
-                <a:effectLst/>
-                <a:uFillTx/>
-                <a:latin typeface="Times New Roman"/>
-              </a:rPr>
-              <a:t>Both features ship as one FastAPI + React app in a single Docker image, with Alembic migrations, a pytest suite, structured logs and Prometheus metrics.</a:t>
-            </a:r>
-            <a:endParaRPr lang="en-IN" sz="1500" dirty="0"/>
+              <a:rPr lang="en-US" sz="1600" b="0" i="0" u="none" strike="noStrike" dirty="0">
+                <a:solidFill>
+                  <a:srgbClr val="000000"/>
+                </a:solidFill>
+                <a:effectLst/>
+                <a:uFillTx/>
+                <a:latin typeface="Times New Roman"/>
+              </a:rPr>
+              <a:t>Worker anonymity preserved: the worker-facing routes still need no account; they run on a separate, RLS-bypassing service connection so the rate limiter and triage pipeline stay the only path into the database.</a:t>
+            </a:r>
+            <a:endParaRPr lang="en-IN" sz="1600" dirty="0"/>
           </a:p>
           <a:p>
             <a:pPr marL="285750" indent="-285750">
               <a:spcBef>
-                <a:spcPts val="500"/>
+                <a:spcPts val="800"/>
               </a:spcBef>
               <a:buClr>
                 <a:srgbClr val="000000"/>
@@ -9982,22 +9863,22 @@
               </a:tabLst>
             </a:pPr>
             <a:r>
-              <a:rPr lang="en-US" sz="1500" b="0" i="0" u="none" strike="noStrike" dirty="0">
-                <a:solidFill>
-                  <a:srgbClr val="000000"/>
-                </a:solidFill>
-                <a:effectLst/>
-                <a:uFillTx/>
-                <a:latin typeface="Times New Roman"/>
-              </a:rPr>
-              <a:t>Migrated the backend from SQLite and PIN login to Supabase Postgres, Supabase Auth and Row Level Security, with every schema change as a hand-written Alembic migration.</a:t>
-            </a:r>
-            <a:endParaRPr lang="en-IN" sz="1500" dirty="0"/>
+              <a:rPr lang="en-US" sz="1600" b="0" i="0" u="none" strike="noStrike" dirty="0">
+                <a:solidFill>
+                  <a:srgbClr val="000000"/>
+                </a:solidFill>
+                <a:effectLst/>
+                <a:uFillTx/>
+                <a:latin typeface="Times New Roman"/>
+              </a:rPr>
+              <a:t>Authorization in depth: the same scope checks run in the application layer and are enforced again by Postgres Row Level Security on every staff-touched table.</a:t>
+            </a:r>
+            <a:endParaRPr lang="en-IN" sz="1600" dirty="0"/>
           </a:p>
           <a:p>
             <a:pPr marL="285750" indent="-285750">
               <a:spcBef>
-                <a:spcPts val="500"/>
+                <a:spcPts val="800"/>
               </a:spcBef>
               <a:buClr>
                 <a:srgbClr val="000000"/>
@@ -10020,288 +9901,17 @@
               </a:tabLst>
             </a:pPr>
             <a:r>
-              <a:rPr lang="en-US" sz="1500" b="0" i="0" u="none" strike="noStrike" dirty="0">
-                <a:solidFill>
-                  <a:srgbClr val="000000"/>
-                </a:solidFill>
-                <a:effectLst/>
-                <a:uFillTx/>
-                <a:latin typeface="Times New Roman"/>
-              </a:rPr>
-              <a:t>Added three CRM modules - Employee, Workforce and HR management - that reuse the original org structure and authorization model end to end.</a:t>
-            </a:r>
-            <a:endParaRPr lang="en-IN" sz="1500" dirty="0"/>
-          </a:p>
-          <a:p>
-            <a:pPr marL="285750" indent="-285750">
-              <a:spcBef>
-                <a:spcPts val="500"/>
-              </a:spcBef>
-              <a:buClr>
-                <a:srgbClr val="000000"/>
-              </a:buClr>
-              <a:buFont typeface="Arial" panose="020B0604020202020204" pitchFamily="34" charset="0"/>
-              <a:buChar char="•"/>
-              <a:tabLst>
-                <a:tab pos="0" algn="l"/>
-                <a:tab pos="914400" algn="l"/>
-                <a:tab pos="1828800" algn="l"/>
-                <a:tab pos="2743200" algn="l"/>
-                <a:tab pos="3657600" algn="l"/>
-                <a:tab pos="4572000" algn="l"/>
-                <a:tab pos="5486400" algn="l"/>
-                <a:tab pos="6400800" algn="l"/>
-                <a:tab pos="7315200" algn="l"/>
-                <a:tab pos="8229600" algn="l"/>
-                <a:tab pos="9144000" algn="l"/>
-                <a:tab pos="10058400" algn="l"/>
-              </a:tabLst>
-            </a:pPr>
-            <a:r>
-              <a:rPr lang="en-US" sz="1500" b="0" i="0" u="none" strike="noStrike" dirty="0">
-                <a:solidFill>
-                  <a:srgbClr val="000000"/>
-                </a:solidFill>
-                <a:effectLst/>
-                <a:uFillTx/>
-                <a:latin typeface="Times New Roman"/>
-              </a:rPr>
-              <a:t>Replaced the per-page navigation with one role-filtered sidebar and a KPI/chart dashboard, redesigned for legibility across every staff role.</a:t>
-            </a:r>
-            <a:endParaRPr lang="en-IN" sz="1500" dirty="0"/>
-          </a:p>
-        </p:txBody>
-      </p:sp>
-      <p:sp>
-        <p:nvSpPr>
-          <p:cNvPr id="96" name="TextBox 95"/>
-          <p:cNvSpPr txBox="1"/>
-          <p:nvPr/>
-        </p:nvSpPr>
-        <p:spPr>
-          <a:xfrm>
-            <a:off x="457200" y="4297680"/>
-            <a:ext cx="8229600" cy="1920240"/>
-          </a:xfrm>
-          <a:prstGeom prst="rect">
-            <a:avLst/>
-          </a:prstGeom>
-          <a:noFill/>
-          <a:ln w="0">
-            <a:noFill/>
-          </a:ln>
-        </p:spPr>
-        <p:txBody>
-          <a:bodyPr anchor="t">
-            <a:normAutofit/>
-          </a:bodyPr>
-          <a:lstStyle/>
-          <a:p>
-            <a:pPr indent="0">
-              <a:buNone/>
-            </a:pPr>
-            <a:r>
-              <a:rPr lang="en-US" sz="1800" b="1" i="0" u="none" strike="noStrike" dirty="0">
-                <a:solidFill>
-                  <a:srgbClr val="000000"/>
-                </a:solidFill>
-                <a:effectLst/>
-                <a:uFillTx/>
-                <a:latin typeface="Times New Roman"/>
-              </a:rPr>
-              <a:t>Future Work</a:t>
-            </a:r>
-            <a:endParaRPr lang="en-IN" sz="1800" dirty="0"/>
-          </a:p>
-          <a:p>
-            <a:pPr marL="285750" indent="-285750">
-              <a:spcBef>
-                <a:spcPts val="500"/>
-              </a:spcBef>
-              <a:buClr>
-                <a:srgbClr val="000000"/>
-              </a:buClr>
-              <a:buFont typeface="Arial" panose="020B0604020202020204" pitchFamily="34" charset="0"/>
-              <a:buChar char="•"/>
-              <a:tabLst>
-                <a:tab pos="0" algn="l"/>
-                <a:tab pos="914400" algn="l"/>
-                <a:tab pos="1828800" algn="l"/>
-                <a:tab pos="2743200" algn="l"/>
-                <a:tab pos="3657600" algn="l"/>
-                <a:tab pos="4572000" algn="l"/>
-                <a:tab pos="5486400" algn="l"/>
-                <a:tab pos="6400800" algn="l"/>
-                <a:tab pos="7315200" algn="l"/>
-                <a:tab pos="8229600" algn="l"/>
-                <a:tab pos="9144000" algn="l"/>
-                <a:tab pos="10058400" algn="l"/>
-              </a:tabLst>
-            </a:pPr>
-            <a:r>
-              <a:rPr lang="en-US" sz="1500" b="0" i="0" u="none" strike="noStrike" dirty="0">
-                <a:solidFill>
-                  <a:srgbClr val="000000"/>
-                </a:solidFill>
-                <a:effectLst/>
-                <a:uFillTx/>
-                <a:latin typeface="Times New Roman"/>
-              </a:rPr>
-              <a:t>Add a phone-call (IVR) channel so workers with basic phones can report without the app.</a:t>
-            </a:r>
-            <a:endParaRPr lang="en-IN" sz="1500" dirty="0"/>
-          </a:p>
-          <a:p>
-            <a:pPr marL="285750" indent="-285750">
-              <a:spcBef>
-                <a:spcPts val="500"/>
-              </a:spcBef>
-              <a:buClr>
-                <a:srgbClr val="000000"/>
-              </a:buClr>
-              <a:buFont typeface="Arial" panose="020B0604020202020204" pitchFamily="34" charset="0"/>
-              <a:buChar char="•"/>
-              <a:tabLst>
-                <a:tab pos="0" algn="l"/>
-                <a:tab pos="914400" algn="l"/>
-                <a:tab pos="1828800" algn="l"/>
-                <a:tab pos="2743200" algn="l"/>
-                <a:tab pos="3657600" algn="l"/>
-                <a:tab pos="4572000" algn="l"/>
-                <a:tab pos="5486400" algn="l"/>
-                <a:tab pos="6400800" algn="l"/>
-                <a:tab pos="7315200" algn="l"/>
-                <a:tab pos="8229600" algn="l"/>
-                <a:tab pos="9144000" algn="l"/>
-                <a:tab pos="10058400" algn="l"/>
-              </a:tabLst>
-            </a:pPr>
-            <a:r>
-              <a:rPr lang="en-US" sz="1500" b="0" i="0" u="none" strike="noStrike" dirty="0">
-                <a:solidFill>
-                  <a:srgbClr val="000000"/>
-                </a:solidFill>
-                <a:effectLst/>
-                <a:uFillTx/>
-                <a:latin typeface="Times New Roman"/>
-              </a:rPr>
-              <a:t>Validate Marathi and code-mixed Hindi-Marathi-English ASR on real factory recordings.</a:t>
-            </a:r>
-            <a:endParaRPr lang="en-IN" sz="1500" dirty="0"/>
-          </a:p>
-          <a:p>
-            <a:pPr marL="285750" indent="-285750">
-              <a:spcBef>
-                <a:spcPts val="500"/>
-              </a:spcBef>
-              <a:buClr>
-                <a:srgbClr val="000000"/>
-              </a:buClr>
-              <a:buFont typeface="Arial" panose="020B0604020202020204" pitchFamily="34" charset="0"/>
-              <a:buChar char="•"/>
-              <a:tabLst>
-                <a:tab pos="0" algn="l"/>
-                <a:tab pos="914400" algn="l"/>
-                <a:tab pos="1828800" algn="l"/>
-                <a:tab pos="2743200" algn="l"/>
-                <a:tab pos="3657600" algn="l"/>
-                <a:tab pos="4572000" algn="l"/>
-                <a:tab pos="5486400" algn="l"/>
-                <a:tab pos="6400800" algn="l"/>
-                <a:tab pos="7315200" algn="l"/>
-                <a:tab pos="8229600" algn="l"/>
-                <a:tab pos="9144000" algn="l"/>
-                <a:tab pos="10058400" algn="l"/>
-              </a:tabLst>
-            </a:pPr>
-            <a:r>
-              <a:rPr lang="en-US" sz="1500" b="0" i="0" u="none" strike="noStrike" dirty="0">
-                <a:solidFill>
-                  <a:srgbClr val="000000"/>
-                </a:solidFill>
-                <a:effectLst/>
-                <a:uFillTx/>
-                <a:latin typeface="Times New Roman"/>
-              </a:rPr>
-              <a:t>Pilot in a plant to measure reporting rates, response times and anonymity in small lines.</a:t>
-            </a:r>
-            <a:endParaRPr lang="en-IN" sz="1500" dirty="0"/>
-          </a:p>
-          <a:p>
-            <a:pPr marL="285750" indent="-285750">
-              <a:spcBef>
-                <a:spcPts val="500"/>
-              </a:spcBef>
-              <a:buClr>
-                <a:srgbClr val="000000"/>
-              </a:buClr>
-              <a:buFont typeface="Arial" panose="020B0604020202020204" pitchFamily="34" charset="0"/>
-              <a:buChar char="•"/>
-              <a:tabLst>
-                <a:tab pos="0" algn="l"/>
-                <a:tab pos="914400" algn="l"/>
-                <a:tab pos="1828800" algn="l"/>
-                <a:tab pos="2743200" algn="l"/>
-                <a:tab pos="3657600" algn="l"/>
-                <a:tab pos="4572000" algn="l"/>
-                <a:tab pos="5486400" algn="l"/>
-                <a:tab pos="6400800" algn="l"/>
-                <a:tab pos="7315200" algn="l"/>
-                <a:tab pos="8229600" algn="l"/>
-                <a:tab pos="9144000" algn="l"/>
-                <a:tab pos="10058400" algn="l"/>
-              </a:tabLst>
-            </a:pPr>
-            <a:r>
-              <a:rPr lang="en-US" sz="1500" b="0" i="0" u="none" strike="noStrike" dirty="0">
-                <a:solidFill>
-                  <a:srgbClr val="000000"/>
-                </a:solidFill>
-                <a:effectLst/>
-                <a:uFillTx/>
-                <a:latin typeface="Times New Roman"/>
-              </a:rPr>
-              <a:t>Move to a shared rate-limit store (Redis) so the limiter holds across multiple worker processes - the database itself is already on Postgres via Supabase.</a:t>
-            </a:r>
-            <a:endParaRPr lang="en-IN" sz="1500" dirty="0"/>
-          </a:p>
-          <a:p>
-            <a:pPr marL="285750" indent="-285750">
-              <a:spcBef>
-                <a:spcPts val="500"/>
-              </a:spcBef>
-              <a:buClr>
-                <a:srgbClr val="000000"/>
-              </a:buClr>
-              <a:buFont typeface="Arial" panose="020B0604020202020204" pitchFamily="34" charset="0"/>
-              <a:buChar char="•"/>
-              <a:tabLst>
-                <a:tab pos="0" algn="l"/>
-                <a:tab pos="914400" algn="l"/>
-                <a:tab pos="1828800" algn="l"/>
-                <a:tab pos="2743200" algn="l"/>
-                <a:tab pos="3657600" algn="l"/>
-                <a:tab pos="4572000" algn="l"/>
-                <a:tab pos="5486400" algn="l"/>
-                <a:tab pos="6400800" algn="l"/>
-                <a:tab pos="7315200" algn="l"/>
-                <a:tab pos="8229600" algn="l"/>
-                <a:tab pos="9144000" algn="l"/>
-                <a:tab pos="10058400" algn="l"/>
-              </a:tabLst>
-            </a:pPr>
-            <a:r>
-              <a:rPr lang="en-US" sz="1500" b="0" i="0" u="none" strike="noStrike" dirty="0">
-                <a:solidFill>
-                  <a:srgbClr val="000000"/>
-                </a:solidFill>
-                <a:effectLst/>
-                <a:uFillTx/>
-                <a:latin typeface="Times New Roman"/>
-              </a:rPr>
-              <a:t>Extend the HR module to payroll, which the schema (employees, attendance, leave_balances) already leaves room for.</a:t>
-            </a:r>
-            <a:endParaRPr lang="en-IN" sz="1500" dirty="0"/>
+              <a:rPr lang="en-US" sz="1600" b="0" i="0" u="none" strike="noStrike" dirty="0">
+                <a:solidFill>
+                  <a:srgbClr val="000000"/>
+                </a:solidFill>
+                <a:effectLst/>
+                <a:uFillTx/>
+                <a:latin typeface="Times New Roman"/>
+              </a:rPr>
+              <a:t>Unified dashboard: every staff role now lands on one role-filtered sidebar (Dashboard / SOP cards / Inbox / Employees / Workforce / HR) with KPI tiles and charts, replacing a separate screen per module.</a:t>
+            </a:r>
+            <a:endParaRPr lang="en-IN" sz="1600" dirty="0"/>
           </a:p>
         </p:txBody>
       </p:sp>
@@ -10402,77 +10012,6 @@
       </p:sp>
       <p:sp>
         <p:nvSpPr>
-          <p:cNvPr id="22" name="Footer 22"/>
-          <p:cNvSpPr/>
-          <p:nvPr/>
-        </p:nvSpPr>
-        <p:spPr>
-          <a:xfrm>
-            <a:off x="3124080" y="6356520"/>
-            <a:ext cx="2895840" cy="365040"/>
-          </a:xfrm>
-          <a:prstGeom prst="rect">
-            <a:avLst/>
-          </a:prstGeom>
-          <a:noFill/>
-          <a:ln w="0">
-            <a:noFill/>
-          </a:ln>
-        </p:spPr>
-        <p:style>
-          <a:lnRef idx="0">
-            <a:scrgbClr r="0" g="0" b="0"/>
-          </a:lnRef>
-          <a:fillRef idx="0">
-            <a:scrgbClr r="0" g="0" b="0"/>
-          </a:fillRef>
-          <a:effectRef idx="0">
-            <a:scrgbClr r="0" g="0" b="0"/>
-          </a:effectRef>
-          <a:fontRef idx="minor"/>
-        </p:style>
-        <p:txBody>
-          <a:bodyPr lIns="90000" tIns="46800" rIns="90000" bIns="46800" anchor="ctr">
-            <a:noAutofit/>
-          </a:bodyPr>
-          <a:lstStyle/>
-          <a:p>
-            <a:pPr algn="ctr">
-              <a:lnSpc>
-                <a:spcPct val="100000"/>
-              </a:lnSpc>
-              <a:tabLst>
-                <a:tab pos="0" algn="l"/>
-                <a:tab pos="914400" algn="l"/>
-                <a:tab pos="1828800" algn="l"/>
-                <a:tab pos="2743200" algn="l"/>
-                <a:tab pos="3657600" algn="l"/>
-                <a:tab pos="4572000" algn="l"/>
-                <a:tab pos="5486400" algn="l"/>
-                <a:tab pos="6400800" algn="l"/>
-                <a:tab pos="7315200" algn="l"/>
-                <a:tab pos="8229600" algn="l"/>
-                <a:tab pos="9144000" algn="l"/>
-                <a:tab pos="10058400" algn="l"/>
-              </a:tabLst>
-            </a:pPr>
-            <a:r>
-              <a:rPr lang="en-US" sz="1200" b="0" i="0" u="none" strike="noStrike">
-                <a:solidFill>
-                  <a:srgbClr val="898989"/>
-                </a:solidFill>
-                <a:effectLst/>
-                <a:uFillTx/>
-                <a:latin typeface="Calibri"/>
-              </a:rPr>
-              <a:t>Date of Presentation</a:t>
-            </a:r>
-            <a:endParaRPr lang="en-IN" sz="1200"/>
-          </a:p>
-        </p:txBody>
-      </p:sp>
-      <p:sp>
-        <p:nvSpPr>
           <p:cNvPr id="21" name="Footer 21"/>
           <p:cNvSpPr/>
           <p:nvPr/>
@@ -10536,7 +10075,7 @@
                 <a:uFillTx/>
                 <a:latin typeface="Calibri"/>
               </a:rPr>
-              <a:t>12</a:t>
+              <a:t>17</a:t>
             </a:fld>
             <a:endParaRPr lang="en-IN" sz="1200"/>
           </a:p>
@@ -10622,7 +10161,7 @@
                 <a:uFillTx/>
                 <a:latin typeface="Times New Roman"/>
               </a:rPr>
-              <a:t>References</a:t>
+              <a:t>Applications</a:t>
             </a:r>
             <a:endParaRPr lang="en-IN" sz="4000"/>
           </a:p>
@@ -10636,7 +10175,7 @@
         </p:nvSpPr>
         <p:spPr>
           <a:xfrm>
-            <a:off x="457200" y="1502580"/>
+            <a:off x="457200" y="1188720"/>
             <a:ext cx="8229600" cy="4876800"/>
           </a:xfrm>
           <a:prstGeom prst="rect">
@@ -10653,11 +10192,15 @@
           </a:bodyPr>
           <a:lstStyle/>
           <a:p>
-            <a:pPr marL="514440" indent="-514440">
+            <a:pPr marL="342900" indent="-342900">
               <a:spcBef>
-                <a:spcPts val="500"/>
+                <a:spcPts val="900"/>
               </a:spcBef>
-              <a:buNone/>
+              <a:buClr>
+                <a:srgbClr val="000000"/>
+              </a:buClr>
+              <a:buFont typeface="Arial" panose="020B0604020202020204" pitchFamily="34" charset="0"/>
+              <a:buChar char="•"/>
               <a:tabLst>
                 <a:tab pos="0" algn="l"/>
                 <a:tab pos="914400" algn="l"/>
@@ -10674,24 +10217,28 @@
               </a:tabLst>
             </a:pPr>
             <a:r>
-              <a:rPr lang="en-US" sz="1400" b="0" i="0" u="none" strike="noStrike">
-                <a:solidFill>
-                  <a:srgbClr val="000000"/>
-                </a:solidFill>
-                <a:effectLst/>
-                <a:uFillTx/>
-                <a:latin typeface="Times New Roman"/>
-              </a:rPr>
-              <a:t>[1]  K. S. Bhogale, S. Sundaresan, A. Raman, T. Javed, M. M. Khapra and P. Kumar, “Vistaar: Diverse Benchmarks and Training Sets for Indian Language ASR,” in Proc. INTERSPEECH, 2023.</a:t>
-            </a:r>
-            <a:endParaRPr lang="en-IN" sz="1400"/>
-          </a:p>
-          <a:p>
-            <a:pPr marL="514440" indent="-514440">
+              <a:rPr lang="en-US" sz="1700" b="0" i="0" u="none" strike="noStrike" dirty="0" err="1">
+                <a:solidFill>
+                  <a:srgbClr val="000000"/>
+                </a:solidFill>
+                <a:effectLst/>
+                <a:uFillTx/>
+                <a:latin typeface="Times New Roman"/>
+              </a:rPr>
+              <a:t>Digitising machine operating procedures on manufacturing shop floors without a technical writer.</a:t>
+            </a:r>
+            <a:endParaRPr lang="en-IN" sz="1700" dirty="0"/>
+          </a:p>
+          <a:p>
+            <a:pPr marL="342900" indent="-342900">
               <a:spcBef>
-                <a:spcPts val="500"/>
+                <a:spcPts val="900"/>
               </a:spcBef>
-              <a:buNone/>
+              <a:buClr>
+                <a:srgbClr val="000000"/>
+              </a:buClr>
+              <a:buFont typeface="Arial" panose="020B0604020202020204" pitchFamily="34" charset="0"/>
+              <a:buChar char="•"/>
               <a:tabLst>
                 <a:tab pos="0" algn="l"/>
                 <a:tab pos="914400" algn="l"/>
@@ -10708,24 +10255,28 @@
               </a:tabLst>
             </a:pPr>
             <a:r>
-              <a:rPr lang="en-US" sz="1400" b="0" i="0" u="none" strike="noStrike">
-                <a:solidFill>
-                  <a:srgbClr val="000000"/>
-                </a:solidFill>
-                <a:effectLst/>
-                <a:uFillTx/>
-                <a:latin typeface="Times New Roman"/>
-              </a:rPr>
-              <a:t>[2]  “Whisper-Based Multilingual ASR for Indic Languages,” in Proc. Pattern Recognition and Machine Intelligence (PReMI), Springer LNCS, doi: 10.1007/978-3-032-18480-1_78.</a:t>
-            </a:r>
-            <a:endParaRPr lang="en-IN" sz="1400"/>
-          </a:p>
-          <a:p>
-            <a:pPr marL="514440" indent="-514440">
+              <a:rPr lang="en-US" sz="1700" b="0" i="0" u="none" strike="noStrike" dirty="0" err="1">
+                <a:solidFill>
+                  <a:srgbClr val="000000"/>
+                </a:solidFill>
+                <a:effectLst/>
+                <a:uFillTx/>
+                <a:latin typeface="Times New Roman"/>
+              </a:rPr>
+              <a:t>Onboarding and training new or migrant workers in the language they actually speak.</a:t>
+            </a:r>
+            <a:endParaRPr lang="en-IN" sz="1700" dirty="0"/>
+          </a:p>
+          <a:p>
+            <a:pPr marL="342900" indent="-342900">
               <a:spcBef>
-                <a:spcPts val="500"/>
+                <a:spcPts val="900"/>
               </a:spcBef>
-              <a:buNone/>
+              <a:buClr>
+                <a:srgbClr val="000000"/>
+              </a:buClr>
+              <a:buFont typeface="Arial" panose="020B0604020202020204" pitchFamily="34" charset="0"/>
+              <a:buChar char="•"/>
               <a:tabLst>
                 <a:tab pos="0" algn="l"/>
                 <a:tab pos="914400" algn="l"/>
@@ -10742,24 +10293,28 @@
               </a:tabLst>
             </a:pPr>
             <a:r>
-              <a:rPr lang="en-US" sz="1400" b="0" i="0" u="none" strike="noStrike">
-                <a:solidFill>
-                  <a:srgbClr val="000000"/>
-                </a:solidFill>
-                <a:effectLst/>
-                <a:uFillTx/>
-                <a:latin typeface="Times New Roman"/>
-              </a:rPr>
-              <a:t>[3]  “Hindi-Marathi Code-Switched Speech Recognition,” Preprints.org, manuscript 202503.2278, 2025.</a:t>
-            </a:r>
-            <a:endParaRPr lang="en-IN" sz="1400"/>
-          </a:p>
-          <a:p>
-            <a:pPr marL="514440" indent="-514440">
+              <a:rPr lang="en-US" sz="1700" b="0" i="0" u="none" strike="noStrike" dirty="0" err="1">
+                <a:solidFill>
+                  <a:srgbClr val="000000"/>
+                </a:solidFill>
+                <a:effectLst/>
+                <a:uFillTx/>
+                <a:latin typeface="Times New Roman"/>
+              </a:rPr>
+              <a:t>Anonymous hazard and near-miss reporting for non-literate workers - catching worn pedals, missing guards and wrong cards before an injury.</a:t>
+            </a:r>
+            <a:endParaRPr lang="en-IN" sz="1700" dirty="0"/>
+          </a:p>
+          <a:p>
+            <a:pPr marL="342900" indent="-342900">
               <a:spcBef>
-                <a:spcPts val="500"/>
+                <a:spcPts val="900"/>
               </a:spcBef>
-              <a:buNone/>
+              <a:buClr>
+                <a:srgbClr val="000000"/>
+              </a:buClr>
+              <a:buFont typeface="Arial" panose="020B0604020202020204" pitchFamily="34" charset="0"/>
+              <a:buChar char="•"/>
               <a:tabLst>
                 <a:tab pos="0" algn="l"/>
                 <a:tab pos="914400" algn="l"/>
@@ -10776,24 +10331,28 @@
               </a:tabLst>
             </a:pPr>
             <a:r>
-              <a:rPr lang="en-US" sz="1400" b="0" i="0" u="none" strike="noStrike">
-                <a:solidFill>
-                  <a:srgbClr val="000000"/>
-                </a:solidFill>
-                <a:effectLst/>
-                <a:uFillTx/>
-                <a:latin typeface="Times New Roman"/>
-              </a:rPr>
-              <a:t>[4]  D. Y.-B. Wang, Z. Shen, S. S. Mishra, Z. Xu, Y. Teng and H. Ding, “SLOT: Structuring the Output of Large Language Models,” arXiv:2505.04016, 2025.</a:t>
-            </a:r>
-            <a:endParaRPr lang="en-IN" sz="1400"/>
-          </a:p>
-          <a:p>
-            <a:pPr marL="514440" indent="-514440">
+              <a:rPr lang="en-US" sz="1700" b="0" i="0" u="none" strike="noStrike" dirty="0" err="1">
+                <a:solidFill>
+                  <a:srgbClr val="000000"/>
+                </a:solidFill>
+                <a:effectLst/>
+                <a:uFillTx/>
+                <a:latin typeface="Times New Roman"/>
+              </a:rPr>
+              <a:t>Continuous SOP improvement: confirmed worker reports become reviewed card corrections.</a:t>
+            </a:r>
+            <a:endParaRPr lang="en-IN" sz="1700" dirty="0"/>
+          </a:p>
+          <a:p>
+            <a:pPr marL="342900" indent="-342900">
               <a:spcBef>
-                <a:spcPts val="500"/>
+                <a:spcPts val="900"/>
               </a:spcBef>
-              <a:buNone/>
+              <a:buClr>
+                <a:srgbClr val="000000"/>
+              </a:buClr>
+              <a:buFont typeface="Arial" panose="020B0604020202020204" pitchFamily="34" charset="0"/>
+              <a:buChar char="•"/>
               <a:tabLst>
                 <a:tab pos="0" algn="l"/>
                 <a:tab pos="914400" algn="l"/>
@@ -10810,24 +10369,28 @@
               </a:tabLst>
             </a:pPr>
             <a:r>
-              <a:rPr lang="en-US" sz="1400" b="0" i="0" u="none" strike="noStrike">
-                <a:solidFill>
-                  <a:srgbClr val="000000"/>
-                </a:solidFill>
-                <a:effectLst/>
-                <a:uFillTx/>
-                <a:latin typeface="Times New Roman"/>
-              </a:rPr>
-              <a:t>[5]  F. Longo and A. Padovano, “Voice-enabled Assistants of the Operator 4.0 in the Social Smart Factory,” Manufacturing Letters, vol. 26, pp. 12-16, 2020.</a:t>
-            </a:r>
-            <a:endParaRPr lang="en-IN" sz="1400"/>
-          </a:p>
-          <a:p>
-            <a:pPr marL="514440" indent="-514440">
+              <a:rPr lang="en-US" sz="1700" b="0" i="0" u="none" strike="noStrike" dirty="0" err="1">
+                <a:solidFill>
+                  <a:srgbClr val="000000"/>
+                </a:solidFill>
+                <a:effectLst/>
+                <a:uFillTx/>
+                <a:latin typeface="Times New Roman"/>
+              </a:rPr>
+              <a:t>Safety compliance and audit - hazard steps, report SLAs and escalations are logged per line and machine.</a:t>
+            </a:r>
+            <a:endParaRPr lang="en-IN" sz="1700" dirty="0"/>
+          </a:p>
+          <a:p>
+            <a:pPr marL="342900" indent="-342900">
               <a:spcBef>
-                <a:spcPts val="500"/>
+                <a:spcPts val="900"/>
               </a:spcBef>
-              <a:buNone/>
+              <a:buClr>
+                <a:srgbClr val="000000"/>
+              </a:buClr>
+              <a:buFont typeface="Arial" panose="020B0604020202020204" pitchFamily="34" charset="0"/>
+              <a:buChar char="•"/>
               <a:tabLst>
                 <a:tab pos="0" algn="l"/>
                 <a:tab pos="914400" algn="l"/>
@@ -10844,17 +10407,131 @@
               </a:tabLst>
             </a:pPr>
             <a:r>
-              <a:rPr lang="en-US" sz="1400" b="0" i="0" u="none" strike="noStrike">
-                <a:solidFill>
-                  <a:srgbClr val="000000"/>
-                </a:solidFill>
-                <a:effectLst/>
-                <a:uFillTx/>
-                <a:latin typeface="Times New Roman"/>
-              </a:rPr>
-              <a:t>[6]  T. M. Probst, “Organizational Safety Climate and Supervisor Safety Enforcement: Multilevel Explorations of the Causes of Accident Underreporting,” Journal of Applied Psychology, vol. 100, pp. 1899-1907, 2015, doi: 10.1037/a0039195.</a:t>
-            </a:r>
-            <a:endParaRPr lang="en-IN" sz="1400"/>
+              <a:rPr lang="en-US" sz="1700" b="0" i="0" u="none" strike="noStrike" dirty="0" err="1">
+                <a:solidFill>
+                  <a:srgbClr val="000000"/>
+                </a:solidFill>
+                <a:effectLst/>
+                <a:uFillTx/>
+                <a:latin typeface="Times New Roman"/>
+              </a:rPr>
+              <a:t>Training-needs analysis from 'understanding' reports, which point to steps workers find confusing.</a:t>
+            </a:r>
+            <a:endParaRPr lang="en-IN" sz="1700" dirty="0"/>
+          </a:p>
+          <a:p>
+            <a:pPr marL="342900" indent="-342900">
+              <a:spcBef>
+                <a:spcPts val="900"/>
+              </a:spcBef>
+              <a:buClr>
+                <a:srgbClr val="000000"/>
+              </a:buClr>
+              <a:buFont typeface="Arial" panose="020B0604020202020204" pitchFamily="34" charset="0"/>
+              <a:buChar char="•"/>
+              <a:tabLst>
+                <a:tab pos="0" algn="l"/>
+                <a:tab pos="914400" algn="l"/>
+                <a:tab pos="1828800" algn="l"/>
+                <a:tab pos="2743200" algn="l"/>
+                <a:tab pos="3657600" algn="l"/>
+                <a:tab pos="4572000" algn="l"/>
+                <a:tab pos="5486400" algn="l"/>
+                <a:tab pos="6400800" algn="l"/>
+                <a:tab pos="7315200" algn="l"/>
+                <a:tab pos="8229600" algn="l"/>
+                <a:tab pos="9144000" algn="l"/>
+                <a:tab pos="10058400" algn="l"/>
+              </a:tabLst>
+            </a:pPr>
+            <a:r>
+              <a:rPr lang="en-US" sz="1700" b="0" i="0" u="none" strike="noStrike" dirty="0" err="1">
+                <a:solidFill>
+                  <a:srgbClr val="000000"/>
+                </a:solidFill>
+                <a:effectLst/>
+                <a:uFillTx/>
+                <a:latin typeface="Times New Roman"/>
+              </a:rPr>
+              <a:t>Transferable to agriculture advisories, healthcare protocols and rural skill training with only a vocabulary change.</a:t>
+            </a:r>
+            <a:endParaRPr lang="en-IN" sz="1700" dirty="0"/>
+          </a:p>
+          <a:p>
+            <a:pPr marL="342900" indent="-342900">
+              <a:spcBef>
+                <a:spcPts val="900"/>
+              </a:spcBef>
+              <a:buClr>
+                <a:srgbClr val="000000"/>
+              </a:buClr>
+              <a:buFont typeface="Arial" panose="020B0604020202020204" pitchFamily="34" charset="0"/>
+              <a:buChar char="•"/>
+              <a:tabLst>
+                <a:tab pos="0" algn="l"/>
+                <a:tab pos="914400" algn="l"/>
+                <a:tab pos="1828800" algn="l"/>
+                <a:tab pos="2743200" algn="l"/>
+                <a:tab pos="3657600" algn="l"/>
+                <a:tab pos="4572000" algn="l"/>
+                <a:tab pos="5486400" algn="l"/>
+                <a:tab pos="6400800" algn="l"/>
+                <a:tab pos="7315200" algn="l"/>
+                <a:tab pos="8229600" algn="l"/>
+                <a:tab pos="9144000" algn="l"/>
+                <a:tab pos="10058400" algn="l"/>
+              </a:tabLst>
+            </a:pPr>
+            <a:r>
+              <a:rPr lang="en-US" sz="1700" b="0" i="0" u="none" strike="noStrike" dirty="0" err="1">
+                <a:solidFill>
+                  <a:srgbClr val="000000"/>
+                </a:solidFill>
+                <a:effectLst/>
+                <a:uFillTx/>
+                <a:latin typeface="Times New Roman"/>
+              </a:rPr>
+              <a:t>Plant-wide employee directory, shift scheduling and supervisor-run clock-in/out, replacing paper registers and verbal rosters.</a:t>
+            </a:r>
+            <a:endParaRPr lang="en-IN" sz="1700" dirty="0"/>
+          </a:p>
+          <a:p>
+            <a:pPr marL="342900" indent="-342900">
+              <a:spcBef>
+                <a:spcPts val="900"/>
+              </a:spcBef>
+              <a:buClr>
+                <a:srgbClr val="000000"/>
+              </a:buClr>
+              <a:buFont typeface="Arial" panose="020B0604020202020204" pitchFamily="34" charset="0"/>
+              <a:buChar char="•"/>
+              <a:tabLst>
+                <a:tab pos="0" algn="l"/>
+                <a:tab pos="914400" algn="l"/>
+                <a:tab pos="1828800" algn="l"/>
+                <a:tab pos="2743200" algn="l"/>
+                <a:tab pos="3657600" algn="l"/>
+                <a:tab pos="4572000" algn="l"/>
+                <a:tab pos="5486400" algn="l"/>
+                <a:tab pos="6400800" algn="l"/>
+                <a:tab pos="7315200" algn="l"/>
+                <a:tab pos="8229600" algn="l"/>
+                <a:tab pos="9144000" algn="l"/>
+                <a:tab pos="10058400" algn="l"/>
+              </a:tabLst>
+            </a:pPr>
+            <a:r>
+              <a:rPr lang="en-US" sz="1700" b="0" i="0" u="none" strike="noStrike" dirty="0" err="1">
+                <a:solidFill>
+                  <a:srgbClr val="000000"/>
+                </a:solidFill>
+                <a:effectLst/>
+                <a:uFillTx/>
+                <a:latin typeface="Times New Roman"/>
+              </a:rPr>
+              <a:t>Self-service leave requests and a lightweight recruitment pipeline, under the same login a supervisor or manager already has.</a:t>
+            </a:r>
+            <a:endParaRPr lang="en-IN" sz="1700" dirty="0"/>
           </a:p>
         </p:txBody>
       </p:sp>
@@ -10955,77 +10632,6 @@
       </p:sp>
       <p:sp>
         <p:nvSpPr>
-          <p:cNvPr id="22" name="Footer 22"/>
-          <p:cNvSpPr/>
-          <p:nvPr/>
-        </p:nvSpPr>
-        <p:spPr>
-          <a:xfrm>
-            <a:off x="3124080" y="6356520"/>
-            <a:ext cx="2895840" cy="365040"/>
-          </a:xfrm>
-          <a:prstGeom prst="rect">
-            <a:avLst/>
-          </a:prstGeom>
-          <a:noFill/>
-          <a:ln w="0">
-            <a:noFill/>
-          </a:ln>
-        </p:spPr>
-        <p:style>
-          <a:lnRef idx="0">
-            <a:scrgbClr r="0" g="0" b="0"/>
-          </a:lnRef>
-          <a:fillRef idx="0">
-            <a:scrgbClr r="0" g="0" b="0"/>
-          </a:fillRef>
-          <a:effectRef idx="0">
-            <a:scrgbClr r="0" g="0" b="0"/>
-          </a:effectRef>
-          <a:fontRef idx="minor"/>
-        </p:style>
-        <p:txBody>
-          <a:bodyPr lIns="90000" tIns="46800" rIns="90000" bIns="46800" anchor="ctr">
-            <a:noAutofit/>
-          </a:bodyPr>
-          <a:lstStyle/>
-          <a:p>
-            <a:pPr algn="ctr">
-              <a:lnSpc>
-                <a:spcPct val="100000"/>
-              </a:lnSpc>
-              <a:tabLst>
-                <a:tab pos="0" algn="l"/>
-                <a:tab pos="914400" algn="l"/>
-                <a:tab pos="1828800" algn="l"/>
-                <a:tab pos="2743200" algn="l"/>
-                <a:tab pos="3657600" algn="l"/>
-                <a:tab pos="4572000" algn="l"/>
-                <a:tab pos="5486400" algn="l"/>
-                <a:tab pos="6400800" algn="l"/>
-                <a:tab pos="7315200" algn="l"/>
-                <a:tab pos="8229600" algn="l"/>
-                <a:tab pos="9144000" algn="l"/>
-                <a:tab pos="10058400" algn="l"/>
-              </a:tabLst>
-            </a:pPr>
-            <a:r>
-              <a:rPr lang="en-US" sz="1200" b="0" i="0" u="none" strike="noStrike">
-                <a:solidFill>
-                  <a:srgbClr val="898989"/>
-                </a:solidFill>
-                <a:effectLst/>
-                <a:uFillTx/>
-                <a:latin typeface="Calibri"/>
-              </a:rPr>
-              <a:t>Date of Presentation</a:t>
-            </a:r>
-            <a:endParaRPr lang="en-IN" sz="1200"/>
-          </a:p>
-        </p:txBody>
-      </p:sp>
-      <p:sp>
-        <p:nvSpPr>
           <p:cNvPr id="21" name="Footer 21"/>
           <p:cNvSpPr/>
           <p:nvPr/>
@@ -11089,7 +10695,7 @@
                 <a:uFillTx/>
                 <a:latin typeface="Calibri"/>
               </a:rPr>
-              <a:t>13</a:t>
+              <a:t>18</a:t>
             </a:fld>
             <a:endParaRPr lang="en-IN" sz="1200"/>
           </a:p>
@@ -11175,7 +10781,7 @@
                 <a:uFillTx/>
                 <a:latin typeface="Times New Roman"/>
               </a:rPr>
-              <a:t>References (contd.)</a:t>
+              <a:t>Conclusion</a:t>
             </a:r>
             <a:endParaRPr lang="en-IN" sz="4000"/>
           </a:p>
@@ -11183,14 +10789,14 @@
       </p:sp>
       <p:sp>
         <p:nvSpPr>
-          <p:cNvPr id="19" name="TextBox 18"/>
+          <p:cNvPr id="95" name="TextBox 94"/>
           <p:cNvSpPr txBox="1"/>
           <p:nvPr/>
         </p:nvSpPr>
         <p:spPr>
           <a:xfrm>
-            <a:off x="457200" y="1502580"/>
-            <a:ext cx="8229600" cy="4876800"/>
+            <a:off x="457200" y="1188720"/>
+            <a:ext cx="8229600" cy="3108960"/>
           </a:xfrm>
           <a:prstGeom prst="rect">
             <a:avLst/>
@@ -11206,11 +10812,32 @@
           </a:bodyPr>
           <a:lstStyle/>
           <a:p>
-            <a:pPr marL="514440" indent="-514440">
+            <a:pPr indent="0">
+              <a:buNone/>
+            </a:pPr>
+            <a:r>
+              <a:rPr lang="en-US" sz="1800" b="1" i="0" u="none" strike="noStrike" dirty="0">
+                <a:solidFill>
+                  <a:srgbClr val="000000"/>
+                </a:solidFill>
+                <a:effectLst/>
+                <a:uFillTx/>
+                <a:latin typeface="Times New Roman"/>
+              </a:rPr>
+              <a:t>Work Completed</a:t>
+            </a:r>
+            <a:endParaRPr lang="en-IN" sz="1800" dirty="0"/>
+          </a:p>
+          <a:p>
+            <a:pPr marL="285750" indent="-285750">
               <a:spcBef>
                 <a:spcPts val="500"/>
               </a:spcBef>
-              <a:buNone/>
+              <a:buClr>
+                <a:srgbClr val="000000"/>
+              </a:buClr>
+              <a:buFont typeface="Arial" panose="020B0604020202020204" pitchFamily="34" charset="0"/>
+              <a:buChar char="•"/>
               <a:tabLst>
                 <a:tab pos="0" algn="l"/>
                 <a:tab pos="914400" algn="l"/>
@@ -11227,24 +10854,28 @@
               </a:tabLst>
             </a:pPr>
             <a:r>
-              <a:rPr lang="en-US" sz="1400" b="0" i="0" u="none" strike="noStrike">
-                <a:solidFill>
-                  <a:srgbClr val="000000"/>
-                </a:solidFill>
-                <a:effectLst/>
-                <a:uFillTx/>
-                <a:latin typeface="Times New Roman"/>
-              </a:rPr>
-              <a:t>[7]  J. R. Detert and L. K. Treviño, “Speaking Up to Higher-Ups: How Supervisors and Skip-Level Leaders Influence Employee Voice,” Organization Science, vol. 21, no. 1, pp. 249-270, 2010, doi: 10.1287/orsc.1080.0405.</a:t>
-            </a:r>
-            <a:endParaRPr lang="en-IN" sz="1400"/>
-          </a:p>
-          <a:p>
-            <a:pPr marL="514440" indent="-514440">
+              <a:rPr lang="en-US" sz="1500" b="0" i="0" u="none" strike="noStrike" dirty="0">
+                <a:solidFill>
+                  <a:srgbClr val="000000"/>
+                </a:solidFill>
+                <a:effectLst/>
+                <a:uFillTx/>
+                <a:latin typeface="Times New Roman"/>
+              </a:rPr>
+              <a:t>Voice-to-SOP is implemented end to end: Hindi / Marathi transcription, LLM structuring into ordered steps with safety flags, and per-step vernacular audio on visual cards.</a:t>
+            </a:r>
+            <a:endParaRPr lang="en-IN" sz="1500" dirty="0"/>
+          </a:p>
+          <a:p>
+            <a:pPr marL="285750" indent="-285750">
               <a:spcBef>
                 <a:spcPts val="500"/>
               </a:spcBef>
-              <a:buNone/>
+              <a:buClr>
+                <a:srgbClr val="000000"/>
+              </a:buClr>
+              <a:buFont typeface="Arial" panose="020B0604020202020204" pitchFamily="34" charset="0"/>
+              <a:buChar char="•"/>
               <a:tabLst>
                 <a:tab pos="0" algn="l"/>
                 <a:tab pos="914400" algn="l"/>
@@ -11261,24 +10892,28 @@
               </a:tabLst>
             </a:pPr>
             <a:r>
-              <a:rPr lang="en-US" sz="1400" b="0" i="0" u="none" strike="noStrike">
-                <a:solidFill>
-                  <a:srgbClr val="000000"/>
-                </a:solidFill>
-                <a:effectLst/>
-                <a:uFillTx/>
-                <a:latin typeface="Times New Roman"/>
-              </a:rPr>
-              <a:t>[8]  P. Mudliar, J. Donner and W. Thies, “Emergent Practices Around CGNet Swara, a Voice Forum for Citizen Journalism in Rural India,” in Proc. Int. Conf. on Information and Communication Technologies and Development (ICTD), ACM, 2012.</a:t>
-            </a:r>
-            <a:endParaRPr lang="en-IN" sz="1400"/>
-          </a:p>
-          <a:p>
-            <a:pPr marL="514440" indent="-514440">
+              <a:rPr lang="en-US" sz="1500" b="0" i="0" u="none" strike="noStrike" dirty="0">
+                <a:solidFill>
+                  <a:srgbClr val="000000"/>
+                </a:solidFill>
+                <a:effectLst/>
+                <a:uFillTx/>
+                <a:latin typeface="Times New Roman"/>
+              </a:rPr>
+              <a:t>Worker Voice Feedback is implemented: hold-to-talk reports, SOP-aware triage, skip-level routing with SLA escalation, clustering and auto-drafted card corrections.</a:t>
+            </a:r>
+            <a:endParaRPr lang="en-IN" sz="1500" dirty="0"/>
+          </a:p>
+          <a:p>
+            <a:pPr marL="285750" indent="-285750">
               <a:spcBef>
                 <a:spcPts val="500"/>
               </a:spcBef>
-              <a:buNone/>
+              <a:buClr>
+                <a:srgbClr val="000000"/>
+              </a:buClr>
+              <a:buFont typeface="Arial" panose="020B0604020202020204" pitchFamily="34" charset="0"/>
+              <a:buChar char="•"/>
               <a:tabLst>
                 <a:tab pos="0" algn="l"/>
                 <a:tab pos="914400" algn="l"/>
@@ -11295,24 +10930,28 @@
               </a:tabLst>
             </a:pPr>
             <a:r>
-              <a:rPr lang="en-US" sz="1400" b="0" i="0" u="none" strike="noStrike">
-                <a:solidFill>
-                  <a:srgbClr val="000000"/>
-                </a:solidFill>
-                <a:effectLst/>
-                <a:uFillTx/>
-                <a:latin typeface="Times New Roman"/>
-              </a:rPr>
-              <a:t>[9]  A. J.-P. Tixier, M. R. Hallowell, B. Rajagopalan and D. Bowman, “Automated Content Analysis for Construction Safety: A Natural Language Processing System to Extract Precursors and Outcomes from Unstructured Injury Reports,” Automation in Construction, vol. 62, pp. 45-56, 2016.</a:t>
-            </a:r>
-            <a:endParaRPr lang="en-IN" sz="1400"/>
-          </a:p>
-          <a:p>
-            <a:pPr marL="514440" indent="-514440">
+              <a:rPr lang="en-US" sz="1500" b="0" i="0" u="none" strike="noStrike" dirty="0">
+                <a:solidFill>
+                  <a:srgbClr val="000000"/>
+                </a:solidFill>
+                <a:effectLst/>
+                <a:uFillTx/>
+                <a:latin typeface="Times New Roman"/>
+              </a:rPr>
+              <a:t>Worker identity is protected by design - no stored audio and no worker account; staff access is scoped to their own lines and enforced again by Postgres Row Level Security.</a:t>
+            </a:r>
+            <a:endParaRPr lang="en-IN" sz="1500" dirty="0"/>
+          </a:p>
+          <a:p>
+            <a:pPr marL="285750" indent="-285750">
               <a:spcBef>
                 <a:spcPts val="500"/>
               </a:spcBef>
-              <a:buNone/>
+              <a:buClr>
+                <a:srgbClr val="000000"/>
+              </a:buClr>
+              <a:buFont typeface="Arial" panose="020B0604020202020204" pitchFamily="34" charset="0"/>
+              <a:buChar char="•"/>
               <a:tabLst>
                 <a:tab pos="0" algn="l"/>
                 <a:tab pos="914400" algn="l"/>
@@ -11329,24 +10968,28 @@
               </a:tabLst>
             </a:pPr>
             <a:r>
-              <a:rPr lang="en-US" sz="1400" b="0" i="0" u="none" strike="noStrike">
-                <a:solidFill>
-                  <a:srgbClr val="000000"/>
-                </a:solidFill>
-                <a:effectLst/>
-                <a:uFillTx/>
-                <a:latin typeface="Times New Roman"/>
-              </a:rPr>
-              <a:t>[10]  A. Radford, J. W. Kim, T. Xu, G. Brockman, C. McLeavey and I. Sutskever, “Robust Speech Recognition via Large-Scale Weak Supervision,” in Proc. ICML, 2023.</a:t>
-            </a:r>
-            <a:endParaRPr lang="en-IN" sz="1400"/>
-          </a:p>
-          <a:p>
-            <a:pPr marL="514440" indent="-514440">
+              <a:rPr lang="en-US" sz="1500" b="0" i="0" u="none" strike="noStrike" dirty="0">
+                <a:solidFill>
+                  <a:srgbClr val="000000"/>
+                </a:solidFill>
+                <a:effectLst/>
+                <a:uFillTx/>
+                <a:latin typeface="Times New Roman"/>
+              </a:rPr>
+              <a:t>Both features ship as one FastAPI + React app in a single Docker image, with Alembic migrations, a pytest suite, structured logs and Prometheus metrics.</a:t>
+            </a:r>
+            <a:endParaRPr lang="en-IN" sz="1500" dirty="0"/>
+          </a:p>
+          <a:p>
+            <a:pPr marL="285750" indent="-285750">
               <a:spcBef>
                 <a:spcPts val="500"/>
               </a:spcBef>
-              <a:buNone/>
+              <a:buClr>
+                <a:srgbClr val="000000"/>
+              </a:buClr>
+              <a:buFont typeface="Arial" panose="020B0604020202020204" pitchFamily="34" charset="0"/>
+              <a:buChar char="•"/>
               <a:tabLst>
                 <a:tab pos="0" algn="l"/>
                 <a:tab pos="914400" algn="l"/>
@@ -11363,17 +11006,93 @@
               </a:tabLst>
             </a:pPr>
             <a:r>
-              <a:rPr lang="en-US" sz="1400" b="0" i="0" u="none" strike="noStrike">
-                <a:solidFill>
-                  <a:srgbClr val="000000"/>
-                </a:solidFill>
-                <a:effectLst/>
-                <a:uFillTx/>
-                <a:latin typeface="Times New Roman"/>
-              </a:rPr>
-              <a:t>[11]  Safe in India Foundation, “CRUSHED2026: Safe in India's 8th Annual Report on Worker Safety in the Indian Automotive Manufacturing Sector,” 2026. [Online]. Available: https://www.safeinindia.org/worker-safety-reports</a:t>
-            </a:r>
-            <a:endParaRPr lang="en-IN" sz="1400"/>
+              <a:rPr lang="en-US" sz="1500" b="0" i="0" u="none" strike="noStrike" dirty="0">
+                <a:solidFill>
+                  <a:srgbClr val="000000"/>
+                </a:solidFill>
+                <a:effectLst/>
+                <a:uFillTx/>
+                <a:latin typeface="Times New Roman"/>
+              </a:rPr>
+              <a:t>Migrated the backend from SQLite and PIN login to Supabase Postgres, Supabase Auth and Row Level Security, with every schema change as a hand-written Alembic migration.</a:t>
+            </a:r>
+            <a:endParaRPr lang="en-IN" sz="1500" dirty="0"/>
+          </a:p>
+          <a:p>
+            <a:pPr marL="285750" indent="-285750">
+              <a:spcBef>
+                <a:spcPts val="500"/>
+              </a:spcBef>
+              <a:buClr>
+                <a:srgbClr val="000000"/>
+              </a:buClr>
+              <a:buFont typeface="Arial" panose="020B0604020202020204" pitchFamily="34" charset="0"/>
+              <a:buChar char="•"/>
+              <a:tabLst>
+                <a:tab pos="0" algn="l"/>
+                <a:tab pos="914400" algn="l"/>
+                <a:tab pos="1828800" algn="l"/>
+                <a:tab pos="2743200" algn="l"/>
+                <a:tab pos="3657600" algn="l"/>
+                <a:tab pos="4572000" algn="l"/>
+                <a:tab pos="5486400" algn="l"/>
+                <a:tab pos="6400800" algn="l"/>
+                <a:tab pos="7315200" algn="l"/>
+                <a:tab pos="8229600" algn="l"/>
+                <a:tab pos="9144000" algn="l"/>
+                <a:tab pos="10058400" algn="l"/>
+              </a:tabLst>
+            </a:pPr>
+            <a:r>
+              <a:rPr lang="en-US" sz="1500" b="0" i="0" u="none" strike="noStrike" dirty="0">
+                <a:solidFill>
+                  <a:srgbClr val="000000"/>
+                </a:solidFill>
+                <a:effectLst/>
+                <a:uFillTx/>
+                <a:latin typeface="Times New Roman"/>
+              </a:rPr>
+              <a:t>Added three CRM modules - Employee, Workforce and HR management - that reuse the original org structure and authorization model end to end.</a:t>
+            </a:r>
+            <a:endParaRPr lang="en-IN" sz="1500" dirty="0"/>
+          </a:p>
+          <a:p>
+            <a:pPr marL="285750" indent="-285750">
+              <a:spcBef>
+                <a:spcPts val="500"/>
+              </a:spcBef>
+              <a:buClr>
+                <a:srgbClr val="000000"/>
+              </a:buClr>
+              <a:buFont typeface="Arial" panose="020B0604020202020204" pitchFamily="34" charset="0"/>
+              <a:buChar char="•"/>
+              <a:tabLst>
+                <a:tab pos="0" algn="l"/>
+                <a:tab pos="914400" algn="l"/>
+                <a:tab pos="1828800" algn="l"/>
+                <a:tab pos="2743200" algn="l"/>
+                <a:tab pos="3657600" algn="l"/>
+                <a:tab pos="4572000" algn="l"/>
+                <a:tab pos="5486400" algn="l"/>
+                <a:tab pos="6400800" algn="l"/>
+                <a:tab pos="7315200" algn="l"/>
+                <a:tab pos="8229600" algn="l"/>
+                <a:tab pos="9144000" algn="l"/>
+                <a:tab pos="10058400" algn="l"/>
+              </a:tabLst>
+            </a:pPr>
+            <a:r>
+              <a:rPr lang="en-US" sz="1500" b="0" i="0" u="none" strike="noStrike" dirty="0">
+                <a:solidFill>
+                  <a:srgbClr val="000000"/>
+                </a:solidFill>
+                <a:effectLst/>
+                <a:uFillTx/>
+                <a:latin typeface="Times New Roman"/>
+              </a:rPr>
+              <a:t>Replaced the per-page navigation with one role-filtered sidebar and a KPI/chart dashboard, redesigned for legibility across every staff role.</a:t>
+            </a:r>
+            <a:endParaRPr lang="en-IN" sz="1500" dirty="0"/>
           </a:p>
         </p:txBody>
       </p:sp>
@@ -11608,7 +11327,7 @@
                 <a:uFillTx/>
                 <a:latin typeface="Calibri"/>
               </a:rPr>
-              <a:t>13</a:t>
+              <a:t>19</a:t>
             </a:fld>
             <a:endParaRPr lang="en-IN" sz="1200"/>
           </a:p>
@@ -12162,7 +11881,610 @@
 </file>
 
 <file path=ppt/slides/slide20.xml><?xml version="1.0" encoding="utf-8"?>
-<p:sld xmlns:a="http://schemas.openxmlformats.org/drawingml/2006/main" xmlns:p="http://schemas.openxmlformats.org/presentationml/2006/main" xmlns:r="http://schemas.openxmlformats.org/officeDocument/2006/relationships">
+<p:sld xmlns:a="http://schemas.openxmlformats.org/drawingml/2006/main" xmlns:r="http://schemas.openxmlformats.org/officeDocument/2006/relationships" xmlns:p="http://schemas.openxmlformats.org/presentationml/2006/main">
+  <p:cSld>
+    <p:spTree>
+      <p:nvGrpSpPr>
+        <p:cNvPr id="1" name="">
+          <a:extLst>
+            <a:ext uri="{FF2B5EF4-FFF2-40B4-BE49-F238E27FC236}">
+              <a16:creationId xmlns:a16="http://schemas.microsoft.com/office/drawing/2014/main" id="{1EF2E759-1758-604B-A664-D2E34EF7D996}"/>
+            </a:ext>
+          </a:extLst>
+        </p:cNvPr>
+        <p:cNvGrpSpPr/>
+        <p:nvPr/>
+      </p:nvGrpSpPr>
+      <p:grpSpPr>
+        <a:xfrm>
+          <a:off x="0" y="0"/>
+          <a:ext cx="0" cy="0"/>
+          <a:chOff x="0" y="0"/>
+          <a:chExt cx="0" cy="0"/>
+        </a:xfrm>
+      </p:grpSpPr>
+      <p:sp>
+        <p:nvSpPr>
+          <p:cNvPr id="18" name="PlaceHolder 1">
+            <a:extLst>
+              <a:ext uri="{FF2B5EF4-FFF2-40B4-BE49-F238E27FC236}">
+                <a16:creationId xmlns:a16="http://schemas.microsoft.com/office/drawing/2014/main" id="{FDD4893B-994B-1BFE-2B0A-6C2B68FD0C83}"/>
+              </a:ext>
+            </a:extLst>
+          </p:cNvPr>
+          <p:cNvSpPr>
+            <a:spLocks noGrp="1"/>
+          </p:cNvSpPr>
+          <p:nvPr>
+            <p:ph type="title"/>
+          </p:nvPr>
+        </p:nvSpPr>
+        <p:spPr>
+          <a:xfrm>
+            <a:off x="457200" y="182880"/>
+            <a:ext cx="8229600" cy="937260"/>
+          </a:xfrm>
+          <a:prstGeom prst="rect">
+            <a:avLst/>
+          </a:prstGeom>
+          <a:noFill/>
+          <a:ln w="0">
+            <a:noFill/>
+          </a:ln>
+        </p:spPr>
+        <p:txBody>
+          <a:bodyPr lIns="91440" tIns="45720" rIns="91440" bIns="45720" anchor="ctr">
+            <a:noAutofit/>
+          </a:bodyPr>
+          <a:lstStyle/>
+          <a:p>
+            <a:pPr indent="0" algn="ctr">
+              <a:buNone/>
+              <a:tabLst>
+                <a:tab pos="0" algn="l"/>
+                <a:tab pos="914400" algn="l"/>
+                <a:tab pos="1828800" algn="l"/>
+                <a:tab pos="2743200" algn="l"/>
+                <a:tab pos="3657600" algn="l"/>
+                <a:tab pos="4572000" algn="l"/>
+                <a:tab pos="5486400" algn="l"/>
+                <a:tab pos="6400800" algn="l"/>
+                <a:tab pos="7315200" algn="l"/>
+                <a:tab pos="8229600" algn="l"/>
+                <a:tab pos="9144000" algn="l"/>
+                <a:tab pos="10058400" algn="l"/>
+              </a:tabLst>
+            </a:pPr>
+            <a:r>
+              <a:rPr lang="en-US" sz="4000" b="0" i="0" u="none" strike="noStrike" dirty="0">
+                <a:solidFill>
+                  <a:srgbClr val="000000"/>
+                </a:solidFill>
+                <a:effectLst/>
+                <a:uFillTx/>
+                <a:latin typeface="Times New Roman"/>
+              </a:rPr>
+              <a:t>Future Work</a:t>
+            </a:r>
+            <a:endParaRPr lang="en-IN" sz="4000" dirty="0"/>
+          </a:p>
+        </p:txBody>
+      </p:sp>
+      <p:sp>
+        <p:nvSpPr>
+          <p:cNvPr id="96" name="TextBox 95">
+            <a:extLst>
+              <a:ext uri="{FF2B5EF4-FFF2-40B4-BE49-F238E27FC236}">
+                <a16:creationId xmlns:a16="http://schemas.microsoft.com/office/drawing/2014/main" id="{C7D210C3-4029-0891-A0D6-D5AC2ABC8FD3}"/>
+              </a:ext>
+            </a:extLst>
+          </p:cNvPr>
+          <p:cNvSpPr txBox="1"/>
+          <p:nvPr/>
+        </p:nvSpPr>
+        <p:spPr>
+          <a:xfrm>
+            <a:off x="228600" y="1325879"/>
+            <a:ext cx="8229600" cy="2533739"/>
+          </a:xfrm>
+          <a:prstGeom prst="rect">
+            <a:avLst/>
+          </a:prstGeom>
+          <a:noFill/>
+          <a:ln w="0">
+            <a:noFill/>
+          </a:ln>
+        </p:spPr>
+        <p:txBody>
+          <a:bodyPr anchor="t">
+            <a:noAutofit/>
+          </a:bodyPr>
+          <a:lstStyle/>
+          <a:p>
+            <a:pPr indent="0">
+              <a:buNone/>
+            </a:pPr>
+            <a:r>
+              <a:rPr lang="en-US" sz="1600" b="1" i="0" u="none" strike="noStrike" dirty="0">
+                <a:solidFill>
+                  <a:srgbClr val="000000"/>
+                </a:solidFill>
+                <a:effectLst/>
+                <a:uFillTx/>
+                <a:latin typeface="Times New Roman"/>
+              </a:rPr>
+              <a:t>Future Work</a:t>
+            </a:r>
+            <a:endParaRPr lang="en-IN" sz="1600" dirty="0"/>
+          </a:p>
+          <a:p>
+            <a:pPr marL="285750" indent="-285750">
+              <a:spcBef>
+                <a:spcPts val="500"/>
+              </a:spcBef>
+              <a:buClr>
+                <a:srgbClr val="000000"/>
+              </a:buClr>
+              <a:buFont typeface="Arial" panose="020B0604020202020204" pitchFamily="34" charset="0"/>
+              <a:buChar char="•"/>
+              <a:tabLst>
+                <a:tab pos="0" algn="l"/>
+                <a:tab pos="914400" algn="l"/>
+                <a:tab pos="1828800" algn="l"/>
+                <a:tab pos="2743200" algn="l"/>
+                <a:tab pos="3657600" algn="l"/>
+                <a:tab pos="4572000" algn="l"/>
+                <a:tab pos="5486400" algn="l"/>
+                <a:tab pos="6400800" algn="l"/>
+                <a:tab pos="7315200" algn="l"/>
+                <a:tab pos="8229600" algn="l"/>
+                <a:tab pos="9144000" algn="l"/>
+                <a:tab pos="10058400" algn="l"/>
+              </a:tabLst>
+            </a:pPr>
+            <a:r>
+              <a:rPr lang="en-US" sz="1600" b="0" i="0" u="none" strike="noStrike" dirty="0">
+                <a:solidFill>
+                  <a:srgbClr val="000000"/>
+                </a:solidFill>
+                <a:effectLst/>
+                <a:uFillTx/>
+                <a:latin typeface="Times New Roman"/>
+              </a:rPr>
+              <a:t>Add a phone-call (IVR) channel so workers with basic phones can report without the app.</a:t>
+            </a:r>
+            <a:endParaRPr lang="en-IN" sz="1600" dirty="0"/>
+          </a:p>
+          <a:p>
+            <a:pPr marL="285750" indent="-285750">
+              <a:spcBef>
+                <a:spcPts val="500"/>
+              </a:spcBef>
+              <a:buClr>
+                <a:srgbClr val="000000"/>
+              </a:buClr>
+              <a:buFont typeface="Arial" panose="020B0604020202020204" pitchFamily="34" charset="0"/>
+              <a:buChar char="•"/>
+              <a:tabLst>
+                <a:tab pos="0" algn="l"/>
+                <a:tab pos="914400" algn="l"/>
+                <a:tab pos="1828800" algn="l"/>
+                <a:tab pos="2743200" algn="l"/>
+                <a:tab pos="3657600" algn="l"/>
+                <a:tab pos="4572000" algn="l"/>
+                <a:tab pos="5486400" algn="l"/>
+                <a:tab pos="6400800" algn="l"/>
+                <a:tab pos="7315200" algn="l"/>
+                <a:tab pos="8229600" algn="l"/>
+                <a:tab pos="9144000" algn="l"/>
+                <a:tab pos="10058400" algn="l"/>
+              </a:tabLst>
+            </a:pPr>
+            <a:r>
+              <a:rPr lang="en-US" sz="1600" b="0" i="0" u="none" strike="noStrike" dirty="0">
+                <a:solidFill>
+                  <a:srgbClr val="000000"/>
+                </a:solidFill>
+                <a:effectLst/>
+                <a:uFillTx/>
+                <a:latin typeface="Times New Roman"/>
+              </a:rPr>
+              <a:t>Validate Marathi and code-mixed Hindi-Marathi-English ASR on real factory recordings.</a:t>
+            </a:r>
+            <a:endParaRPr lang="en-IN" sz="1600" dirty="0"/>
+          </a:p>
+          <a:p>
+            <a:pPr marL="285750" indent="-285750">
+              <a:spcBef>
+                <a:spcPts val="500"/>
+              </a:spcBef>
+              <a:buClr>
+                <a:srgbClr val="000000"/>
+              </a:buClr>
+              <a:buFont typeface="Arial" panose="020B0604020202020204" pitchFamily="34" charset="0"/>
+              <a:buChar char="•"/>
+              <a:tabLst>
+                <a:tab pos="0" algn="l"/>
+                <a:tab pos="914400" algn="l"/>
+                <a:tab pos="1828800" algn="l"/>
+                <a:tab pos="2743200" algn="l"/>
+                <a:tab pos="3657600" algn="l"/>
+                <a:tab pos="4572000" algn="l"/>
+                <a:tab pos="5486400" algn="l"/>
+                <a:tab pos="6400800" algn="l"/>
+                <a:tab pos="7315200" algn="l"/>
+                <a:tab pos="8229600" algn="l"/>
+                <a:tab pos="9144000" algn="l"/>
+                <a:tab pos="10058400" algn="l"/>
+              </a:tabLst>
+            </a:pPr>
+            <a:r>
+              <a:rPr lang="en-US" sz="1600" b="0" i="0" u="none" strike="noStrike" dirty="0">
+                <a:solidFill>
+                  <a:srgbClr val="000000"/>
+                </a:solidFill>
+                <a:effectLst/>
+                <a:uFillTx/>
+                <a:latin typeface="Times New Roman"/>
+              </a:rPr>
+              <a:t>Pilot in a plant to measure reporting rates, response times and anonymity in small lines.</a:t>
+            </a:r>
+            <a:endParaRPr lang="en-IN" sz="1600" dirty="0"/>
+          </a:p>
+          <a:p>
+            <a:pPr marL="285750" indent="-285750">
+              <a:spcBef>
+                <a:spcPts val="500"/>
+              </a:spcBef>
+              <a:buClr>
+                <a:srgbClr val="000000"/>
+              </a:buClr>
+              <a:buFont typeface="Arial" panose="020B0604020202020204" pitchFamily="34" charset="0"/>
+              <a:buChar char="•"/>
+              <a:tabLst>
+                <a:tab pos="0" algn="l"/>
+                <a:tab pos="914400" algn="l"/>
+                <a:tab pos="1828800" algn="l"/>
+                <a:tab pos="2743200" algn="l"/>
+                <a:tab pos="3657600" algn="l"/>
+                <a:tab pos="4572000" algn="l"/>
+                <a:tab pos="5486400" algn="l"/>
+                <a:tab pos="6400800" algn="l"/>
+                <a:tab pos="7315200" algn="l"/>
+                <a:tab pos="8229600" algn="l"/>
+                <a:tab pos="9144000" algn="l"/>
+                <a:tab pos="10058400" algn="l"/>
+              </a:tabLst>
+            </a:pPr>
+            <a:r>
+              <a:rPr lang="en-US" sz="1600" b="0" i="0" u="none" strike="noStrike" dirty="0">
+                <a:solidFill>
+                  <a:srgbClr val="000000"/>
+                </a:solidFill>
+                <a:effectLst/>
+                <a:uFillTx/>
+                <a:latin typeface="Times New Roman"/>
+              </a:rPr>
+              <a:t>Move to a shared rate-limit store (Redis) so the limiter holds across multiple worker processes - the database itself is already on Postgres via Supabase.</a:t>
+            </a:r>
+            <a:endParaRPr lang="en-IN" sz="1600" dirty="0"/>
+          </a:p>
+          <a:p>
+            <a:pPr marL="285750" indent="-285750">
+              <a:spcBef>
+                <a:spcPts val="500"/>
+              </a:spcBef>
+              <a:buClr>
+                <a:srgbClr val="000000"/>
+              </a:buClr>
+              <a:buFont typeface="Arial" panose="020B0604020202020204" pitchFamily="34" charset="0"/>
+              <a:buChar char="•"/>
+              <a:tabLst>
+                <a:tab pos="0" algn="l"/>
+                <a:tab pos="914400" algn="l"/>
+                <a:tab pos="1828800" algn="l"/>
+                <a:tab pos="2743200" algn="l"/>
+                <a:tab pos="3657600" algn="l"/>
+                <a:tab pos="4572000" algn="l"/>
+                <a:tab pos="5486400" algn="l"/>
+                <a:tab pos="6400800" algn="l"/>
+                <a:tab pos="7315200" algn="l"/>
+                <a:tab pos="8229600" algn="l"/>
+                <a:tab pos="9144000" algn="l"/>
+                <a:tab pos="10058400" algn="l"/>
+              </a:tabLst>
+            </a:pPr>
+            <a:r>
+              <a:rPr lang="en-US" sz="1600" b="0" i="0" u="none" strike="noStrike" dirty="0">
+                <a:solidFill>
+                  <a:srgbClr val="000000"/>
+                </a:solidFill>
+                <a:effectLst/>
+                <a:uFillTx/>
+                <a:latin typeface="Times New Roman"/>
+              </a:rPr>
+              <a:t>Extend the HR module to payroll, which the schema (employees, attendance, leave_balances) already leaves room for.</a:t>
+            </a:r>
+            <a:endParaRPr lang="en-IN" sz="1600" dirty="0"/>
+          </a:p>
+        </p:txBody>
+      </p:sp>
+      <p:pic>
+        <p:nvPicPr>
+          <p:cNvPr id="23" name="Picture 7" descr="SIES GST logo">
+            <a:extLst>
+              <a:ext uri="{FF2B5EF4-FFF2-40B4-BE49-F238E27FC236}">
+                <a16:creationId xmlns:a16="http://schemas.microsoft.com/office/drawing/2014/main" id="{E82B45DC-C65D-C940-B4DC-2DB27986CB35}"/>
+              </a:ext>
+            </a:extLst>
+          </p:cNvPr>
+          <p:cNvPicPr/>
+          <p:nvPr/>
+        </p:nvPicPr>
+        <p:blipFill>
+          <a:blip r:embed="rId2"/>
+          <a:stretch/>
+        </p:blipFill>
+        <p:spPr>
+          <a:xfrm>
+            <a:off x="228600" y="0"/>
+            <a:ext cx="1143000" cy="1143000"/>
+          </a:xfrm>
+          <a:prstGeom prst="rect">
+            <a:avLst/>
+          </a:prstGeom>
+          <a:noFill/>
+          <a:ln w="0">
+            <a:noFill/>
+          </a:ln>
+        </p:spPr>
+      </p:pic>
+      <p:sp>
+        <p:nvSpPr>
+          <p:cNvPr id="20" name="Footer 20">
+            <a:extLst>
+              <a:ext uri="{FF2B5EF4-FFF2-40B4-BE49-F238E27FC236}">
+                <a16:creationId xmlns:a16="http://schemas.microsoft.com/office/drawing/2014/main" id="{E54F8F16-6F37-7DC2-BEF3-D09C2401F492}"/>
+              </a:ext>
+            </a:extLst>
+          </p:cNvPr>
+          <p:cNvSpPr/>
+          <p:nvPr/>
+        </p:nvSpPr>
+        <p:spPr>
+          <a:xfrm>
+            <a:off x="457200" y="6356520"/>
+            <a:ext cx="2895480" cy="365040"/>
+          </a:xfrm>
+          <a:prstGeom prst="rect">
+            <a:avLst/>
+          </a:prstGeom>
+          <a:noFill/>
+          <a:ln w="0">
+            <a:noFill/>
+          </a:ln>
+        </p:spPr>
+        <p:style>
+          <a:lnRef idx="0">
+            <a:scrgbClr r="0" g="0" b="0"/>
+          </a:lnRef>
+          <a:fillRef idx="0">
+            <a:scrgbClr r="0" g="0" b="0"/>
+          </a:fillRef>
+          <a:effectRef idx="0">
+            <a:scrgbClr r="0" g="0" b="0"/>
+          </a:effectRef>
+          <a:fontRef idx="minor"/>
+        </p:style>
+        <p:txBody>
+          <a:bodyPr lIns="90000" tIns="46800" rIns="90000" bIns="46800" anchor="ctr">
+            <a:noAutofit/>
+          </a:bodyPr>
+          <a:lstStyle/>
+          <a:p>
+            <a:pPr algn="l">
+              <a:lnSpc>
+                <a:spcPct val="100000"/>
+              </a:lnSpc>
+              <a:tabLst>
+                <a:tab pos="0" algn="l"/>
+                <a:tab pos="914400" algn="l"/>
+                <a:tab pos="1828800" algn="l"/>
+                <a:tab pos="2743200" algn="l"/>
+                <a:tab pos="3657600" algn="l"/>
+                <a:tab pos="4572000" algn="l"/>
+                <a:tab pos="5486400" algn="l"/>
+                <a:tab pos="6400800" algn="l"/>
+                <a:tab pos="7315200" algn="l"/>
+                <a:tab pos="8229600" algn="l"/>
+                <a:tab pos="9144000" algn="l"/>
+                <a:tab pos="10058400" algn="l"/>
+              </a:tabLst>
+            </a:pPr>
+            <a:r>
+              <a:rPr lang="en-US" sz="1200" b="0" i="0" u="none" strike="noStrike">
+                <a:solidFill>
+                  <a:srgbClr val="898989"/>
+                </a:solidFill>
+                <a:effectLst/>
+                <a:uFillTx/>
+                <a:latin typeface="Calibri"/>
+              </a:rPr>
+              <a:t>Vernacular Voice-to-SOP</a:t>
+            </a:r>
+            <a:endParaRPr lang="en-IN" sz="1200"/>
+          </a:p>
+        </p:txBody>
+      </p:sp>
+      <p:sp>
+        <p:nvSpPr>
+          <p:cNvPr id="22" name="Footer 22">
+            <a:extLst>
+              <a:ext uri="{FF2B5EF4-FFF2-40B4-BE49-F238E27FC236}">
+                <a16:creationId xmlns:a16="http://schemas.microsoft.com/office/drawing/2014/main" id="{61967C73-18F6-D75C-41D8-D2697201E3C1}"/>
+              </a:ext>
+            </a:extLst>
+          </p:cNvPr>
+          <p:cNvSpPr/>
+          <p:nvPr/>
+        </p:nvSpPr>
+        <p:spPr>
+          <a:xfrm>
+            <a:off x="3124080" y="6356520"/>
+            <a:ext cx="2895840" cy="365040"/>
+          </a:xfrm>
+          <a:prstGeom prst="rect">
+            <a:avLst/>
+          </a:prstGeom>
+          <a:noFill/>
+          <a:ln w="0">
+            <a:noFill/>
+          </a:ln>
+        </p:spPr>
+        <p:style>
+          <a:lnRef idx="0">
+            <a:scrgbClr r="0" g="0" b="0"/>
+          </a:lnRef>
+          <a:fillRef idx="0">
+            <a:scrgbClr r="0" g="0" b="0"/>
+          </a:fillRef>
+          <a:effectRef idx="0">
+            <a:scrgbClr r="0" g="0" b="0"/>
+          </a:effectRef>
+          <a:fontRef idx="minor"/>
+        </p:style>
+        <p:txBody>
+          <a:bodyPr lIns="90000" tIns="46800" rIns="90000" bIns="46800" anchor="ctr">
+            <a:noAutofit/>
+          </a:bodyPr>
+          <a:lstStyle/>
+          <a:p>
+            <a:pPr algn="ctr">
+              <a:lnSpc>
+                <a:spcPct val="100000"/>
+              </a:lnSpc>
+              <a:tabLst>
+                <a:tab pos="0" algn="l"/>
+                <a:tab pos="914400" algn="l"/>
+                <a:tab pos="1828800" algn="l"/>
+                <a:tab pos="2743200" algn="l"/>
+                <a:tab pos="3657600" algn="l"/>
+                <a:tab pos="4572000" algn="l"/>
+                <a:tab pos="5486400" algn="l"/>
+                <a:tab pos="6400800" algn="l"/>
+                <a:tab pos="7315200" algn="l"/>
+                <a:tab pos="8229600" algn="l"/>
+                <a:tab pos="9144000" algn="l"/>
+                <a:tab pos="10058400" algn="l"/>
+              </a:tabLst>
+            </a:pPr>
+            <a:r>
+              <a:rPr lang="en-US" sz="1200" b="0" i="0" u="none" strike="noStrike">
+                <a:solidFill>
+                  <a:srgbClr val="898989"/>
+                </a:solidFill>
+                <a:effectLst/>
+                <a:uFillTx/>
+                <a:latin typeface="Calibri"/>
+              </a:rPr>
+              <a:t>Date of Presentation</a:t>
+            </a:r>
+            <a:endParaRPr lang="en-IN" sz="1200"/>
+          </a:p>
+        </p:txBody>
+      </p:sp>
+      <p:sp>
+        <p:nvSpPr>
+          <p:cNvPr id="21" name="Footer 21">
+            <a:extLst>
+              <a:ext uri="{FF2B5EF4-FFF2-40B4-BE49-F238E27FC236}">
+                <a16:creationId xmlns:a16="http://schemas.microsoft.com/office/drawing/2014/main" id="{42E7A9DA-2A2A-727D-E57F-C87FFCA131E2}"/>
+              </a:ext>
+            </a:extLst>
+          </p:cNvPr>
+          <p:cNvSpPr/>
+          <p:nvPr/>
+        </p:nvSpPr>
+        <p:spPr>
+          <a:xfrm>
+            <a:off x="6553080" y="6356520"/>
+            <a:ext cx="2133720" cy="365040"/>
+          </a:xfrm>
+          <a:prstGeom prst="rect">
+            <a:avLst/>
+          </a:prstGeom>
+          <a:noFill/>
+          <a:ln w="0">
+            <a:noFill/>
+          </a:ln>
+        </p:spPr>
+        <p:style>
+          <a:lnRef idx="0">
+            <a:scrgbClr r="0" g="0" b="0"/>
+          </a:lnRef>
+          <a:fillRef idx="0">
+            <a:scrgbClr r="0" g="0" b="0"/>
+          </a:fillRef>
+          <a:effectRef idx="0">
+            <a:scrgbClr r="0" g="0" b="0"/>
+          </a:effectRef>
+          <a:fontRef idx="minor"/>
+        </p:style>
+        <p:txBody>
+          <a:bodyPr lIns="90000" tIns="46800" rIns="90000" bIns="46800" anchor="ctr">
+            <a:noAutofit/>
+          </a:bodyPr>
+          <a:lstStyle/>
+          <a:p>
+            <a:pPr algn="r">
+              <a:lnSpc>
+                <a:spcPct val="100000"/>
+              </a:lnSpc>
+              <a:tabLst>
+                <a:tab pos="0" algn="l"/>
+                <a:tab pos="914400" algn="l"/>
+                <a:tab pos="1828800" algn="l"/>
+                <a:tab pos="2743200" algn="l"/>
+                <a:tab pos="3657600" algn="l"/>
+                <a:tab pos="4572000" algn="l"/>
+                <a:tab pos="5486400" algn="l"/>
+                <a:tab pos="6400800" algn="l"/>
+                <a:tab pos="7315200" algn="l"/>
+                <a:tab pos="8229600" algn="l"/>
+                <a:tab pos="9144000" algn="l"/>
+                <a:tab pos="10058400" algn="l"/>
+              </a:tabLst>
+            </a:pPr>
+            <a:fld id="{8259BC30-0621-4682-9088-AF3F4EE5F153}" type="slidenum">
+              <a:rPr lang="en-US" sz="1200" b="0" i="0" u="none" strike="noStrike">
+                <a:solidFill>
+                  <a:srgbClr val="898989"/>
+                </a:solidFill>
+                <a:effectLst/>
+                <a:uFillTx/>
+                <a:latin typeface="Calibri"/>
+              </a:rPr>
+              <a:t>20</a:t>
+            </a:fld>
+            <a:endParaRPr lang="en-IN" sz="1200"/>
+          </a:p>
+        </p:txBody>
+      </p:sp>
+    </p:spTree>
+    <p:extLst>
+      <p:ext uri="{BB962C8B-B14F-4D97-AF65-F5344CB8AC3E}">
+        <p14:creationId xmlns:p14="http://schemas.microsoft.com/office/powerpoint/2010/main" val="1105130474"/>
+      </p:ext>
+    </p:extLst>
+  </p:cSld>
+  <p:clrMapOvr>
+    <a:masterClrMapping/>
+  </p:clrMapOvr>
+</p:sld>
+</file>
+
+<file path=ppt/slides/slide21.xml><?xml version="1.0" encoding="utf-8"?>
+<p:sld xmlns:a="http://schemas.openxmlformats.org/drawingml/2006/main" xmlns:r="http://schemas.openxmlformats.org/officeDocument/2006/relationships" xmlns:p="http://schemas.openxmlformats.org/presentationml/2006/main">
   <p:cSld>
     <p:spTree>
       <p:nvGrpSpPr>
@@ -12170,7 +12492,14 @@
         <p:cNvGrpSpPr/>
         <p:nvPr/>
       </p:nvGrpSpPr>
-      <p:grpSpPr/>
+      <p:grpSpPr>
+        <a:xfrm>
+          <a:off x="0" y="0"/>
+          <a:ext cx="0" cy="0"/>
+          <a:chOff x="0" y="0"/>
+          <a:chExt cx="0" cy="0"/>
+        </a:xfrm>
+      </p:grpSpPr>
       <p:sp>
         <p:nvSpPr>
           <p:cNvPr id="18" name="PlaceHolder 1"/>
@@ -12226,7 +12555,7 @@
                 <a:uFillTx/>
                 <a:latin typeface="Times New Roman"/>
               </a:rPr>
-              <a:t>Methodology (contd.)</a:t>
+              <a:t>References</a:t>
             </a:r>
             <a:endParaRPr lang="en-IN" sz="4000"/>
           </a:p>
@@ -12240,7 +12569,7 @@
         </p:nvSpPr>
         <p:spPr>
           <a:xfrm>
-            <a:off x="457200" y="1188720"/>
+            <a:off x="457200" y="1502580"/>
             <a:ext cx="8229600" cy="4876800"/>
           </a:xfrm>
           <a:prstGeom prst="rect">
@@ -12257,15 +12586,11 @@
           </a:bodyPr>
           <a:lstStyle/>
           <a:p>
-            <a:pPr marL="285750" indent="-285750">
+            <a:pPr marL="514440" indent="-514440">
               <a:spcBef>
-                <a:spcPts val="800"/>
+                <a:spcPts val="500"/>
               </a:spcBef>
-              <a:buClr>
-                <a:srgbClr val="000000"/>
-              </a:buClr>
-              <a:buFont typeface="Arial" panose="020B0604020202020204" pitchFamily="34" charset="0"/>
-              <a:buChar char="•"/>
+              <a:buNone/>
               <a:tabLst>
                 <a:tab pos="0" algn="l"/>
                 <a:tab pos="914400" algn="l"/>
@@ -12282,28 +12607,24 @@
               </a:tabLst>
             </a:pPr>
             <a:r>
-              <a:rPr lang="en-US" sz="1600" b="0" i="0" u="none" strike="noStrike" dirty="0">
-                <a:solidFill>
-                  <a:srgbClr val="000000"/>
-                </a:solidFill>
-                <a:effectLst/>
-                <a:uFillTx/>
-                <a:latin typeface="Times New Roman"/>
-              </a:rPr>
-              <a:t>Feature 3 - Plant CRM Modules: Employee, Workforce and HR management, built on the same org structure (plants / lines) and authorization shapes (scope_sql, author_scope_sql, may_author_line) the first two features already established.</a:t>
-            </a:r>
-            <a:endParaRPr lang="en-IN" sz="1600" dirty="0"/>
-          </a:p>
-          <a:p>
-            <a:pPr marL="285750" indent="-285750">
+              <a:rPr lang="en-US" sz="1400" b="0" i="0" u="none" strike="noStrike">
+                <a:solidFill>
+                  <a:srgbClr val="000000"/>
+                </a:solidFill>
+                <a:effectLst/>
+                <a:uFillTx/>
+                <a:latin typeface="Times New Roman"/>
+              </a:rPr>
+              <a:t>[1]  K. S. Bhogale, S. Sundaresan, A. Raman, T. Javed, M. M. Khapra and P. Kumar, “Vistaar: Diverse Benchmarks and Training Sets for Indian Language ASR,” in Proc. INTERSPEECH, 2023.</a:t>
+            </a:r>
+            <a:endParaRPr lang="en-IN" sz="1400"/>
+          </a:p>
+          <a:p>
+            <a:pPr marL="514440" indent="-514440">
               <a:spcBef>
-                <a:spcPts val="800"/>
+                <a:spcPts val="500"/>
               </a:spcBef>
-              <a:buClr>
-                <a:srgbClr val="000000"/>
-              </a:buClr>
-              <a:buFont typeface="Arial" panose="020B0604020202020204" pitchFamily="34" charset="0"/>
-              <a:buChar char="•"/>
+              <a:buNone/>
               <a:tabLst>
                 <a:tab pos="0" algn="l"/>
                 <a:tab pos="914400" algn="l"/>
@@ -12320,28 +12641,24 @@
               </a:tabLst>
             </a:pPr>
             <a:r>
-              <a:rPr lang="en-US" sz="1600" b="0" i="0" u="none" strike="noStrike" dirty="0">
-                <a:solidFill>
-                  <a:srgbClr val="000000"/>
-                </a:solidFill>
-                <a:effectLst/>
-                <a:uFillTx/>
-                <a:latin typeface="Times New Roman"/>
-              </a:rPr>
-              <a:t>Employee management: a plant-wide directory with departments, job titles and a direct-manager org chart; a worker can now be tracked by name for scheduling without ever being given a login.</a:t>
-            </a:r>
-            <a:endParaRPr lang="en-IN" sz="1600" dirty="0"/>
-          </a:p>
-          <a:p>
-            <a:pPr marL="285750" indent="-285750">
+              <a:rPr lang="en-US" sz="1400" b="0" i="0" u="none" strike="noStrike">
+                <a:solidFill>
+                  <a:srgbClr val="000000"/>
+                </a:solidFill>
+                <a:effectLst/>
+                <a:uFillTx/>
+                <a:latin typeface="Times New Roman"/>
+              </a:rPr>
+              <a:t>[2]  “Whisper-Based Multilingual ASR for Indic Languages,” in Proc. Pattern Recognition and Machine Intelligence (PReMI), Springer LNCS, doi: 10.1007/978-3-032-18480-1_78.</a:t>
+            </a:r>
+            <a:endParaRPr lang="en-IN" sz="1400"/>
+          </a:p>
+          <a:p>
+            <a:pPr marL="514440" indent="-514440">
               <a:spcBef>
-                <a:spcPts val="800"/>
+                <a:spcPts val="500"/>
               </a:spcBef>
-              <a:buClr>
-                <a:srgbClr val="000000"/>
-              </a:buClr>
-              <a:buFont typeface="Arial" panose="020B0604020202020204" pitchFamily="34" charset="0"/>
-              <a:buChar char="•"/>
+              <a:buNone/>
               <a:tabLst>
                 <a:tab pos="0" algn="l"/>
                 <a:tab pos="914400" algn="l"/>
@@ -12358,28 +12675,24 @@
               </a:tabLst>
             </a:pPr>
             <a:r>
-              <a:rPr lang="en-US" sz="1600" b="0" i="0" u="none" strike="noStrike" dirty="0">
-                <a:solidFill>
-                  <a:srgbClr val="000000"/>
-                </a:solidFill>
-                <a:effectLst/>
-                <a:uFillTx/>
-                <a:latin typeface="Times New Roman"/>
-              </a:rPr>
-              <a:t>Workforce management: shift definitions, line-scoped shift assignments and attendance; clock-in/out is supervisor-operated and kiosk-style, since it is tied to one worker's identity by definition - unlike an anonymous problem report.</a:t>
-            </a:r>
-            <a:endParaRPr lang="en-IN" sz="1600" dirty="0"/>
-          </a:p>
-          <a:p>
-            <a:pPr marL="285750" indent="-285750">
+              <a:rPr lang="en-US" sz="1400" b="0" i="0" u="none" strike="noStrike">
+                <a:solidFill>
+                  <a:srgbClr val="000000"/>
+                </a:solidFill>
+                <a:effectLst/>
+                <a:uFillTx/>
+                <a:latin typeface="Times New Roman"/>
+              </a:rPr>
+              <a:t>[3]  “Hindi-Marathi Code-Switched Speech Recognition,” Preprints.org, manuscript 202503.2278, 2025.</a:t>
+            </a:r>
+            <a:endParaRPr lang="en-IN" sz="1400"/>
+          </a:p>
+          <a:p>
+            <a:pPr marL="514440" indent="-514440">
               <a:spcBef>
-                <a:spcPts val="800"/>
+                <a:spcPts val="500"/>
               </a:spcBef>
-              <a:buClr>
-                <a:srgbClr val="000000"/>
-              </a:buClr>
-              <a:buFont typeface="Arial" panose="020B0604020202020204" pitchFamily="34" charset="0"/>
-              <a:buChar char="•"/>
+              <a:buNone/>
               <a:tabLst>
                 <a:tab pos="0" algn="l"/>
                 <a:tab pos="914400" algn="l"/>
@@ -12396,28 +12709,24 @@
               </a:tabLst>
             </a:pPr>
             <a:r>
-              <a:rPr lang="en-US" sz="1600" b="0" i="0" u="none" strike="noStrike" dirty="0">
-                <a:solidFill>
-                  <a:srgbClr val="000000"/>
-                </a:solidFill>
-                <a:effectLst/>
-                <a:uFillTx/>
-                <a:latin typeface="Times New Roman"/>
-              </a:rPr>
-              <a:t>HR management: self-service leave requests with balance tracking and manager approval, plus a minimal recruitment pipeline (job postings → candidates → applications) with resumes uploaded straight to cloud storage.</a:t>
-            </a:r>
-            <a:endParaRPr lang="en-IN" sz="1600" dirty="0"/>
-          </a:p>
-          <a:p>
-            <a:pPr marL="285750" indent="-285750">
+              <a:rPr lang="en-US" sz="1400" b="0" i="0" u="none" strike="noStrike">
+                <a:solidFill>
+                  <a:srgbClr val="000000"/>
+                </a:solidFill>
+                <a:effectLst/>
+                <a:uFillTx/>
+                <a:latin typeface="Times New Roman"/>
+              </a:rPr>
+              <a:t>[4]  D. Y.-B. Wang, Z. Shen, S. S. Mishra, Z. Xu, Y. Teng and H. Ding, “SLOT: Structuring the Output of Large Language Models,” arXiv:2505.04016, 2025.</a:t>
+            </a:r>
+            <a:endParaRPr lang="en-IN" sz="1400"/>
+          </a:p>
+          <a:p>
+            <a:pPr marL="514440" indent="-514440">
               <a:spcBef>
-                <a:spcPts val="800"/>
+                <a:spcPts val="500"/>
               </a:spcBef>
-              <a:buClr>
-                <a:srgbClr val="000000"/>
-              </a:buClr>
-              <a:buFont typeface="Arial" panose="020B0604020202020204" pitchFamily="34" charset="0"/>
-              <a:buChar char="•"/>
+              <a:buNone/>
               <a:tabLst>
                 <a:tab pos="0" algn="l"/>
                 <a:tab pos="914400" algn="l"/>
@@ -12434,17 +12743,51 @@
               </a:tabLst>
             </a:pPr>
             <a:r>
-              <a:rPr lang="en-US" sz="1600" b="0" i="0" u="none" strike="noStrike" dirty="0">
-                <a:solidFill>
-                  <a:srgbClr val="000000"/>
-                </a:solidFill>
-                <a:effectLst/>
-                <a:uFillTx/>
-                <a:latin typeface="Times New Roman"/>
-              </a:rPr>
-              <a:t>Directory writes, shift definitions and recruitment stay admin-gated; leave and shift-assignment data stay scoped to the lines a manager or supervisor actually runs - the same two-layer authorization as the original features.</a:t>
-            </a:r>
-            <a:endParaRPr lang="en-IN" sz="1600" dirty="0"/>
+              <a:rPr lang="en-US" sz="1400" b="0" i="0" u="none" strike="noStrike">
+                <a:solidFill>
+                  <a:srgbClr val="000000"/>
+                </a:solidFill>
+                <a:effectLst/>
+                <a:uFillTx/>
+                <a:latin typeface="Times New Roman"/>
+              </a:rPr>
+              <a:t>[5]  F. Longo and A. Padovano, “Voice-enabled Assistants of the Operator 4.0 in the Social Smart Factory,” Manufacturing Letters, vol. 26, pp. 12-16, 2020.</a:t>
+            </a:r>
+            <a:endParaRPr lang="en-IN" sz="1400"/>
+          </a:p>
+          <a:p>
+            <a:pPr marL="514440" indent="-514440">
+              <a:spcBef>
+                <a:spcPts val="500"/>
+              </a:spcBef>
+              <a:buNone/>
+              <a:tabLst>
+                <a:tab pos="0" algn="l"/>
+                <a:tab pos="914400" algn="l"/>
+                <a:tab pos="1828800" algn="l"/>
+                <a:tab pos="2743200" algn="l"/>
+                <a:tab pos="3657600" algn="l"/>
+                <a:tab pos="4572000" algn="l"/>
+                <a:tab pos="5486400" algn="l"/>
+                <a:tab pos="6400800" algn="l"/>
+                <a:tab pos="7315200" algn="l"/>
+                <a:tab pos="8229600" algn="l"/>
+                <a:tab pos="9144000" algn="l"/>
+                <a:tab pos="10058400" algn="l"/>
+              </a:tabLst>
+            </a:pPr>
+            <a:r>
+              <a:rPr lang="en-US" sz="1400" b="0" i="0" u="none" strike="noStrike">
+                <a:solidFill>
+                  <a:srgbClr val="000000"/>
+                </a:solidFill>
+                <a:effectLst/>
+                <a:uFillTx/>
+                <a:latin typeface="Times New Roman"/>
+              </a:rPr>
+              <a:t>[6]  T. M. Probst, “Organizational Safety Climate and Supervisor Safety Enforcement: Multilevel Explorations of the Causes of Accident Underreporting,” Journal of Applied Psychology, vol. 100, pp. 1899-1907, 2015, doi: 10.1037/a0039195.</a:t>
+            </a:r>
+            <a:endParaRPr lang="en-IN" sz="1400"/>
           </a:p>
         </p:txBody>
       </p:sp>
@@ -12545,77 +12888,6 @@
       </p:sp>
       <p:sp>
         <p:nvSpPr>
-          <p:cNvPr id="22" name="Footer 22"/>
-          <p:cNvSpPr/>
-          <p:nvPr/>
-        </p:nvSpPr>
-        <p:spPr>
-          <a:xfrm>
-            <a:off x="3124080" y="6356520"/>
-            <a:ext cx="2895840" cy="365040"/>
-          </a:xfrm>
-          <a:prstGeom prst="rect">
-            <a:avLst/>
-          </a:prstGeom>
-          <a:noFill/>
-          <a:ln w="0">
-            <a:noFill/>
-          </a:ln>
-        </p:spPr>
-        <p:style>
-          <a:lnRef idx="0">
-            <a:scrgbClr r="0" g="0" b="0"/>
-          </a:lnRef>
-          <a:fillRef idx="0">
-            <a:scrgbClr r="0" g="0" b="0"/>
-          </a:fillRef>
-          <a:effectRef idx="0">
-            <a:scrgbClr r="0" g="0" b="0"/>
-          </a:effectRef>
-          <a:fontRef idx="minor"/>
-        </p:style>
-        <p:txBody>
-          <a:bodyPr lIns="90000" tIns="46800" rIns="90000" bIns="46800" anchor="ctr">
-            <a:noAutofit/>
-          </a:bodyPr>
-          <a:lstStyle/>
-          <a:p>
-            <a:pPr algn="ctr">
-              <a:lnSpc>
-                <a:spcPct val="100000"/>
-              </a:lnSpc>
-              <a:tabLst>
-                <a:tab pos="0" algn="l"/>
-                <a:tab pos="914400" algn="l"/>
-                <a:tab pos="1828800" algn="l"/>
-                <a:tab pos="2743200" algn="l"/>
-                <a:tab pos="3657600" algn="l"/>
-                <a:tab pos="4572000" algn="l"/>
-                <a:tab pos="5486400" algn="l"/>
-                <a:tab pos="6400800" algn="l"/>
-                <a:tab pos="7315200" algn="l"/>
-                <a:tab pos="8229600" algn="l"/>
-                <a:tab pos="9144000" algn="l"/>
-                <a:tab pos="10058400" algn="l"/>
-              </a:tabLst>
-            </a:pPr>
-            <a:r>
-              <a:rPr lang="en-US" sz="1200" b="0" i="0" u="none" strike="noStrike">
-                <a:solidFill>
-                  <a:srgbClr val="898989"/>
-                </a:solidFill>
-                <a:effectLst/>
-                <a:uFillTx/>
-                <a:latin typeface="Calibri"/>
-              </a:rPr>
-              <a:t>Date of Presentation</a:t>
-            </a:r>
-            <a:endParaRPr lang="en-IN" sz="1200"/>
-          </a:p>
-        </p:txBody>
-      </p:sp>
-      <p:sp>
-        <p:nvSpPr>
           <p:cNvPr id="21" name="Footer 21"/>
           <p:cNvSpPr/>
           <p:nvPr/>
@@ -12679,7 +12951,7 @@
                 <a:uFillTx/>
                 <a:latin typeface="Calibri"/>
               </a:rPr>
-              <a:t>9</a:t>
+              <a:t>21</a:t>
             </a:fld>
             <a:endParaRPr lang="en-IN" sz="1200"/>
           </a:p>
@@ -12693,8 +12965,8 @@
 </p:sld>
 </file>
 
-<file path=ppt/slides/slide21.xml><?xml version="1.0" encoding="utf-8"?>
-<p:sld xmlns:a="http://schemas.openxmlformats.org/drawingml/2006/main" xmlns:p="http://schemas.openxmlformats.org/presentationml/2006/main" xmlns:r="http://schemas.openxmlformats.org/officeDocument/2006/relationships">
+<file path=ppt/slides/slide22.xml><?xml version="1.0" encoding="utf-8"?>
+<p:sld xmlns:a="http://schemas.openxmlformats.org/drawingml/2006/main" xmlns:r="http://schemas.openxmlformats.org/officeDocument/2006/relationships" xmlns:p="http://schemas.openxmlformats.org/presentationml/2006/main">
   <p:cSld>
     <p:spTree>
       <p:nvGrpSpPr>
@@ -12702,7 +12974,14 @@
         <p:cNvGrpSpPr/>
         <p:nvPr/>
       </p:nvGrpSpPr>
-      <p:grpSpPr/>
+      <p:grpSpPr>
+        <a:xfrm>
+          <a:off x="0" y="0"/>
+          <a:ext cx="0" cy="0"/>
+          <a:chOff x="0" y="0"/>
+          <a:chExt cx="0" cy="0"/>
+        </a:xfrm>
+      </p:grpSpPr>
       <p:sp>
         <p:nvSpPr>
           <p:cNvPr id="18" name="PlaceHolder 1"/>
@@ -12758,7 +13037,7 @@
                 <a:uFillTx/>
                 <a:latin typeface="Times New Roman"/>
               </a:rPr>
-              <a:t>System Architecture (contd.)</a:t>
+              <a:t>References (contd.)</a:t>
             </a:r>
             <a:endParaRPr lang="en-IN" sz="4000"/>
           </a:p>
@@ -12772,7 +13051,7 @@
         </p:nvSpPr>
         <p:spPr>
           <a:xfrm>
-            <a:off x="457200" y="1188720"/>
+            <a:off x="457200" y="1502580"/>
             <a:ext cx="8229600" cy="4876800"/>
           </a:xfrm>
           <a:prstGeom prst="rect">
@@ -12789,15 +13068,11 @@
           </a:bodyPr>
           <a:lstStyle/>
           <a:p>
-            <a:pPr marL="285750" indent="-285750">
+            <a:pPr marL="514440" indent="-514440">
               <a:spcBef>
-                <a:spcPts val="800"/>
+                <a:spcPts val="500"/>
               </a:spcBef>
-              <a:buClr>
-                <a:srgbClr val="000000"/>
-              </a:buClr>
-              <a:buFont typeface="Arial" panose="020B0604020202020204" pitchFamily="34" charset="0"/>
-              <a:buChar char="•"/>
+              <a:buNone/>
               <a:tabLst>
                 <a:tab pos="0" algn="l"/>
                 <a:tab pos="914400" algn="l"/>
@@ -12814,28 +13089,24 @@
               </a:tabLst>
             </a:pPr>
             <a:r>
-              <a:rPr lang="en-US" sz="1600" b="0" i="0" u="none" strike="noStrike" dirty="0">
-                <a:solidFill>
-                  <a:srgbClr val="000000"/>
-                </a:solidFill>
-                <a:effectLst/>
-                <a:uFillTx/>
-                <a:latin typeface="Times New Roman"/>
-              </a:rPr>
-              <a:t>Backend migration: SQLite and a hand-rolled PIN + HMAC login → Supabase Postgres, Supabase Auth and Row Level Security.</a:t>
-            </a:r>
-            <a:endParaRPr lang="en-IN" sz="1600" dirty="0"/>
-          </a:p>
-          <a:p>
-            <a:pPr marL="285750" indent="-285750">
+              <a:rPr lang="en-US" sz="1400" b="0" i="0" u="none" strike="noStrike">
+                <a:solidFill>
+                  <a:srgbClr val="000000"/>
+                </a:solidFill>
+                <a:effectLst/>
+                <a:uFillTx/>
+                <a:latin typeface="Times New Roman"/>
+              </a:rPr>
+              <a:t>[7]  J. R. Detert and L. K. Treviño, “Speaking Up to Higher-Ups: How Supervisors and Skip-Level Leaders Influence Employee Voice,” Organization Science, vol. 21, no. 1, pp. 249-270, 2010, doi: 10.1287/orsc.1080.0405.</a:t>
+            </a:r>
+            <a:endParaRPr lang="en-IN" sz="1400"/>
+          </a:p>
+          <a:p>
+            <a:pPr marL="514440" indent="-514440">
               <a:spcBef>
-                <a:spcPts val="800"/>
+                <a:spcPts val="500"/>
               </a:spcBef>
-              <a:buClr>
-                <a:srgbClr val="000000"/>
-              </a:buClr>
-              <a:buFont typeface="Arial" panose="020B0604020202020204" pitchFamily="34" charset="0"/>
-              <a:buChar char="•"/>
+              <a:buNone/>
               <a:tabLst>
                 <a:tab pos="0" algn="l"/>
                 <a:tab pos="914400" algn="l"/>
@@ -12852,28 +13123,24 @@
               </a:tabLst>
             </a:pPr>
             <a:r>
-              <a:rPr lang="en-US" sz="1600" b="0" i="0" u="none" strike="noStrike" dirty="0">
-                <a:solidFill>
-                  <a:srgbClr val="000000"/>
-                </a:solidFill>
-                <a:effectLst/>
-                <a:uFillTx/>
-                <a:latin typeface="Times New Roman"/>
-              </a:rPr>
-              <a:t>Database: accessed via SQLAlchemy Core (raw SQL, named binds, no ORM); every table, view and RLS policy is hand-written Postgres DDL in an Alembic migration, applied explicitly - nothing is auto-created on boot.</a:t>
-            </a:r>
-            <a:endParaRPr lang="en-IN" sz="1600" dirty="0"/>
-          </a:p>
-          <a:p>
-            <a:pPr marL="285750" indent="-285750">
+              <a:rPr lang="en-US" sz="1400" b="0" i="0" u="none" strike="noStrike">
+                <a:solidFill>
+                  <a:srgbClr val="000000"/>
+                </a:solidFill>
+                <a:effectLst/>
+                <a:uFillTx/>
+                <a:latin typeface="Times New Roman"/>
+              </a:rPr>
+              <a:t>[8]  P. Mudliar, J. Donner and W. Thies, “Emergent Practices Around CGNet Swara, a Voice Forum for Citizen Journalism in Rural India,” in Proc. Int. Conf. on Information and Communication Technologies and Development (ICTD), ACM, 2012.</a:t>
+            </a:r>
+            <a:endParaRPr lang="en-IN" sz="1400"/>
+          </a:p>
+          <a:p>
+            <a:pPr marL="514440" indent="-514440">
               <a:spcBef>
-                <a:spcPts val="800"/>
+                <a:spcPts val="500"/>
               </a:spcBef>
-              <a:buClr>
-                <a:srgbClr val="000000"/>
-              </a:buClr>
-              <a:buFont typeface="Arial" panose="020B0604020202020204" pitchFamily="34" charset="0"/>
-              <a:buChar char="•"/>
+              <a:buNone/>
               <a:tabLst>
                 <a:tab pos="0" algn="l"/>
                 <a:tab pos="914400" algn="l"/>
@@ -12890,28 +13157,24 @@
               </a:tabLst>
             </a:pPr>
             <a:r>
-              <a:rPr lang="en-US" sz="1600" b="0" i="0" u="none" strike="noStrike" dirty="0">
-                <a:solidFill>
-                  <a:srgbClr val="000000"/>
-                </a:solidFill>
-                <a:effectLst/>
-                <a:uFillTx/>
-                <a:latin typeface="Times New Roman"/>
-              </a:rPr>
-              <a:t>Staff sign-in: Supabase Auth (email + password); the backend verifies each request's JWT locally against Supabase's public key set, so a role change applies immediately with no re-login.</a:t>
-            </a:r>
-            <a:endParaRPr lang="en-IN" sz="1600" dirty="0"/>
-          </a:p>
-          <a:p>
-            <a:pPr marL="285750" indent="-285750">
+              <a:rPr lang="en-US" sz="1400" b="0" i="0" u="none" strike="noStrike">
+                <a:solidFill>
+                  <a:srgbClr val="000000"/>
+                </a:solidFill>
+                <a:effectLst/>
+                <a:uFillTx/>
+                <a:latin typeface="Times New Roman"/>
+              </a:rPr>
+              <a:t>[9]  A. J.-P. Tixier, M. R. Hallowell, B. Rajagopalan and D. Bowman, “Automated Content Analysis for Construction Safety: A Natural Language Processing System to Extract Precursors and Outcomes from Unstructured Injury Reports,” Automation in Construction, vol. 62, pp. 45-56, 2016.</a:t>
+            </a:r>
+            <a:endParaRPr lang="en-IN" sz="1400"/>
+          </a:p>
+          <a:p>
+            <a:pPr marL="514440" indent="-514440">
               <a:spcBef>
-                <a:spcPts val="800"/>
+                <a:spcPts val="500"/>
               </a:spcBef>
-              <a:buClr>
-                <a:srgbClr val="000000"/>
-              </a:buClr>
-              <a:buFont typeface="Arial" panose="020B0604020202020204" pitchFamily="34" charset="0"/>
-              <a:buChar char="•"/>
+              <a:buNone/>
               <a:tabLst>
                 <a:tab pos="0" algn="l"/>
                 <a:tab pos="914400" algn="l"/>
@@ -12928,28 +13191,24 @@
               </a:tabLst>
             </a:pPr>
             <a:r>
-              <a:rPr lang="en-US" sz="1600" b="0" i="0" u="none" strike="noStrike" dirty="0">
-                <a:solidFill>
-                  <a:srgbClr val="000000"/>
-                </a:solidFill>
-                <a:effectLst/>
-                <a:uFillTx/>
-                <a:latin typeface="Times New Roman"/>
-              </a:rPr>
-              <a:t>Worker anonymity preserved: the worker-facing routes still need no account; they run on a separate, RLS-bypassing service connection so the rate limiter and triage pipeline stay the only path into the database.</a:t>
-            </a:r>
-            <a:endParaRPr lang="en-IN" sz="1600" dirty="0"/>
-          </a:p>
-          <a:p>
-            <a:pPr marL="285750" indent="-285750">
+              <a:rPr lang="en-US" sz="1400" b="0" i="0" u="none" strike="noStrike">
+                <a:solidFill>
+                  <a:srgbClr val="000000"/>
+                </a:solidFill>
+                <a:effectLst/>
+                <a:uFillTx/>
+                <a:latin typeface="Times New Roman"/>
+              </a:rPr>
+              <a:t>[10]  A. Radford, J. W. Kim, T. Xu, G. Brockman, C. McLeavey and I. Sutskever, “Robust Speech Recognition via Large-Scale Weak Supervision,” in Proc. ICML, 2023.</a:t>
+            </a:r>
+            <a:endParaRPr lang="en-IN" sz="1400"/>
+          </a:p>
+          <a:p>
+            <a:pPr marL="514440" indent="-514440">
               <a:spcBef>
-                <a:spcPts val="800"/>
+                <a:spcPts val="500"/>
               </a:spcBef>
-              <a:buClr>
-                <a:srgbClr val="000000"/>
-              </a:buClr>
-              <a:buFont typeface="Arial" panose="020B0604020202020204" pitchFamily="34" charset="0"/>
-              <a:buChar char="•"/>
+              <a:buNone/>
               <a:tabLst>
                 <a:tab pos="0" algn="l"/>
                 <a:tab pos="914400" algn="l"/>
@@ -12966,55 +13225,17 @@
               </a:tabLst>
             </a:pPr>
             <a:r>
-              <a:rPr lang="en-US" sz="1600" b="0" i="0" u="none" strike="noStrike" dirty="0">
-                <a:solidFill>
-                  <a:srgbClr val="000000"/>
-                </a:solidFill>
-                <a:effectLst/>
-                <a:uFillTx/>
-                <a:latin typeface="Times New Roman"/>
-              </a:rPr>
-              <a:t>Authorization in depth: the same scope checks run in the application layer and are enforced again by Postgres Row Level Security on every staff-touched table.</a:t>
-            </a:r>
-            <a:endParaRPr lang="en-IN" sz="1600" dirty="0"/>
-          </a:p>
-          <a:p>
-            <a:pPr marL="285750" indent="-285750">
-              <a:spcBef>
-                <a:spcPts val="800"/>
-              </a:spcBef>
-              <a:buClr>
-                <a:srgbClr val="000000"/>
-              </a:buClr>
-              <a:buFont typeface="Arial" panose="020B0604020202020204" pitchFamily="34" charset="0"/>
-              <a:buChar char="•"/>
-              <a:tabLst>
-                <a:tab pos="0" algn="l"/>
-                <a:tab pos="914400" algn="l"/>
-                <a:tab pos="1828800" algn="l"/>
-                <a:tab pos="2743200" algn="l"/>
-                <a:tab pos="3657600" algn="l"/>
-                <a:tab pos="4572000" algn="l"/>
-                <a:tab pos="5486400" algn="l"/>
-                <a:tab pos="6400800" algn="l"/>
-                <a:tab pos="7315200" algn="l"/>
-                <a:tab pos="8229600" algn="l"/>
-                <a:tab pos="9144000" algn="l"/>
-                <a:tab pos="10058400" algn="l"/>
-              </a:tabLst>
-            </a:pPr>
-            <a:r>
-              <a:rPr lang="en-US" sz="1600" b="0" i="0" u="none" strike="noStrike" dirty="0">
-                <a:solidFill>
-                  <a:srgbClr val="000000"/>
-                </a:solidFill>
-                <a:effectLst/>
-                <a:uFillTx/>
-                <a:latin typeface="Times New Roman"/>
-              </a:rPr>
-              <a:t>Unified dashboard: every staff role now lands on one role-filtered sidebar (Dashboard / SOP cards / Inbox / Employees / Workforce / HR) with KPI tiles and charts, replacing a separate screen per module.</a:t>
-            </a:r>
-            <a:endParaRPr lang="en-IN" sz="1600" dirty="0"/>
+              <a:rPr lang="en-US" sz="1400" b="0" i="0" u="none" strike="noStrike">
+                <a:solidFill>
+                  <a:srgbClr val="000000"/>
+                </a:solidFill>
+                <a:effectLst/>
+                <a:uFillTx/>
+                <a:latin typeface="Times New Roman"/>
+              </a:rPr>
+              <a:t>[11]  Safe in India Foundation, “CRUSHED2026: Safe in India's 8th Annual Report on Worker Safety in the Indian Automotive Manufacturing Sector,” 2026. [Online]. Available: https://www.safeinindia.org/worker-safety-reports</a:t>
+            </a:r>
+            <a:endParaRPr lang="en-IN" sz="1400"/>
           </a:p>
         </p:txBody>
       </p:sp>
@@ -13115,77 +13336,6 @@
       </p:sp>
       <p:sp>
         <p:nvSpPr>
-          <p:cNvPr id="22" name="Footer 22"/>
-          <p:cNvSpPr/>
-          <p:nvPr/>
-        </p:nvSpPr>
-        <p:spPr>
-          <a:xfrm>
-            <a:off x="3124080" y="6356520"/>
-            <a:ext cx="2895840" cy="365040"/>
-          </a:xfrm>
-          <a:prstGeom prst="rect">
-            <a:avLst/>
-          </a:prstGeom>
-          <a:noFill/>
-          <a:ln w="0">
-            <a:noFill/>
-          </a:ln>
-        </p:spPr>
-        <p:style>
-          <a:lnRef idx="0">
-            <a:scrgbClr r="0" g="0" b="0"/>
-          </a:lnRef>
-          <a:fillRef idx="0">
-            <a:scrgbClr r="0" g="0" b="0"/>
-          </a:fillRef>
-          <a:effectRef idx="0">
-            <a:scrgbClr r="0" g="0" b="0"/>
-          </a:effectRef>
-          <a:fontRef idx="minor"/>
-        </p:style>
-        <p:txBody>
-          <a:bodyPr lIns="90000" tIns="46800" rIns="90000" bIns="46800" anchor="ctr">
-            <a:noAutofit/>
-          </a:bodyPr>
-          <a:lstStyle/>
-          <a:p>
-            <a:pPr algn="ctr">
-              <a:lnSpc>
-                <a:spcPct val="100000"/>
-              </a:lnSpc>
-              <a:tabLst>
-                <a:tab pos="0" algn="l"/>
-                <a:tab pos="914400" algn="l"/>
-                <a:tab pos="1828800" algn="l"/>
-                <a:tab pos="2743200" algn="l"/>
-                <a:tab pos="3657600" algn="l"/>
-                <a:tab pos="4572000" algn="l"/>
-                <a:tab pos="5486400" algn="l"/>
-                <a:tab pos="6400800" algn="l"/>
-                <a:tab pos="7315200" algn="l"/>
-                <a:tab pos="8229600" algn="l"/>
-                <a:tab pos="9144000" algn="l"/>
-                <a:tab pos="10058400" algn="l"/>
-              </a:tabLst>
-            </a:pPr>
-            <a:r>
-              <a:rPr lang="en-US" sz="1200" b="0" i="0" u="none" strike="noStrike">
-                <a:solidFill>
-                  <a:srgbClr val="898989"/>
-                </a:solidFill>
-                <a:effectLst/>
-                <a:uFillTx/>
-                <a:latin typeface="Calibri"/>
-              </a:rPr>
-              <a:t>Date of Presentation</a:t>
-            </a:r>
-            <a:endParaRPr lang="en-IN" sz="1200"/>
-          </a:p>
-        </p:txBody>
-      </p:sp>
-      <p:sp>
-        <p:nvSpPr>
           <p:cNvPr id="21" name="Footer 21"/>
           <p:cNvSpPr/>
           <p:nvPr/>
@@ -13249,7 +13399,7 @@
                 <a:uFillTx/>
                 <a:latin typeface="Calibri"/>
               </a:rPr>
-              <a:t>9</a:t>
+              <a:t>22</a:t>
             </a:fld>
             <a:endParaRPr lang="en-IN" sz="1200"/>
           </a:p>
@@ -17160,7 +17310,7 @@
                 <a:uFillTx/>
                 <a:latin typeface="Calibri"/>
               </a:rPr>
-              <a:t>4</a:t>
+              <a:t>5</a:t>
             </a:fld>
             <a:endParaRPr lang="en-IN" sz="1200"/>
           </a:p>
@@ -18433,7 +18583,7 @@
                 <a:uFillTx/>
                 <a:latin typeface="Calibri"/>
               </a:rPr>
-              <a:t>4</a:t>
+              <a:t>6</a:t>
             </a:fld>
             <a:endParaRPr lang="en-IN" sz="1200"/>
           </a:p>
@@ -19604,7 +19754,7 @@
                 <a:uFillTx/>
                 <a:latin typeface="Calibri"/>
               </a:rPr>
-              <a:t>5</a:t>
+              <a:t>7</a:t>
             </a:fld>
             <a:endParaRPr lang="en-IN" sz="1200"/>
           </a:p>
@@ -20181,7 +20331,7 @@
                 <a:uFillTx/>
                 <a:latin typeface="Calibri"/>
               </a:rPr>
-              <a:t>6</a:t>
+              <a:t>8</a:t>
             </a:fld>
             <a:endParaRPr lang="en-IN" sz="1200"/>
           </a:p>
@@ -20834,7 +20984,7 @@
                 <a:uFillTx/>
                 <a:latin typeface="Calibri"/>
               </a:rPr>
-              <a:t>7</a:t>
+              <a:t>9</a:t>
             </a:fld>
             <a:endParaRPr lang="en-IN" sz="1200"/>
           </a:p>
